--- a/pptx/Module02_Recueil_des_besoins.pptx
+++ b/pptx/Module02_Recueil_des_besoins.pptx
@@ -12,9 +12,12 @@
     <p:sldId id="260" r:id="rId6"/>
     <p:sldId id="261" r:id="rId7"/>
     <p:sldId id="262" r:id="rId8"/>
+    <p:sldId id="263" r:id="rId9"/>
+    <p:sldId id="264" r:id="rId10"/>
+    <p:sldId id="265" r:id="rId11"/>
   </p:sldIdLst>
   <p:notesMasterIdLst>
-    <p:notesMasterId r:id="rId9"/>
+    <p:notesMasterId r:id="rId12"/>
   </p:notesMasterIdLst>
   <p:sldSz cx="9144000" cy="5143500"/>
   <p:notesSz cx="5143500" cy="9144000"/>
@@ -550,6 +553,94 @@
 </p:notes>
 </file>
 
+<file path=ppt/notesSlides/notesSlide10.xml><?xml version="1.0" encoding="utf-8"?>
+<p:notes xmlns:a="http://schemas.openxmlformats.org/drawingml/2006/main" xmlns:r="http://schemas.openxmlformats.org/officeDocument/2006/relationships" xmlns:p="http://schemas.openxmlformats.org/presentationml/2006/main">
+  <p:cSld>
+    <p:spTree>
+      <p:nvGrpSpPr>
+        <p:cNvPr id="1" name=""/>
+        <p:cNvGrpSpPr/>
+        <p:nvPr/>
+      </p:nvGrpSpPr>
+      <p:grpSpPr>
+        <a:xfrm>
+          <a:off x="0" y="0"/>
+          <a:ext cx="0" cy="0"/>
+          <a:chOff x="0" y="0"/>
+          <a:chExt cx="0" cy="0"/>
+        </a:xfrm>
+      </p:grpSpPr>
+      <p:sp>
+        <p:nvSpPr>
+          <p:cNvPr id="2" name="Slide Image Placeholder 1"/>
+          <p:cNvSpPr>
+            <a:spLocks noGrp="1" noRot="1" noChangeAspect="1"/>
+          </p:cNvSpPr>
+          <p:nvPr>
+            <p:ph type="sldImg"/>
+          </p:nvPr>
+        </p:nvSpPr>
+        <p:spPr/>
+      </p:sp>
+      <p:sp>
+        <p:nvSpPr>
+          <p:cNvPr id="3" name="Notes Placeholder 2"/>
+          <p:cNvSpPr>
+            <a:spLocks noGrp="1"/>
+          </p:cNvSpPr>
+          <p:nvPr>
+            <p:ph type="body" idx="1"/>
+          </p:nvPr>
+        </p:nvSpPr>
+        <p:spPr/>
+        <p:txBody>
+          <a:bodyPr/>
+          <a:lstStyle/>
+          <a:p>
+            <a:r>
+              <a:rPr lang="en-US" dirty="0"/>
+              <a:t/>
+            </a:r>
+            <a:endParaRPr lang="en-US" dirty="0"/>
+          </a:p>
+        </p:txBody>
+      </p:sp>
+      <p:sp>
+        <p:nvSpPr>
+          <p:cNvPr id="4" name="Slide Number Placeholder 3"/>
+          <p:cNvSpPr>
+            <a:spLocks noGrp="1"/>
+          </p:cNvSpPr>
+          <p:nvPr>
+            <p:ph type="sldNum" sz="quarter" idx="10"/>
+          </p:nvPr>
+        </p:nvSpPr>
+        <p:spPr/>
+        <p:txBody>
+          <a:bodyPr/>
+          <a:lstStyle/>
+          <a:p>
+            <a:fld id="{F7021451-1387-4CA6-816F-3879F97B5CBC}" type="slidenum">
+              <a:rPr lang="en-US"/>
+              <a:t>10</a:t>
+            </a:fld>
+            <a:endParaRPr lang="en-US"/>
+          </a:p>
+        </p:txBody>
+      </p:sp>
+    </p:spTree>
+    <p:extLst>
+      <p:ext uri="{BB962C8B-B14F-4D97-AF65-F5344CB8AC3E}">
+        <p14:creationId xmlns:p14="http://schemas.microsoft.com/office/powerpoint/2010/main" val="1024086991"/>
+      </p:ext>
+    </p:extLst>
+  </p:cSld>
+  <p:clrMapOvr>
+    <a:masterClrMapping/>
+  </p:clrMapOvr>
+</p:notes>
+</file>
+
 <file path=ppt/notesSlides/notesSlide2.xml><?xml version="1.0" encoding="utf-8"?>
 <p:notes xmlns:a="http://schemas.openxmlformats.org/drawingml/2006/main" xmlns:r="http://schemas.openxmlformats.org/officeDocument/2006/relationships" xmlns:p="http://schemas.openxmlformats.org/presentationml/2006/main">
   <p:cSld>
@@ -596,7 +687,7 @@
           <a:p>
             <a:r>
               <a:rPr lang="en-US" dirty="0"/>
-              <a:t/>
+              <a:t>Insister : 80% des échecs de projets IT viennent d'une mauvaise compréhension des besoins.</a:t>
             </a:r>
             <a:endParaRPr lang="en-US" dirty="0"/>
           </a:p>
@@ -684,7 +775,7 @@
           <a:p>
             <a:r>
               <a:rPr lang="en-US" dirty="0"/>
-              <a:t/>
+              <a:t>Exercice : lire une liste de demandes et les classifier.</a:t>
             </a:r>
             <a:endParaRPr lang="en-US" dirty="0"/>
           </a:p>
@@ -772,7 +863,7 @@
           <a:p>
             <a:r>
               <a:rPr lang="en-US" dirty="0"/>
-              <a:t/>
+              <a:t>Pour SwissSound, on utilisera l'interview simulée (l'enseignant joue le directeur du studio).</a:t>
             </a:r>
             <a:endParaRPr lang="en-US" dirty="0"/>
           </a:p>
@@ -860,7 +951,7 @@
           <a:p>
             <a:r>
               <a:rPr lang="en-US" dirty="0"/>
-              <a:t/>
+              <a:t>Faire un jeu de rôle en classe : un étudiant pose les questions, l'enseignant répond comme le directeur.</a:t>
             </a:r>
             <a:endParaRPr lang="en-US" dirty="0"/>
           </a:p>
@@ -948,7 +1039,7 @@
           <a:p>
             <a:r>
               <a:rPr lang="en-US" dirty="0"/>
-              <a:t/>
+              <a:t>Ce brief est la base du scénario. Les étudiants doivent en déduire les entités et les données nécessaires.</a:t>
             </a:r>
             <a:endParaRPr lang="en-US" dirty="0"/>
           </a:p>
@@ -1036,7 +1127,7 @@
           <a:p>
             <a:r>
               <a:rPr lang="en-US" dirty="0"/>
-              <a:t/>
+              <a:t>Template à distribuer aux étudiants. Ils doivent le remplir après l'interview.</a:t>
             </a:r>
             <a:endParaRPr lang="en-US" dirty="0"/>
           </a:p>
@@ -1060,6 +1151,182 @@
             <a:fld id="{F7021451-1387-4CA6-816F-3879F97B5CBC}" type="slidenum">
               <a:rPr lang="en-US"/>
               <a:t>7</a:t>
+            </a:fld>
+            <a:endParaRPr lang="en-US"/>
+          </a:p>
+        </p:txBody>
+      </p:sp>
+    </p:spTree>
+    <p:extLst>
+      <p:ext uri="{BB962C8B-B14F-4D97-AF65-F5344CB8AC3E}">
+        <p14:creationId xmlns:p14="http://schemas.microsoft.com/office/powerpoint/2010/main" val="1024086991"/>
+      </p:ext>
+    </p:extLst>
+  </p:cSld>
+  <p:clrMapOvr>
+    <a:masterClrMapping/>
+  </p:clrMapOvr>
+</p:notes>
+</file>
+
+<file path=ppt/notesSlides/notesSlide8.xml><?xml version="1.0" encoding="utf-8"?>
+<p:notes xmlns:a="http://schemas.openxmlformats.org/drawingml/2006/main" xmlns:r="http://schemas.openxmlformats.org/officeDocument/2006/relationships" xmlns:p="http://schemas.openxmlformats.org/presentationml/2006/main">
+  <p:cSld>
+    <p:spTree>
+      <p:nvGrpSpPr>
+        <p:cNvPr id="1" name=""/>
+        <p:cNvGrpSpPr/>
+        <p:nvPr/>
+      </p:nvGrpSpPr>
+      <p:grpSpPr>
+        <a:xfrm>
+          <a:off x="0" y="0"/>
+          <a:ext cx="0" cy="0"/>
+          <a:chOff x="0" y="0"/>
+          <a:chExt cx="0" cy="0"/>
+        </a:xfrm>
+      </p:grpSpPr>
+      <p:sp>
+        <p:nvSpPr>
+          <p:cNvPr id="2" name="Slide Image Placeholder 1"/>
+          <p:cNvSpPr>
+            <a:spLocks noGrp="1" noRot="1" noChangeAspect="1"/>
+          </p:cNvSpPr>
+          <p:nvPr>
+            <p:ph type="sldImg"/>
+          </p:nvPr>
+        </p:nvSpPr>
+        <p:spPr/>
+      </p:sp>
+      <p:sp>
+        <p:nvSpPr>
+          <p:cNvPr id="3" name="Notes Placeholder 2"/>
+          <p:cNvSpPr>
+            <a:spLocks noGrp="1"/>
+          </p:cNvSpPr>
+          <p:nvPr>
+            <p:ph type="body" idx="1"/>
+          </p:nvPr>
+        </p:nvSpPr>
+        <p:spPr/>
+        <p:txBody>
+          <a:bodyPr/>
+          <a:lstStyle/>
+          <a:p>
+            <a:r>
+              <a:rPr lang="en-US" dirty="0"/>
+              <a:t>Travail en binômes. 30 minutes. Correction collective.</a:t>
+            </a:r>
+            <a:endParaRPr lang="en-US" dirty="0"/>
+          </a:p>
+        </p:txBody>
+      </p:sp>
+      <p:sp>
+        <p:nvSpPr>
+          <p:cNvPr id="4" name="Slide Number Placeholder 3"/>
+          <p:cNvSpPr>
+            <a:spLocks noGrp="1"/>
+          </p:cNvSpPr>
+          <p:nvPr>
+            <p:ph type="sldNum" sz="quarter" idx="10"/>
+          </p:nvPr>
+        </p:nvSpPr>
+        <p:spPr/>
+        <p:txBody>
+          <a:bodyPr/>
+          <a:lstStyle/>
+          <a:p>
+            <a:fld id="{F7021451-1387-4CA6-816F-3879F97B5CBC}" type="slidenum">
+              <a:rPr lang="en-US"/>
+              <a:t>8</a:t>
+            </a:fld>
+            <a:endParaRPr lang="en-US"/>
+          </a:p>
+        </p:txBody>
+      </p:sp>
+    </p:spTree>
+    <p:extLst>
+      <p:ext uri="{BB962C8B-B14F-4D97-AF65-F5344CB8AC3E}">
+        <p14:creationId xmlns:p14="http://schemas.microsoft.com/office/powerpoint/2010/main" val="1024086991"/>
+      </p:ext>
+    </p:extLst>
+  </p:cSld>
+  <p:clrMapOvr>
+    <a:masterClrMapping/>
+  </p:clrMapOvr>
+</p:notes>
+</file>
+
+<file path=ppt/notesSlides/notesSlide9.xml><?xml version="1.0" encoding="utf-8"?>
+<p:notes xmlns:a="http://schemas.openxmlformats.org/drawingml/2006/main" xmlns:r="http://schemas.openxmlformats.org/officeDocument/2006/relationships" xmlns:p="http://schemas.openxmlformats.org/presentationml/2006/main">
+  <p:cSld>
+    <p:spTree>
+      <p:nvGrpSpPr>
+        <p:cNvPr id="1" name=""/>
+        <p:cNvGrpSpPr/>
+        <p:nvPr/>
+      </p:nvGrpSpPr>
+      <p:grpSpPr>
+        <a:xfrm>
+          <a:off x="0" y="0"/>
+          <a:ext cx="0" cy="0"/>
+          <a:chOff x="0" y="0"/>
+          <a:chExt cx="0" cy="0"/>
+        </a:xfrm>
+      </p:grpSpPr>
+      <p:sp>
+        <p:nvSpPr>
+          <p:cNvPr id="2" name="Slide Image Placeholder 1"/>
+          <p:cNvSpPr>
+            <a:spLocks noGrp="1" noRot="1" noChangeAspect="1"/>
+          </p:cNvSpPr>
+          <p:nvPr>
+            <p:ph type="sldImg"/>
+          </p:nvPr>
+        </p:nvSpPr>
+        <p:spPr/>
+      </p:sp>
+      <p:sp>
+        <p:nvSpPr>
+          <p:cNvPr id="3" name="Notes Placeholder 2"/>
+          <p:cNvSpPr>
+            <a:spLocks noGrp="1"/>
+          </p:cNvSpPr>
+          <p:nvPr>
+            <p:ph type="body" idx="1"/>
+          </p:nvPr>
+        </p:nvSpPr>
+        <p:spPr/>
+        <p:txBody>
+          <a:bodyPr/>
+          <a:lstStyle/>
+          <a:p>
+            <a:r>
+              <a:rPr lang="en-US" dirty="0"/>
+              <a:t/>
+            </a:r>
+            <a:endParaRPr lang="en-US" dirty="0"/>
+          </a:p>
+        </p:txBody>
+      </p:sp>
+      <p:sp>
+        <p:nvSpPr>
+          <p:cNvPr id="4" name="Slide Number Placeholder 3"/>
+          <p:cNvSpPr>
+            <a:spLocks noGrp="1"/>
+          </p:cNvSpPr>
+          <p:nvPr>
+            <p:ph type="sldNum" sz="quarter" idx="10"/>
+          </p:nvPr>
+        </p:nvSpPr>
+        <p:spPr/>
+        <p:txBody>
+          <a:bodyPr/>
+          <a:lstStyle/>
+          <a:p>
+            <a:fld id="{F7021451-1387-4CA6-816F-3879F97B5CBC}" type="slidenum">
+              <a:rPr lang="en-US"/>
+              <a:t>9</a:t>
             </a:fld>
             <a:endParaRPr lang="en-US"/>
           </a:p>
@@ -1445,7 +1712,7 @@
         </p:blipFill>
         <p:spPr>
           <a:xfrm>
-            <a:off x="3931920" y="457200"/>
+            <a:off x="3931920" y="365760"/>
             <a:ext cx="1280160" cy="1280160"/>
           </a:xfrm>
           <a:prstGeom prst="rect">
@@ -1461,7 +1728,7 @@
         </p:nvSpPr>
         <p:spPr>
           <a:xfrm>
-            <a:off x="457200" y="1828800"/>
+            <a:off x="457200" y="1737360"/>
             <a:ext cx="8229600" cy="457200"/>
           </a:xfrm>
           <a:prstGeom prst="rect">
@@ -1500,8 +1767,8 @@
         </p:nvSpPr>
         <p:spPr>
           <a:xfrm>
-            <a:off x="457200" y="2286000"/>
-            <a:ext cx="8229600" cy="822960"/>
+            <a:off x="274320" y="2194560"/>
+            <a:ext cx="8595360" cy="822960"/>
           </a:xfrm>
           <a:prstGeom prst="rect">
             <a:avLst/>
@@ -1517,7 +1784,7 @@
               <a:buNone/>
             </a:pPr>
             <a:r>
-              <a:rPr lang="en-US" sz="3400" b="1" dirty="0">
+              <a:rPr lang="en-US" sz="3200" b="1" dirty="0">
                 <a:solidFill>
                   <a:srgbClr val="FFFFFF"/>
                 </a:solidFill>
@@ -1527,7 +1794,7 @@
               </a:rPr>
               <a:t>Recueil des besoins</a:t>
             </a:r>
-            <a:endParaRPr lang="en-US" sz="3400" dirty="0"/>
+            <a:endParaRPr lang="en-US" sz="3200" dirty="0"/>
           </a:p>
         </p:txBody>
       </p:sp>
@@ -1539,7 +1806,7 @@
         </p:nvSpPr>
         <p:spPr>
           <a:xfrm>
-            <a:off x="457200" y="3108960"/>
+            <a:off x="457200" y="3017520"/>
             <a:ext cx="8229600" cy="457200"/>
           </a:xfrm>
           <a:prstGeom prst="rect">
@@ -1556,7 +1823,7 @@
               <a:buNone/>
             </a:pPr>
             <a:r>
-              <a:rPr lang="en-US" sz="1600" dirty="0">
+              <a:rPr lang="en-US" sz="1500" dirty="0">
                 <a:solidFill>
                   <a:srgbClr val="CCCCCC"/>
                 </a:solidFill>
@@ -1564,9 +1831,9 @@
                 <a:ea typeface="Calibri" pitchFamily="34" charset="-122"/>
                 <a:cs typeface="Calibri" pitchFamily="34" charset="-120"/>
               </a:rPr>
-              <a:t>Besoins utilisateur/système, interview, cahier des charges</a:t>
-            </a:r>
-            <a:endParaRPr lang="en-US" sz="1600" dirty="0"/>
+              <a:t>Besoins utilisateur/système · Interview · Cahier des charges</a:t>
+            </a:r>
+            <a:endParaRPr lang="en-US" sz="1500" dirty="0"/>
           </a:p>
         </p:txBody>
       </p:sp>
@@ -1597,13 +1864,13 @@
             <a:r>
               <a:rPr lang="en-US" sz="1100" dirty="0">
                 <a:solidFill>
-                  <a:srgbClr val="AAAACC"/>
+                  <a:srgbClr val="AA99CC"/>
                 </a:solidFill>
                 <a:latin typeface="Calibri" pitchFamily="34" charset="0"/>
                 <a:ea typeface="Calibri" pitchFamily="34" charset="-122"/>
                 <a:cs typeface="Calibri" pitchFamily="34" charset="-120"/>
               </a:rPr>
-              <a:t>Unit 4 — Database Design &amp; Development | SwissSound Studios</a:t>
+              <a:t>SwissSound Studios | BTEC: P1 | LO1</a:t>
             </a:r>
             <a:endParaRPr lang="en-US" sz="1100" dirty="0"/>
           </a:p>
@@ -1636,15 +1903,853 @@
             <a:r>
               <a:rPr lang="en-US" sz="1000" dirty="0">
                 <a:solidFill>
-                  <a:srgbClr val="8888AA"/>
+                  <a:srgbClr val="887799"/>
                 </a:solidFill>
                 <a:latin typeface="Calibri" pitchFamily="34" charset="0"/>
                 <a:ea typeface="Calibri" pitchFamily="34" charset="-122"/>
                 <a:cs typeface="Calibri" pitchFamily="34" charset="-120"/>
               </a:rPr>
-              <a:t>BTEC : P1 | LO1</a:t>
+              <a:t>🎵 Unit 4 — Database Design &amp; Development</a:t>
             </a:r>
             <a:endParaRPr lang="en-US" sz="1000" dirty="0"/>
+          </a:p>
+        </p:txBody>
+      </p:sp>
+    </p:spTree>
+  </p:cSld>
+  <p:clrMapOvr>
+    <a:masterClrMapping/>
+  </p:clrMapOvr>
+</p:sld>
+</file>
+
+<file path=ppt/slides/slide10.xml><?xml version="1.0" encoding="utf-8"?>
+<p:sld xmlns:a="http://schemas.openxmlformats.org/drawingml/2006/main" xmlns:r="http://schemas.openxmlformats.org/officeDocument/2006/relationships" xmlns:p="http://schemas.openxmlformats.org/presentationml/2006/main">
+  <p:cSld name="Slide 10">
+    <p:bg>
+      <p:bgPr>
+        <a:solidFill>
+          <a:srgbClr val="F5F7FA"/>
+        </a:solidFill>
+      </p:bgPr>
+    </p:bg>
+    <p:spTree>
+      <p:nvGrpSpPr>
+        <p:cNvPr id="1" name=""/>
+        <p:cNvGrpSpPr/>
+        <p:nvPr/>
+      </p:nvGrpSpPr>
+      <p:grpSpPr>
+        <a:xfrm>
+          <a:off x="0" y="0"/>
+          <a:ext cx="0" cy="0"/>
+          <a:chOff x="0" y="0"/>
+          <a:chExt cx="0" cy="0"/>
+        </a:xfrm>
+      </p:grpSpPr>
+      <p:sp>
+        <p:nvSpPr>
+          <p:cNvPr id="2" name="Text 0"/>
+          <p:cNvSpPr/>
+          <p:nvPr/>
+        </p:nvSpPr>
+        <p:spPr>
+          <a:xfrm>
+            <a:off x="457200" y="137160"/>
+            <a:ext cx="5486400" cy="411480"/>
+          </a:xfrm>
+          <a:prstGeom prst="rect">
+            <a:avLst/>
+          </a:prstGeom>
+          <a:noFill/>
+          <a:ln/>
+        </p:spPr>
+        <p:txBody>
+          <a:bodyPr wrap="square" lIns="0" tIns="0" rIns="0" bIns="0" rtlCol="0" anchor="ctr"/>
+          <a:lstStyle/>
+          <a:p>
+            <a:pPr indent="0" marL="0">
+              <a:buNone/>
+            </a:pPr>
+            <a:r>
+              <a:rPr lang="en-US" sz="1800" b="1" dirty="0">
+                <a:solidFill>
+                  <a:srgbClr val="1B5E20"/>
+                </a:solidFill>
+                <a:latin typeface="Trebuchet MS" pitchFamily="34" charset="0"/>
+                <a:ea typeface="Trebuchet MS" pitchFamily="34" charset="-122"/>
+                <a:cs typeface="Trebuchet MS" pitchFamily="34" charset="-120"/>
+              </a:rPr>
+              <a:t>📋 Mémo Module 2</a:t>
+            </a:r>
+            <a:endParaRPr lang="en-US" sz="1800" dirty="0"/>
+          </a:p>
+        </p:txBody>
+      </p:sp>
+      <p:sp>
+        <p:nvSpPr>
+          <p:cNvPr id="3" name="Shape 1"/>
+          <p:cNvSpPr/>
+          <p:nvPr/>
+        </p:nvSpPr>
+        <p:spPr>
+          <a:xfrm>
+            <a:off x="457200" y="548640"/>
+            <a:ext cx="8229600" cy="274320"/>
+          </a:xfrm>
+          <a:prstGeom prst="rect">
+            <a:avLst/>
+          </a:prstGeom>
+          <a:solidFill>
+            <a:srgbClr val="FFF3E0"/>
+          </a:solidFill>
+          <a:ln/>
+        </p:spPr>
+      </p:sp>
+      <p:sp>
+        <p:nvSpPr>
+          <p:cNvPr id="4" name="Text 2"/>
+          <p:cNvSpPr/>
+          <p:nvPr/>
+        </p:nvSpPr>
+        <p:spPr>
+          <a:xfrm>
+            <a:off x="640080" y="548640"/>
+            <a:ext cx="7772400" cy="274320"/>
+          </a:xfrm>
+          <a:prstGeom prst="rect">
+            <a:avLst/>
+          </a:prstGeom>
+          <a:noFill/>
+          <a:ln/>
+        </p:spPr>
+        <p:txBody>
+          <a:bodyPr wrap="square" lIns="0" tIns="0" rIns="0" bIns="0" rtlCol="0" anchor="ctr"/>
+          <a:lstStyle/>
+          <a:p>
+            <a:pPr indent="0" marL="0">
+              <a:buNone/>
+            </a:pPr>
+            <a:r>
+              <a:rPr lang="en-US" sz="900" b="1" dirty="0">
+                <a:solidFill>
+                  <a:srgbClr val="E65100"/>
+                </a:solidFill>
+                <a:latin typeface="Calibri" pitchFamily="34" charset="0"/>
+                <a:ea typeface="Calibri" pitchFamily="34" charset="-122"/>
+                <a:cs typeface="Calibri" pitchFamily="34" charset="-120"/>
+              </a:rPr>
+              <a:t>🔒 Déblocable après complétion de toutes les phases</a:t>
+            </a:r>
+            <a:endParaRPr lang="en-US" sz="900" dirty="0"/>
+          </a:p>
+        </p:txBody>
+      </p:sp>
+      <p:sp>
+        <p:nvSpPr>
+          <p:cNvPr id="5" name="Shape 3"/>
+          <p:cNvSpPr/>
+          <p:nvPr/>
+        </p:nvSpPr>
+        <p:spPr>
+          <a:xfrm>
+            <a:off x="457200" y="960120"/>
+            <a:ext cx="2286000" cy="475488"/>
+          </a:xfrm>
+          <a:prstGeom prst="rect">
+            <a:avLst/>
+          </a:prstGeom>
+          <a:solidFill>
+            <a:srgbClr val="E8F5E9"/>
+          </a:solidFill>
+          <a:ln/>
+        </p:spPr>
+      </p:sp>
+      <p:sp>
+        <p:nvSpPr>
+          <p:cNvPr id="6" name="Text 4"/>
+          <p:cNvSpPr/>
+          <p:nvPr/>
+        </p:nvSpPr>
+        <p:spPr>
+          <a:xfrm>
+            <a:off x="548640" y="960120"/>
+            <a:ext cx="2103120" cy="475488"/>
+          </a:xfrm>
+          <a:prstGeom prst="rect">
+            <a:avLst/>
+          </a:prstGeom>
+          <a:noFill/>
+          <a:ln/>
+        </p:spPr>
+        <p:txBody>
+          <a:bodyPr wrap="square" lIns="0" tIns="0" rIns="0" bIns="0" rtlCol="0" anchor="ctr"/>
+          <a:lstStyle/>
+          <a:p>
+            <a:pPr indent="0" marL="0">
+              <a:buNone/>
+            </a:pPr>
+            <a:r>
+              <a:rPr lang="en-US" sz="900" b="1" dirty="0">
+                <a:solidFill>
+                  <a:srgbClr val="1B5E20"/>
+                </a:solidFill>
+                <a:latin typeface="Trebuchet MS" pitchFamily="34" charset="0"/>
+                <a:ea typeface="Trebuchet MS" pitchFamily="34" charset="-122"/>
+                <a:cs typeface="Trebuchet MS" pitchFamily="34" charset="-120"/>
+              </a:rPr>
+              <a:t>Besoin utilisateur</a:t>
+            </a:r>
+            <a:endParaRPr lang="en-US" sz="900" dirty="0"/>
+          </a:p>
+        </p:txBody>
+      </p:sp>
+      <p:sp>
+        <p:nvSpPr>
+          <p:cNvPr id="7" name="Shape 5"/>
+          <p:cNvSpPr/>
+          <p:nvPr/>
+        </p:nvSpPr>
+        <p:spPr>
+          <a:xfrm>
+            <a:off x="2743200" y="960120"/>
+            <a:ext cx="5943600" cy="475488"/>
+          </a:xfrm>
+          <a:prstGeom prst="rect">
+            <a:avLst/>
+          </a:prstGeom>
+          <a:solidFill>
+            <a:srgbClr val="E8F5E9"/>
+          </a:solidFill>
+          <a:ln/>
+        </p:spPr>
+      </p:sp>
+      <p:sp>
+        <p:nvSpPr>
+          <p:cNvPr id="8" name="Text 6"/>
+          <p:cNvSpPr/>
+          <p:nvPr/>
+        </p:nvSpPr>
+        <p:spPr>
+          <a:xfrm>
+            <a:off x="2834640" y="960120"/>
+            <a:ext cx="5760720" cy="475488"/>
+          </a:xfrm>
+          <a:prstGeom prst="rect">
+            <a:avLst/>
+          </a:prstGeom>
+          <a:noFill/>
+          <a:ln/>
+        </p:spPr>
+        <p:txBody>
+          <a:bodyPr wrap="square" lIns="0" tIns="0" rIns="0" bIns="0" rtlCol="0" anchor="ctr"/>
+          <a:lstStyle/>
+          <a:p>
+            <a:pPr indent="0" marL="0">
+              <a:buNone/>
+            </a:pPr>
+            <a:r>
+              <a:rPr lang="en-US" sz="900" dirty="0">
+                <a:solidFill>
+                  <a:srgbClr val="333333"/>
+                </a:solidFill>
+                <a:latin typeface="Calibri" pitchFamily="34" charset="0"/>
+                <a:ea typeface="Calibri" pitchFamily="34" charset="-122"/>
+                <a:cs typeface="Calibri" pitchFamily="34" charset="-120"/>
+              </a:rPr>
+              <a:t>Fonctionnel : ce que l'utilisateur veut FAIRE</a:t>
+            </a:r>
+            <a:endParaRPr lang="en-US" sz="900" dirty="0"/>
+          </a:p>
+        </p:txBody>
+      </p:sp>
+      <p:sp>
+        <p:nvSpPr>
+          <p:cNvPr id="9" name="Shape 7"/>
+          <p:cNvSpPr/>
+          <p:nvPr/>
+        </p:nvSpPr>
+        <p:spPr>
+          <a:xfrm>
+            <a:off x="457200" y="1463040"/>
+            <a:ext cx="2286000" cy="475488"/>
+          </a:xfrm>
+          <a:prstGeom prst="rect">
+            <a:avLst/>
+          </a:prstGeom>
+          <a:solidFill>
+            <a:srgbClr val="F0F0F0"/>
+          </a:solidFill>
+          <a:ln/>
+        </p:spPr>
+      </p:sp>
+      <p:sp>
+        <p:nvSpPr>
+          <p:cNvPr id="10" name="Text 8"/>
+          <p:cNvSpPr/>
+          <p:nvPr/>
+        </p:nvSpPr>
+        <p:spPr>
+          <a:xfrm>
+            <a:off x="548640" y="1463040"/>
+            <a:ext cx="2103120" cy="475488"/>
+          </a:xfrm>
+          <a:prstGeom prst="rect">
+            <a:avLst/>
+          </a:prstGeom>
+          <a:noFill/>
+          <a:ln/>
+        </p:spPr>
+        <p:txBody>
+          <a:bodyPr wrap="square" lIns="0" tIns="0" rIns="0" bIns="0" rtlCol="0" anchor="ctr"/>
+          <a:lstStyle/>
+          <a:p>
+            <a:pPr indent="0" marL="0">
+              <a:buNone/>
+            </a:pPr>
+            <a:r>
+              <a:rPr lang="en-US" sz="900" b="1" dirty="0">
+                <a:solidFill>
+                  <a:srgbClr val="1B5E20"/>
+                </a:solidFill>
+                <a:latin typeface="Trebuchet MS" pitchFamily="34" charset="0"/>
+                <a:ea typeface="Trebuchet MS" pitchFamily="34" charset="-122"/>
+                <a:cs typeface="Trebuchet MS" pitchFamily="34" charset="-120"/>
+              </a:rPr>
+              <a:t>Besoin système</a:t>
+            </a:r>
+            <a:endParaRPr lang="en-US" sz="900" dirty="0"/>
+          </a:p>
+        </p:txBody>
+      </p:sp>
+      <p:sp>
+        <p:nvSpPr>
+          <p:cNvPr id="11" name="Shape 9"/>
+          <p:cNvSpPr/>
+          <p:nvPr/>
+        </p:nvSpPr>
+        <p:spPr>
+          <a:xfrm>
+            <a:off x="2743200" y="1463040"/>
+            <a:ext cx="5943600" cy="475488"/>
+          </a:xfrm>
+          <a:prstGeom prst="rect">
+            <a:avLst/>
+          </a:prstGeom>
+          <a:solidFill>
+            <a:srgbClr val="F0F0F0"/>
+          </a:solidFill>
+          <a:ln/>
+        </p:spPr>
+      </p:sp>
+      <p:sp>
+        <p:nvSpPr>
+          <p:cNvPr id="12" name="Text 10"/>
+          <p:cNvSpPr/>
+          <p:nvPr/>
+        </p:nvSpPr>
+        <p:spPr>
+          <a:xfrm>
+            <a:off x="2834640" y="1463040"/>
+            <a:ext cx="5760720" cy="475488"/>
+          </a:xfrm>
+          <a:prstGeom prst="rect">
+            <a:avLst/>
+          </a:prstGeom>
+          <a:noFill/>
+          <a:ln/>
+        </p:spPr>
+        <p:txBody>
+          <a:bodyPr wrap="square" lIns="0" tIns="0" rIns="0" bIns="0" rtlCol="0" anchor="ctr"/>
+          <a:lstStyle/>
+          <a:p>
+            <a:pPr indent="0" marL="0">
+              <a:buNone/>
+            </a:pPr>
+            <a:r>
+              <a:rPr lang="en-US" sz="900" dirty="0">
+                <a:solidFill>
+                  <a:srgbClr val="333333"/>
+                </a:solidFill>
+                <a:latin typeface="Calibri" pitchFamily="34" charset="0"/>
+                <a:ea typeface="Calibri" pitchFamily="34" charset="-122"/>
+                <a:cs typeface="Calibri" pitchFamily="34" charset="-120"/>
+              </a:rPr>
+              <a:t>Technique : performance, sécurité, compatibilité</a:t>
+            </a:r>
+            <a:endParaRPr lang="en-US" sz="900" dirty="0"/>
+          </a:p>
+        </p:txBody>
+      </p:sp>
+      <p:sp>
+        <p:nvSpPr>
+          <p:cNvPr id="13" name="Shape 11"/>
+          <p:cNvSpPr/>
+          <p:nvPr/>
+        </p:nvSpPr>
+        <p:spPr>
+          <a:xfrm>
+            <a:off x="457200" y="1965960"/>
+            <a:ext cx="2286000" cy="475488"/>
+          </a:xfrm>
+          <a:prstGeom prst="rect">
+            <a:avLst/>
+          </a:prstGeom>
+          <a:solidFill>
+            <a:srgbClr val="E8F5E9"/>
+          </a:solidFill>
+          <a:ln/>
+        </p:spPr>
+      </p:sp>
+      <p:sp>
+        <p:nvSpPr>
+          <p:cNvPr id="14" name="Text 12"/>
+          <p:cNvSpPr/>
+          <p:nvPr/>
+        </p:nvSpPr>
+        <p:spPr>
+          <a:xfrm>
+            <a:off x="548640" y="1965960"/>
+            <a:ext cx="2103120" cy="475488"/>
+          </a:xfrm>
+          <a:prstGeom prst="rect">
+            <a:avLst/>
+          </a:prstGeom>
+          <a:noFill/>
+          <a:ln/>
+        </p:spPr>
+        <p:txBody>
+          <a:bodyPr wrap="square" lIns="0" tIns="0" rIns="0" bIns="0" rtlCol="0" anchor="ctr"/>
+          <a:lstStyle/>
+          <a:p>
+            <a:pPr indent="0" marL="0">
+              <a:buNone/>
+            </a:pPr>
+            <a:r>
+              <a:rPr lang="en-US" sz="900" b="1" dirty="0">
+                <a:solidFill>
+                  <a:srgbClr val="1B5E20"/>
+                </a:solidFill>
+                <a:latin typeface="Trebuchet MS" pitchFamily="34" charset="0"/>
+                <a:ea typeface="Trebuchet MS" pitchFamily="34" charset="-122"/>
+                <a:cs typeface="Trebuchet MS" pitchFamily="34" charset="-120"/>
+              </a:rPr>
+              <a:t>Interview</a:t>
+            </a:r>
+            <a:endParaRPr lang="en-US" sz="900" dirty="0"/>
+          </a:p>
+        </p:txBody>
+      </p:sp>
+      <p:sp>
+        <p:nvSpPr>
+          <p:cNvPr id="15" name="Shape 13"/>
+          <p:cNvSpPr/>
+          <p:nvPr/>
+        </p:nvSpPr>
+        <p:spPr>
+          <a:xfrm>
+            <a:off x="2743200" y="1965960"/>
+            <a:ext cx="5943600" cy="475488"/>
+          </a:xfrm>
+          <a:prstGeom prst="rect">
+            <a:avLst/>
+          </a:prstGeom>
+          <a:solidFill>
+            <a:srgbClr val="E8F5E9"/>
+          </a:solidFill>
+          <a:ln/>
+        </p:spPr>
+      </p:sp>
+      <p:sp>
+        <p:nvSpPr>
+          <p:cNvPr id="16" name="Text 14"/>
+          <p:cNvSpPr/>
+          <p:nvPr/>
+        </p:nvSpPr>
+        <p:spPr>
+          <a:xfrm>
+            <a:off x="2834640" y="1965960"/>
+            <a:ext cx="5760720" cy="475488"/>
+          </a:xfrm>
+          <a:prstGeom prst="rect">
+            <a:avLst/>
+          </a:prstGeom>
+          <a:noFill/>
+          <a:ln/>
+        </p:spPr>
+        <p:txBody>
+          <a:bodyPr wrap="square" lIns="0" tIns="0" rIns="0" bIns="0" rtlCol="0" anchor="ctr"/>
+          <a:lstStyle/>
+          <a:p>
+            <a:pPr indent="0" marL="0">
+              <a:buNone/>
+            </a:pPr>
+            <a:r>
+              <a:rPr lang="en-US" sz="900" dirty="0">
+                <a:solidFill>
+                  <a:srgbClr val="333333"/>
+                </a:solidFill>
+                <a:latin typeface="Calibri" pitchFamily="34" charset="0"/>
+                <a:ea typeface="Calibri" pitchFamily="34" charset="-122"/>
+                <a:cs typeface="Calibri" pitchFamily="34" charset="-120"/>
+              </a:rPr>
+              <a:t>Préparer les questions, écouter 80%, reformuler</a:t>
+            </a:r>
+            <a:endParaRPr lang="en-US" sz="900" dirty="0"/>
+          </a:p>
+        </p:txBody>
+      </p:sp>
+      <p:sp>
+        <p:nvSpPr>
+          <p:cNvPr id="17" name="Shape 15"/>
+          <p:cNvSpPr/>
+          <p:nvPr/>
+        </p:nvSpPr>
+        <p:spPr>
+          <a:xfrm>
+            <a:off x="457200" y="2468880"/>
+            <a:ext cx="2286000" cy="475488"/>
+          </a:xfrm>
+          <a:prstGeom prst="rect">
+            <a:avLst/>
+          </a:prstGeom>
+          <a:solidFill>
+            <a:srgbClr val="F0F0F0"/>
+          </a:solidFill>
+          <a:ln/>
+        </p:spPr>
+      </p:sp>
+      <p:sp>
+        <p:nvSpPr>
+          <p:cNvPr id="18" name="Text 16"/>
+          <p:cNvSpPr/>
+          <p:nvPr/>
+        </p:nvSpPr>
+        <p:spPr>
+          <a:xfrm>
+            <a:off x="548640" y="2468880"/>
+            <a:ext cx="2103120" cy="475488"/>
+          </a:xfrm>
+          <a:prstGeom prst="rect">
+            <a:avLst/>
+          </a:prstGeom>
+          <a:noFill/>
+          <a:ln/>
+        </p:spPr>
+        <p:txBody>
+          <a:bodyPr wrap="square" lIns="0" tIns="0" rIns="0" bIns="0" rtlCol="0" anchor="ctr"/>
+          <a:lstStyle/>
+          <a:p>
+            <a:pPr indent="0" marL="0">
+              <a:buNone/>
+            </a:pPr>
+            <a:r>
+              <a:rPr lang="en-US" sz="900" b="1" dirty="0">
+                <a:solidFill>
+                  <a:srgbClr val="1B5E20"/>
+                </a:solidFill>
+                <a:latin typeface="Trebuchet MS" pitchFamily="34" charset="0"/>
+                <a:ea typeface="Trebuchet MS" pitchFamily="34" charset="-122"/>
+                <a:cs typeface="Trebuchet MS" pitchFamily="34" charset="-120"/>
+              </a:rPr>
+              <a:t>Cahier des charges</a:t>
+            </a:r>
+            <a:endParaRPr lang="en-US" sz="900" dirty="0"/>
+          </a:p>
+        </p:txBody>
+      </p:sp>
+      <p:sp>
+        <p:nvSpPr>
+          <p:cNvPr id="19" name="Shape 17"/>
+          <p:cNvSpPr/>
+          <p:nvPr/>
+        </p:nvSpPr>
+        <p:spPr>
+          <a:xfrm>
+            <a:off x="2743200" y="2468880"/>
+            <a:ext cx="5943600" cy="475488"/>
+          </a:xfrm>
+          <a:prstGeom prst="rect">
+            <a:avLst/>
+          </a:prstGeom>
+          <a:solidFill>
+            <a:srgbClr val="F0F0F0"/>
+          </a:solidFill>
+          <a:ln/>
+        </p:spPr>
+      </p:sp>
+      <p:sp>
+        <p:nvSpPr>
+          <p:cNvPr id="20" name="Text 18"/>
+          <p:cNvSpPr/>
+          <p:nvPr/>
+        </p:nvSpPr>
+        <p:spPr>
+          <a:xfrm>
+            <a:off x="2834640" y="2468880"/>
+            <a:ext cx="5760720" cy="475488"/>
+          </a:xfrm>
+          <a:prstGeom prst="rect">
+            <a:avLst/>
+          </a:prstGeom>
+          <a:noFill/>
+          <a:ln/>
+        </p:spPr>
+        <p:txBody>
+          <a:bodyPr wrap="square" lIns="0" tIns="0" rIns="0" bIns="0" rtlCol="0" anchor="ctr"/>
+          <a:lstStyle/>
+          <a:p>
+            <a:pPr indent="0" marL="0">
+              <a:buNone/>
+            </a:pPr>
+            <a:r>
+              <a:rPr lang="en-US" sz="900" dirty="0">
+                <a:solidFill>
+                  <a:srgbClr val="333333"/>
+                </a:solidFill>
+                <a:latin typeface="Calibri" pitchFamily="34" charset="0"/>
+                <a:ea typeface="Calibri" pitchFamily="34" charset="-122"/>
+                <a:cs typeface="Calibri" pitchFamily="34" charset="-120"/>
+              </a:rPr>
+              <a:t>Contexte + besoins U/S + documents + périmètre + contraintes</a:t>
+            </a:r>
+            <a:endParaRPr lang="en-US" sz="900" dirty="0"/>
+          </a:p>
+        </p:txBody>
+      </p:sp>
+      <p:sp>
+        <p:nvSpPr>
+          <p:cNvPr id="21" name="Shape 19"/>
+          <p:cNvSpPr/>
+          <p:nvPr/>
+        </p:nvSpPr>
+        <p:spPr>
+          <a:xfrm>
+            <a:off x="457200" y="2971800"/>
+            <a:ext cx="2286000" cy="475488"/>
+          </a:xfrm>
+          <a:prstGeom prst="rect">
+            <a:avLst/>
+          </a:prstGeom>
+          <a:solidFill>
+            <a:srgbClr val="E8F5E9"/>
+          </a:solidFill>
+          <a:ln/>
+        </p:spPr>
+      </p:sp>
+      <p:sp>
+        <p:nvSpPr>
+          <p:cNvPr id="22" name="Text 20"/>
+          <p:cNvSpPr/>
+          <p:nvPr/>
+        </p:nvSpPr>
+        <p:spPr>
+          <a:xfrm>
+            <a:off x="548640" y="2971800"/>
+            <a:ext cx="2103120" cy="475488"/>
+          </a:xfrm>
+          <a:prstGeom prst="rect">
+            <a:avLst/>
+          </a:prstGeom>
+          <a:noFill/>
+          <a:ln/>
+        </p:spPr>
+        <p:txBody>
+          <a:bodyPr wrap="square" lIns="0" tIns="0" rIns="0" bIns="0" rtlCol="0" anchor="ctr"/>
+          <a:lstStyle/>
+          <a:p>
+            <a:pPr indent="0" marL="0">
+              <a:buNone/>
+            </a:pPr>
+            <a:r>
+              <a:rPr lang="en-US" sz="900" b="1" dirty="0">
+                <a:solidFill>
+                  <a:srgbClr val="1B5E20"/>
+                </a:solidFill>
+                <a:latin typeface="Trebuchet MS" pitchFamily="34" charset="0"/>
+                <a:ea typeface="Trebuchet MS" pitchFamily="34" charset="-122"/>
+                <a:cs typeface="Trebuchet MS" pitchFamily="34" charset="-120"/>
+              </a:rPr>
+              <a:t>SwissSound</a:t>
+            </a:r>
+            <a:endParaRPr lang="en-US" sz="900" dirty="0"/>
+          </a:p>
+        </p:txBody>
+      </p:sp>
+      <p:sp>
+        <p:nvSpPr>
+          <p:cNvPr id="23" name="Shape 21"/>
+          <p:cNvSpPr/>
+          <p:nvPr/>
+        </p:nvSpPr>
+        <p:spPr>
+          <a:xfrm>
+            <a:off x="2743200" y="2971800"/>
+            <a:ext cx="5943600" cy="475488"/>
+          </a:xfrm>
+          <a:prstGeom prst="rect">
+            <a:avLst/>
+          </a:prstGeom>
+          <a:solidFill>
+            <a:srgbClr val="E8F5E9"/>
+          </a:solidFill>
+          <a:ln/>
+        </p:spPr>
+      </p:sp>
+      <p:sp>
+        <p:nvSpPr>
+          <p:cNvPr id="24" name="Text 22"/>
+          <p:cNvSpPr/>
+          <p:nvPr/>
+        </p:nvSpPr>
+        <p:spPr>
+          <a:xfrm>
+            <a:off x="2834640" y="2971800"/>
+            <a:ext cx="5760720" cy="475488"/>
+          </a:xfrm>
+          <a:prstGeom prst="rect">
+            <a:avLst/>
+          </a:prstGeom>
+          <a:noFill/>
+          <a:ln/>
+        </p:spPr>
+        <p:txBody>
+          <a:bodyPr wrap="square" lIns="0" tIns="0" rIns="0" bIns="0" rtlCol="0" anchor="ctr"/>
+          <a:lstStyle/>
+          <a:p>
+            <a:pPr indent="0" marL="0">
+              <a:buNone/>
+            </a:pPr>
+            <a:r>
+              <a:rPr lang="en-US" sz="900" dirty="0">
+                <a:solidFill>
+                  <a:srgbClr val="333333"/>
+                </a:solidFill>
+                <a:latin typeface="Calibri" pitchFamily="34" charset="0"/>
+                <a:ea typeface="Calibri" pitchFamily="34" charset="-122"/>
+                <a:cs typeface="Calibri" pitchFamily="34" charset="-120"/>
+              </a:rPr>
+              <a:t>5 salles, 6 ingénieurs, ~20 artistes, sessions, factures</a:t>
+            </a:r>
+            <a:endParaRPr lang="en-US" sz="900" dirty="0"/>
+          </a:p>
+        </p:txBody>
+      </p:sp>
+      <p:sp>
+        <p:nvSpPr>
+          <p:cNvPr id="25" name="Shape 23"/>
+          <p:cNvSpPr/>
+          <p:nvPr/>
+        </p:nvSpPr>
+        <p:spPr>
+          <a:xfrm>
+            <a:off x="457200" y="3474720"/>
+            <a:ext cx="2286000" cy="475488"/>
+          </a:xfrm>
+          <a:prstGeom prst="rect">
+            <a:avLst/>
+          </a:prstGeom>
+          <a:solidFill>
+            <a:srgbClr val="F0F0F0"/>
+          </a:solidFill>
+          <a:ln/>
+        </p:spPr>
+      </p:sp>
+      <p:sp>
+        <p:nvSpPr>
+          <p:cNvPr id="26" name="Text 24"/>
+          <p:cNvSpPr/>
+          <p:nvPr/>
+        </p:nvSpPr>
+        <p:spPr>
+          <a:xfrm>
+            <a:off x="548640" y="3474720"/>
+            <a:ext cx="2103120" cy="475488"/>
+          </a:xfrm>
+          <a:prstGeom prst="rect">
+            <a:avLst/>
+          </a:prstGeom>
+          <a:noFill/>
+          <a:ln/>
+        </p:spPr>
+        <p:txBody>
+          <a:bodyPr wrap="square" lIns="0" tIns="0" rIns="0" bIns="0" rtlCol="0" anchor="ctr"/>
+          <a:lstStyle/>
+          <a:p>
+            <a:pPr indent="0" marL="0">
+              <a:buNone/>
+            </a:pPr>
+            <a:r>
+              <a:rPr lang="en-US" sz="900" b="1" dirty="0">
+                <a:solidFill>
+                  <a:srgbClr val="1B5E20"/>
+                </a:solidFill>
+                <a:latin typeface="Trebuchet MS" pitchFamily="34" charset="0"/>
+                <a:ea typeface="Trebuchet MS" pitchFamily="34" charset="-122"/>
+                <a:cs typeface="Trebuchet MS" pitchFamily="34" charset="-120"/>
+              </a:rPr>
+              <a:t>Documents métier</a:t>
+            </a:r>
+            <a:endParaRPr lang="en-US" sz="900" dirty="0"/>
+          </a:p>
+        </p:txBody>
+      </p:sp>
+      <p:sp>
+        <p:nvSpPr>
+          <p:cNvPr id="27" name="Shape 25"/>
+          <p:cNvSpPr/>
+          <p:nvPr/>
+        </p:nvSpPr>
+        <p:spPr>
+          <a:xfrm>
+            <a:off x="2743200" y="3474720"/>
+            <a:ext cx="5943600" cy="475488"/>
+          </a:xfrm>
+          <a:prstGeom prst="rect">
+            <a:avLst/>
+          </a:prstGeom>
+          <a:solidFill>
+            <a:srgbClr val="F0F0F0"/>
+          </a:solidFill>
+          <a:ln/>
+        </p:spPr>
+      </p:sp>
+      <p:sp>
+        <p:nvSpPr>
+          <p:cNvPr id="28" name="Text 26"/>
+          <p:cNvSpPr/>
+          <p:nvPr/>
+        </p:nvSpPr>
+        <p:spPr>
+          <a:xfrm>
+            <a:off x="2834640" y="3474720"/>
+            <a:ext cx="5760720" cy="475488"/>
+          </a:xfrm>
+          <a:prstGeom prst="rect">
+            <a:avLst/>
+          </a:prstGeom>
+          <a:noFill/>
+          <a:ln/>
+        </p:spPr>
+        <p:txBody>
+          <a:bodyPr wrap="square" lIns="0" tIns="0" rIns="0" bIns="0" rtlCol="0" anchor="ctr"/>
+          <a:lstStyle/>
+          <a:p>
+            <a:pPr indent="0" marL="0">
+              <a:buNone/>
+            </a:pPr>
+            <a:r>
+              <a:rPr lang="en-US" sz="900" dirty="0">
+                <a:solidFill>
+                  <a:srgbClr val="333333"/>
+                </a:solidFill>
+                <a:latin typeface="Calibri" pitchFamily="34" charset="0"/>
+                <a:ea typeface="Calibri" pitchFamily="34" charset="-122"/>
+                <a:cs typeface="Calibri" pitchFamily="34" charset="-120"/>
+              </a:rPr>
+              <a:t>Fiche artiste, bon de session, facture, inventaire</a:t>
+            </a:r>
+            <a:endParaRPr lang="en-US" sz="900" dirty="0"/>
           </a:p>
         </p:txBody>
       </p:sp>
@@ -1689,7 +2794,7 @@
         <p:spPr>
           <a:xfrm>
             <a:off x="0" y="0"/>
-            <a:ext cx="9144000" cy="73152"/>
+            <a:ext cx="9144000" cy="54864"/>
           </a:xfrm>
           <a:prstGeom prst="rect">
             <a:avLst/>
@@ -1708,8 +2813,8 @@
         </p:nvSpPr>
         <p:spPr>
           <a:xfrm>
-            <a:off x="457200" y="228600"/>
-            <a:ext cx="8229600" cy="640080"/>
+            <a:off x="457200" y="182880"/>
+            <a:ext cx="8229600" cy="594360"/>
           </a:xfrm>
           <a:prstGeom prst="rect">
             <a:avLst/>
@@ -1725,7 +2830,7 @@
               <a:buNone/>
             </a:pPr>
             <a:r>
-              <a:rPr lang="en-US" sz="2600" b="1" dirty="0">
+              <a:rPr lang="en-US" sz="2400" b="1" dirty="0">
                 <a:solidFill>
                   <a:srgbClr val="1B5E20"/>
                 </a:solidFill>
@@ -1733,9 +2838,9 @@
                 <a:ea typeface="Trebuchet MS" pitchFamily="34" charset="-122"/>
                 <a:cs typeface="Trebuchet MS" pitchFamily="34" charset="-120"/>
               </a:rPr>
-              <a:t>Besoins utilisateur vs système</a:t>
-            </a:r>
-            <a:endParaRPr lang="en-US" sz="2600" dirty="0"/>
+              <a:t>Pourquoi recueillir les besoins ?</a:t>
+            </a:r>
+            <a:endParaRPr lang="en-US" sz="2400" dirty="0"/>
           </a:p>
         </p:txBody>
       </p:sp>
@@ -1747,8 +2852,8 @@
         </p:nvSpPr>
         <p:spPr>
           <a:xfrm>
-            <a:off x="457200" y="1051560"/>
-            <a:ext cx="8229600" cy="640080"/>
+            <a:off x="457200" y="914400"/>
+            <a:ext cx="8229600" cy="566928"/>
           </a:xfrm>
           <a:prstGeom prst="rect">
             <a:avLst/>
@@ -1774,8 +2879,8 @@
         </p:nvSpPr>
         <p:spPr>
           <a:xfrm>
-            <a:off x="457200" y="1051560"/>
-            <a:ext cx="54864" cy="640080"/>
+            <a:off x="457200" y="914400"/>
+            <a:ext cx="45720" cy="566928"/>
           </a:xfrm>
           <a:prstGeom prst="rect">
             <a:avLst/>
@@ -1794,8 +2899,8 @@
         </p:nvSpPr>
         <p:spPr>
           <a:xfrm>
-            <a:off x="731520" y="1051560"/>
-            <a:ext cx="7772400" cy="640080"/>
+            <a:off x="685800" y="914400"/>
+            <a:ext cx="7818120" cy="566928"/>
           </a:xfrm>
           <a:prstGeom prst="rect">
             <a:avLst/>
@@ -1811,7 +2916,7 @@
               <a:buNone/>
             </a:pPr>
             <a:r>
-              <a:rPr lang="en-US" sz="1300" dirty="0">
+              <a:rPr lang="en-US" sz="1200" dirty="0">
                 <a:solidFill>
                   <a:srgbClr val="1A1A2E"/>
                 </a:solidFill>
@@ -1819,9 +2924,9 @@
                 <a:ea typeface="Calibri" pitchFamily="34" charset="-122"/>
                 <a:cs typeface="Calibri" pitchFamily="34" charset="-120"/>
               </a:rPr>
-              <a:t>Besoin utilisateur : ce que l'utilisateur veut FAIRE (fonctionnel)</a:t>
-            </a:r>
-            <a:endParaRPr lang="en-US" sz="1300" dirty="0"/>
+              <a:t>Avant de concevoir une BDD, il faut COMPRENDRE le métier</a:t>
+            </a:r>
+            <a:endParaRPr lang="en-US" sz="1200" dirty="0"/>
           </a:p>
         </p:txBody>
       </p:sp>
@@ -1833,8 +2938,8 @@
         </p:nvSpPr>
         <p:spPr>
           <a:xfrm>
-            <a:off x="457200" y="1783080"/>
-            <a:ext cx="8229600" cy="640080"/>
+            <a:off x="457200" y="1508760"/>
+            <a:ext cx="8229600" cy="566928"/>
           </a:xfrm>
           <a:prstGeom prst="rect">
             <a:avLst/>
@@ -1860,8 +2965,8 @@
         </p:nvSpPr>
         <p:spPr>
           <a:xfrm>
-            <a:off x="457200" y="1783080"/>
-            <a:ext cx="54864" cy="640080"/>
+            <a:off x="457200" y="1508760"/>
+            <a:ext cx="45720" cy="566928"/>
           </a:xfrm>
           <a:prstGeom prst="rect">
             <a:avLst/>
@@ -1880,8 +2985,8 @@
         </p:nvSpPr>
         <p:spPr>
           <a:xfrm>
-            <a:off x="731520" y="1783080"/>
-            <a:ext cx="7772400" cy="640080"/>
+            <a:off x="685800" y="1508760"/>
+            <a:ext cx="7818120" cy="566928"/>
           </a:xfrm>
           <a:prstGeom prst="rect">
             <a:avLst/>
@@ -1897,7 +3002,7 @@
               <a:buNone/>
             </a:pPr>
             <a:r>
-              <a:rPr lang="en-US" sz="1300" dirty="0">
+              <a:rPr lang="en-US" sz="1200" dirty="0">
                 <a:solidFill>
                   <a:srgbClr val="1A1A2E"/>
                 </a:solidFill>
@@ -1905,9 +3010,9 @@
                 <a:ea typeface="Calibri" pitchFamily="34" charset="-122"/>
                 <a:cs typeface="Calibri" pitchFamily="34" charset="-120"/>
               </a:rPr>
-              <a:t>Ex: 'Je veux pouvoir ajouter un artiste'</a:t>
-            </a:r>
-            <a:endParaRPr lang="en-US" sz="1300" dirty="0"/>
+              <a:t>Le développeur n'est PAS l'expert du domaine</a:t>
+            </a:r>
+            <a:endParaRPr lang="en-US" sz="1200" dirty="0"/>
           </a:p>
         </p:txBody>
       </p:sp>
@@ -1919,8 +3024,8 @@
         </p:nvSpPr>
         <p:spPr>
           <a:xfrm>
-            <a:off x="457200" y="2514600"/>
-            <a:ext cx="8229600" cy="640080"/>
+            <a:off x="457200" y="2103120"/>
+            <a:ext cx="8229600" cy="566928"/>
           </a:xfrm>
           <a:prstGeom prst="rect">
             <a:avLst/>
@@ -1946,8 +3051,8 @@
         </p:nvSpPr>
         <p:spPr>
           <a:xfrm>
-            <a:off x="457200" y="2514600"/>
-            <a:ext cx="54864" cy="640080"/>
+            <a:off x="457200" y="2103120"/>
+            <a:ext cx="45720" cy="566928"/>
           </a:xfrm>
           <a:prstGeom prst="rect">
             <a:avLst/>
@@ -1966,8 +3071,8 @@
         </p:nvSpPr>
         <p:spPr>
           <a:xfrm>
-            <a:off x="731520" y="2514600"/>
-            <a:ext cx="7772400" cy="640080"/>
+            <a:off x="685800" y="2103120"/>
+            <a:ext cx="7818120" cy="566928"/>
           </a:xfrm>
           <a:prstGeom prst="rect">
             <a:avLst/>
@@ -1983,7 +3088,7 @@
               <a:buNone/>
             </a:pPr>
             <a:r>
-              <a:rPr lang="en-US" sz="1300" dirty="0">
+              <a:rPr lang="en-US" sz="1200" dirty="0">
                 <a:solidFill>
                   <a:srgbClr val="1A1A2E"/>
                 </a:solidFill>
@@ -1991,9 +3096,9 @@
                 <a:ea typeface="Calibri" pitchFamily="34" charset="-122"/>
                 <a:cs typeface="Calibri" pitchFamily="34" charset="-120"/>
               </a:rPr>
-              <a:t>Besoin système : contrainte TECHNIQUE du système</a:t>
-            </a:r>
-            <a:endParaRPr lang="en-US" sz="1300" dirty="0"/>
+              <a:t>Le client sait CE QU'IL VEUT, pas COMMENT le faire</a:t>
+            </a:r>
+            <a:endParaRPr lang="en-US" sz="1200" dirty="0"/>
           </a:p>
         </p:txBody>
       </p:sp>
@@ -2005,8 +3110,8 @@
         </p:nvSpPr>
         <p:spPr>
           <a:xfrm>
-            <a:off x="457200" y="3246120"/>
-            <a:ext cx="8229600" cy="640080"/>
+            <a:off x="457200" y="2697480"/>
+            <a:ext cx="8229600" cy="566928"/>
           </a:xfrm>
           <a:prstGeom prst="rect">
             <a:avLst/>
@@ -2032,8 +3137,8 @@
         </p:nvSpPr>
         <p:spPr>
           <a:xfrm>
-            <a:off x="457200" y="3246120"/>
-            <a:ext cx="54864" cy="640080"/>
+            <a:off x="457200" y="2697480"/>
+            <a:ext cx="45720" cy="566928"/>
           </a:xfrm>
           <a:prstGeom prst="rect">
             <a:avLst/>
@@ -2052,8 +3157,8 @@
         </p:nvSpPr>
         <p:spPr>
           <a:xfrm>
-            <a:off x="731520" y="3246120"/>
-            <a:ext cx="7772400" cy="640080"/>
+            <a:off x="685800" y="2697480"/>
+            <a:ext cx="7818120" cy="566928"/>
           </a:xfrm>
           <a:prstGeom prst="rect">
             <a:avLst/>
@@ -2069,7 +3174,7 @@
               <a:buNone/>
             </a:pPr>
             <a:r>
-              <a:rPr lang="en-US" sz="1300" dirty="0">
+              <a:rPr lang="en-US" sz="1200" dirty="0">
                 <a:solidFill>
                   <a:srgbClr val="1A1A2E"/>
                 </a:solidFill>
@@ -2077,9 +3182,9 @@
                 <a:ea typeface="Calibri" pitchFamily="34" charset="-122"/>
                 <a:cs typeface="Calibri" pitchFamily="34" charset="-120"/>
               </a:rPr>
-              <a:t>Ex: 'Temps de réponse &lt; 2 secondes', 'Backup quotidien'</a:t>
-            </a:r>
-            <a:endParaRPr lang="en-US" sz="1300" dirty="0"/>
+              <a:t>Notre rôle : traduire les besoins métier en structure de données</a:t>
+            </a:r>
+            <a:endParaRPr lang="en-US" sz="1200" dirty="0"/>
           </a:p>
         </p:txBody>
       </p:sp>
@@ -2091,8 +3196,8 @@
         </p:nvSpPr>
         <p:spPr>
           <a:xfrm>
-            <a:off x="457200" y="3977640"/>
-            <a:ext cx="8229600" cy="640080"/>
+            <a:off x="457200" y="3291840"/>
+            <a:ext cx="8229600" cy="566928"/>
           </a:xfrm>
           <a:prstGeom prst="rect">
             <a:avLst/>
@@ -2118,8 +3223,8 @@
         </p:nvSpPr>
         <p:spPr>
           <a:xfrm>
-            <a:off x="457200" y="3977640"/>
-            <a:ext cx="54864" cy="640080"/>
+            <a:off x="457200" y="3291840"/>
+            <a:ext cx="45720" cy="566928"/>
           </a:xfrm>
           <a:prstGeom prst="rect">
             <a:avLst/>
@@ -2138,8 +3243,8 @@
         </p:nvSpPr>
         <p:spPr>
           <a:xfrm>
-            <a:off x="731520" y="3977640"/>
-            <a:ext cx="7772400" cy="640080"/>
+            <a:off x="685800" y="3291840"/>
+            <a:ext cx="7818120" cy="566928"/>
           </a:xfrm>
           <a:prstGeom prst="rect">
             <a:avLst/>
@@ -2155,7 +3260,7 @@
               <a:buNone/>
             </a:pPr>
             <a:r>
-              <a:rPr lang="en-US" sz="1300" dirty="0">
+              <a:rPr lang="en-US" sz="1200" dirty="0">
                 <a:solidFill>
                   <a:srgbClr val="1A1A2E"/>
                 </a:solidFill>
@@ -2163,48 +3268,95 @@
                 <a:ea typeface="Calibri" pitchFamily="34" charset="-122"/>
                 <a:cs typeface="Calibri" pitchFamily="34" charset="-120"/>
               </a:rPr>
-              <a:t>Les deux sont nécessaires dans le cahier des charges</a:t>
-            </a:r>
-            <a:endParaRPr lang="en-US" sz="1300" dirty="0"/>
-          </a:p>
-        </p:txBody>
-      </p:sp>
-      <p:sp>
-        <p:nvSpPr>
-          <p:cNvPr id="19" name="Text 17"/>
-          <p:cNvSpPr/>
-          <p:nvPr/>
-        </p:nvSpPr>
-        <p:spPr>
-          <a:xfrm>
-            <a:off x="8229600" y="4754880"/>
-            <a:ext cx="731520" cy="274320"/>
-          </a:xfrm>
-          <a:prstGeom prst="rect">
-            <a:avLst/>
-          </a:prstGeom>
-          <a:noFill/>
-          <a:ln/>
-        </p:spPr>
-        <p:txBody>
-          <a:bodyPr wrap="square" lIns="0" tIns="0" rIns="0" bIns="0" rtlCol="0" anchor="ctr"/>
-          <a:lstStyle/>
-          <a:p>
-            <a:pPr algn="r" indent="0" marL="0">
-              <a:buNone/>
-            </a:pPr>
-            <a:r>
-              <a:rPr lang="en-US" sz="900" dirty="0">
-                <a:solidFill>
-                  <a:srgbClr val="AAAAAA"/>
+              <a:t>Erreur fréquente : coder directement sans comprendre le contexte</a:t>
+            </a:r>
+            <a:endParaRPr lang="en-US" sz="1200" dirty="0"/>
+          </a:p>
+        </p:txBody>
+      </p:sp>
+      <p:sp>
+        <p:nvSpPr>
+          <p:cNvPr id="19" name="Shape 17"/>
+          <p:cNvSpPr/>
+          <p:nvPr/>
+        </p:nvSpPr>
+        <p:spPr>
+          <a:xfrm>
+            <a:off x="457200" y="3886200"/>
+            <a:ext cx="8229600" cy="566928"/>
+          </a:xfrm>
+          <a:prstGeom prst="rect">
+            <a:avLst/>
+          </a:prstGeom>
+          <a:solidFill>
+            <a:srgbClr val="E8F5E9"/>
+          </a:solidFill>
+          <a:ln/>
+          <a:effectLst>
+            <a:outerShdw sx="100000" sy="100000" kx="0" ky="0" algn="bl" rotWithShape="0" blurRad="50800" dist="25400" dir="8100000">
+              <a:srgbClr val="000000">
+                <a:alpha val="12000"/>
+              </a:srgbClr>
+            </a:outerShdw>
+          </a:effectLst>
+        </p:spPr>
+      </p:sp>
+      <p:sp>
+        <p:nvSpPr>
+          <p:cNvPr id="20" name="Shape 18"/>
+          <p:cNvSpPr/>
+          <p:nvPr/>
+        </p:nvSpPr>
+        <p:spPr>
+          <a:xfrm>
+            <a:off x="457200" y="3886200"/>
+            <a:ext cx="45720" cy="566928"/>
+          </a:xfrm>
+          <a:prstGeom prst="rect">
+            <a:avLst/>
+          </a:prstGeom>
+          <a:solidFill>
+            <a:srgbClr val="2E7D32"/>
+          </a:solidFill>
+          <a:ln/>
+        </p:spPr>
+      </p:sp>
+      <p:sp>
+        <p:nvSpPr>
+          <p:cNvPr id="21" name="Text 19"/>
+          <p:cNvSpPr/>
+          <p:nvPr/>
+        </p:nvSpPr>
+        <p:spPr>
+          <a:xfrm>
+            <a:off x="685800" y="3886200"/>
+            <a:ext cx="7818120" cy="566928"/>
+          </a:xfrm>
+          <a:prstGeom prst="rect">
+            <a:avLst/>
+          </a:prstGeom>
+          <a:noFill/>
+          <a:ln/>
+        </p:spPr>
+        <p:txBody>
+          <a:bodyPr wrap="square" lIns="0" tIns="0" rIns="0" bIns="0" rtlCol="0" anchor="ctr"/>
+          <a:lstStyle/>
+          <a:p>
+            <a:pPr indent="0" marL="0">
+              <a:buNone/>
+            </a:pPr>
+            <a:r>
+              <a:rPr lang="en-US" sz="1200" dirty="0">
+                <a:solidFill>
+                  <a:srgbClr val="1A1A2E"/>
                 </a:solidFill>
                 <a:latin typeface="Calibri" pitchFamily="34" charset="0"/>
                 <a:ea typeface="Calibri" pitchFamily="34" charset="-122"/>
                 <a:cs typeface="Calibri" pitchFamily="34" charset="-120"/>
               </a:rPr>
-              <a:t>2/6</a:t>
-            </a:r>
-            <a:endParaRPr lang="en-US" sz="900" dirty="0"/>
+              <a:t>→ Résultat : BDD inadaptée, coûteuse à corriger</a:t>
+            </a:r>
+            <a:endParaRPr lang="en-US" sz="1200" dirty="0"/>
           </a:p>
         </p:txBody>
       </p:sp>
@@ -2249,7 +3401,7 @@
         <p:spPr>
           <a:xfrm>
             <a:off x="0" y="0"/>
-            <a:ext cx="9144000" cy="73152"/>
+            <a:ext cx="9144000" cy="54864"/>
           </a:xfrm>
           <a:prstGeom prst="rect">
             <a:avLst/>
@@ -2268,8 +3420,8 @@
         </p:nvSpPr>
         <p:spPr>
           <a:xfrm>
-            <a:off x="457200" y="228600"/>
-            <a:ext cx="8229600" cy="640080"/>
+            <a:off x="457200" y="182880"/>
+            <a:ext cx="8229600" cy="548640"/>
           </a:xfrm>
           <a:prstGeom prst="rect">
             <a:avLst/>
@@ -2285,7 +3437,7 @@
               <a:buNone/>
             </a:pPr>
             <a:r>
-              <a:rPr lang="en-US" sz="2600" b="1" dirty="0">
+              <a:rPr lang="en-US" sz="2400" b="1" dirty="0">
                 <a:solidFill>
                   <a:srgbClr val="1B5E20"/>
                 </a:solidFill>
@@ -2293,9 +3445,9 @@
                 <a:ea typeface="Trebuchet MS" pitchFamily="34" charset="-122"/>
                 <a:cs typeface="Trebuchet MS" pitchFamily="34" charset="-120"/>
               </a:rPr>
-              <a:t>Techniques de recueil</a:t>
-            </a:r>
-            <a:endParaRPr lang="en-US" sz="2600" dirty="0"/>
+              <a:t>Besoins utilisateur vs système</a:t>
+            </a:r>
+            <a:endParaRPr lang="en-US" sz="2400" dirty="0"/>
           </a:p>
         </p:txBody>
       </p:sp>
@@ -2307,8 +3459,8 @@
         </p:nvSpPr>
         <p:spPr>
           <a:xfrm>
-            <a:off x="457200" y="1051560"/>
-            <a:ext cx="8229600" cy="640080"/>
+            <a:off x="274320" y="914400"/>
+            <a:ext cx="4206240" cy="3840480"/>
           </a:xfrm>
           <a:prstGeom prst="rect">
             <a:avLst/>
@@ -2334,8 +3486,8 @@
         </p:nvSpPr>
         <p:spPr>
           <a:xfrm>
-            <a:off x="457200" y="1051560"/>
-            <a:ext cx="54864" cy="640080"/>
+            <a:off x="274320" y="914400"/>
+            <a:ext cx="4206240" cy="457200"/>
           </a:xfrm>
           <a:prstGeom prst="rect">
             <a:avLst/>
@@ -2354,8 +3506,8 @@
         </p:nvSpPr>
         <p:spPr>
           <a:xfrm>
-            <a:off x="731520" y="1051560"/>
-            <a:ext cx="7772400" cy="640080"/>
+            <a:off x="457200" y="914400"/>
+            <a:ext cx="3840480" cy="457200"/>
           </a:xfrm>
           <a:prstGeom prst="rect">
             <a:avLst/>
@@ -2371,36 +3523,270 @@
               <a:buNone/>
             </a:pPr>
             <a:r>
-              <a:rPr lang="en-US" sz="1300" dirty="0">
-                <a:solidFill>
-                  <a:srgbClr val="1A1A2E"/>
+              <a:rPr lang="en-US" sz="1400" b="1" dirty="0">
+                <a:solidFill>
+                  <a:srgbClr val="FFFFFF"/>
+                </a:solidFill>
+                <a:latin typeface="Trebuchet MS" pitchFamily="34" charset="0"/>
+                <a:ea typeface="Trebuchet MS" pitchFamily="34" charset="-122"/>
+                <a:cs typeface="Trebuchet MS" pitchFamily="34" charset="-120"/>
+              </a:rPr>
+              <a:t>👤 Besoins UTILISATEUR</a:t>
+            </a:r>
+            <a:endParaRPr lang="en-US" sz="1400" dirty="0"/>
+          </a:p>
+        </p:txBody>
+      </p:sp>
+      <p:sp>
+        <p:nvSpPr>
+          <p:cNvPr id="7" name="Text 5"/>
+          <p:cNvSpPr/>
+          <p:nvPr/>
+        </p:nvSpPr>
+        <p:spPr>
+          <a:xfrm>
+            <a:off x="457200" y="1463040"/>
+            <a:ext cx="3840480" cy="411480"/>
+          </a:xfrm>
+          <a:prstGeom prst="rect">
+            <a:avLst/>
+          </a:prstGeom>
+          <a:noFill/>
+          <a:ln/>
+        </p:spPr>
+        <p:txBody>
+          <a:bodyPr wrap="square" lIns="0" tIns="0" rIns="0" bIns="0" rtlCol="0" anchor="ctr"/>
+          <a:lstStyle/>
+          <a:p>
+            <a:pPr indent="0" marL="0">
+              <a:buNone/>
+            </a:pPr>
+            <a:r>
+              <a:rPr lang="en-US" sz="1100" dirty="0">
+                <a:solidFill>
+                  <a:srgbClr val="333333"/>
                 </a:solidFill>
                 <a:latin typeface="Calibri" pitchFamily="34" charset="0"/>
                 <a:ea typeface="Calibri" pitchFamily="34" charset="-122"/>
                 <a:cs typeface="Calibri" pitchFamily="34" charset="-120"/>
               </a:rPr>
-              <a:t>Interview : questions directes au client/utilisateur</a:t>
-            </a:r>
-            <a:endParaRPr lang="en-US" sz="1300" dirty="0"/>
-          </a:p>
-        </p:txBody>
-      </p:sp>
-      <p:sp>
-        <p:nvSpPr>
-          <p:cNvPr id="7" name="Shape 5"/>
-          <p:cNvSpPr/>
-          <p:nvPr/>
-        </p:nvSpPr>
-        <p:spPr>
-          <a:xfrm>
-            <a:off x="457200" y="1783080"/>
-            <a:ext cx="8229600" cy="640080"/>
-          </a:xfrm>
-          <a:prstGeom prst="rect">
-            <a:avLst/>
-          </a:prstGeom>
-          <a:solidFill>
-            <a:srgbClr val="E8F5E9"/>
+              <a:t>→ Ce que l'utilisateur veut FAIRE</a:t>
+            </a:r>
+            <a:endParaRPr lang="en-US" sz="1100" dirty="0"/>
+          </a:p>
+        </p:txBody>
+      </p:sp>
+      <p:sp>
+        <p:nvSpPr>
+          <p:cNvPr id="8" name="Text 6"/>
+          <p:cNvSpPr/>
+          <p:nvPr/>
+        </p:nvSpPr>
+        <p:spPr>
+          <a:xfrm>
+            <a:off x="457200" y="1920240"/>
+            <a:ext cx="3840480" cy="411480"/>
+          </a:xfrm>
+          <a:prstGeom prst="rect">
+            <a:avLst/>
+          </a:prstGeom>
+          <a:noFill/>
+          <a:ln/>
+        </p:spPr>
+        <p:txBody>
+          <a:bodyPr wrap="square" lIns="0" tIns="0" rIns="0" bIns="0" rtlCol="0" anchor="ctr"/>
+          <a:lstStyle/>
+          <a:p>
+            <a:pPr indent="0" marL="0">
+              <a:buNone/>
+            </a:pPr>
+            <a:r>
+              <a:rPr lang="en-US" sz="1100" dirty="0">
+                <a:solidFill>
+                  <a:srgbClr val="333333"/>
+                </a:solidFill>
+                <a:latin typeface="Calibri" pitchFamily="34" charset="0"/>
+                <a:ea typeface="Calibri" pitchFamily="34" charset="-122"/>
+                <a:cs typeface="Calibri" pitchFamily="34" charset="-120"/>
+              </a:rPr>
+              <a:t>→ Fonctionnalités visibles</a:t>
+            </a:r>
+            <a:endParaRPr lang="en-US" sz="1100" dirty="0"/>
+          </a:p>
+        </p:txBody>
+      </p:sp>
+      <p:sp>
+        <p:nvSpPr>
+          <p:cNvPr id="9" name="Text 7"/>
+          <p:cNvSpPr/>
+          <p:nvPr/>
+        </p:nvSpPr>
+        <p:spPr>
+          <a:xfrm>
+            <a:off x="457200" y="2377440"/>
+            <a:ext cx="3840480" cy="411480"/>
+          </a:xfrm>
+          <a:prstGeom prst="rect">
+            <a:avLst/>
+          </a:prstGeom>
+          <a:noFill/>
+          <a:ln/>
+        </p:spPr>
+        <p:txBody>
+          <a:bodyPr wrap="square" lIns="0" tIns="0" rIns="0" bIns="0" rtlCol="0" anchor="ctr"/>
+          <a:lstStyle/>
+          <a:p>
+            <a:pPr indent="0" marL="0">
+              <a:buNone/>
+            </a:pPr>
+            <a:r>
+              <a:rPr lang="en-US" sz="1100" dirty="0">
+                <a:solidFill>
+                  <a:srgbClr val="333333"/>
+                </a:solidFill>
+                <a:latin typeface="Calibri" pitchFamily="34" charset="0"/>
+                <a:ea typeface="Calibri" pitchFamily="34" charset="-122"/>
+                <a:cs typeface="Calibri" pitchFamily="34" charset="-120"/>
+              </a:rPr>
+              <a:t>→ 'Ajouter un artiste'</a:t>
+            </a:r>
+            <a:endParaRPr lang="en-US" sz="1100" dirty="0"/>
+          </a:p>
+        </p:txBody>
+      </p:sp>
+      <p:sp>
+        <p:nvSpPr>
+          <p:cNvPr id="10" name="Text 8"/>
+          <p:cNvSpPr/>
+          <p:nvPr/>
+        </p:nvSpPr>
+        <p:spPr>
+          <a:xfrm>
+            <a:off x="457200" y="2834640"/>
+            <a:ext cx="3840480" cy="411480"/>
+          </a:xfrm>
+          <a:prstGeom prst="rect">
+            <a:avLst/>
+          </a:prstGeom>
+          <a:noFill/>
+          <a:ln/>
+        </p:spPr>
+        <p:txBody>
+          <a:bodyPr wrap="square" lIns="0" tIns="0" rIns="0" bIns="0" rtlCol="0" anchor="ctr"/>
+          <a:lstStyle/>
+          <a:p>
+            <a:pPr indent="0" marL="0">
+              <a:buNone/>
+            </a:pPr>
+            <a:r>
+              <a:rPr lang="en-US" sz="1100" dirty="0">
+                <a:solidFill>
+                  <a:srgbClr val="333333"/>
+                </a:solidFill>
+                <a:latin typeface="Calibri" pitchFamily="34" charset="0"/>
+                <a:ea typeface="Calibri" pitchFamily="34" charset="-122"/>
+                <a:cs typeface="Calibri" pitchFamily="34" charset="-120"/>
+              </a:rPr>
+              <a:t>→ 'Voir le planning des sessions'</a:t>
+            </a:r>
+            <a:endParaRPr lang="en-US" sz="1100" dirty="0"/>
+          </a:p>
+        </p:txBody>
+      </p:sp>
+      <p:sp>
+        <p:nvSpPr>
+          <p:cNvPr id="11" name="Text 9"/>
+          <p:cNvSpPr/>
+          <p:nvPr/>
+        </p:nvSpPr>
+        <p:spPr>
+          <a:xfrm>
+            <a:off x="457200" y="3291840"/>
+            <a:ext cx="3840480" cy="411480"/>
+          </a:xfrm>
+          <a:prstGeom prst="rect">
+            <a:avLst/>
+          </a:prstGeom>
+          <a:noFill/>
+          <a:ln/>
+        </p:spPr>
+        <p:txBody>
+          <a:bodyPr wrap="square" lIns="0" tIns="0" rIns="0" bIns="0" rtlCol="0" anchor="ctr"/>
+          <a:lstStyle/>
+          <a:p>
+            <a:pPr indent="0" marL="0">
+              <a:buNone/>
+            </a:pPr>
+            <a:r>
+              <a:rPr lang="en-US" sz="1100" dirty="0">
+                <a:solidFill>
+                  <a:srgbClr val="333333"/>
+                </a:solidFill>
+                <a:latin typeface="Calibri" pitchFamily="34" charset="0"/>
+                <a:ea typeface="Calibri" pitchFamily="34" charset="-122"/>
+                <a:cs typeface="Calibri" pitchFamily="34" charset="-120"/>
+              </a:rPr>
+              <a:t>→ 'Générer une facture PDF'</a:t>
+            </a:r>
+            <a:endParaRPr lang="en-US" sz="1100" dirty="0"/>
+          </a:p>
+        </p:txBody>
+      </p:sp>
+      <p:sp>
+        <p:nvSpPr>
+          <p:cNvPr id="12" name="Text 10"/>
+          <p:cNvSpPr/>
+          <p:nvPr/>
+        </p:nvSpPr>
+        <p:spPr>
+          <a:xfrm>
+            <a:off x="457200" y="3749040"/>
+            <a:ext cx="3840480" cy="411480"/>
+          </a:xfrm>
+          <a:prstGeom prst="rect">
+            <a:avLst/>
+          </a:prstGeom>
+          <a:noFill/>
+          <a:ln/>
+        </p:spPr>
+        <p:txBody>
+          <a:bodyPr wrap="square" lIns="0" tIns="0" rIns="0" bIns="0" rtlCol="0" anchor="ctr"/>
+          <a:lstStyle/>
+          <a:p>
+            <a:pPr indent="0" marL="0">
+              <a:buNone/>
+            </a:pPr>
+            <a:r>
+              <a:rPr lang="en-US" sz="1100" dirty="0">
+                <a:solidFill>
+                  <a:srgbClr val="333333"/>
+                </a:solidFill>
+                <a:latin typeface="Calibri" pitchFamily="34" charset="0"/>
+                <a:ea typeface="Calibri" pitchFamily="34" charset="-122"/>
+                <a:cs typeface="Calibri" pitchFamily="34" charset="-120"/>
+              </a:rPr>
+              <a:t>→ 'Rechercher un album par genre'</a:t>
+            </a:r>
+            <a:endParaRPr lang="en-US" sz="1100" dirty="0"/>
+          </a:p>
+        </p:txBody>
+      </p:sp>
+      <p:sp>
+        <p:nvSpPr>
+          <p:cNvPr id="13" name="Shape 11"/>
+          <p:cNvSpPr/>
+          <p:nvPr/>
+        </p:nvSpPr>
+        <p:spPr>
+          <a:xfrm>
+            <a:off x="4663440" y="914400"/>
+            <a:ext cx="4206240" cy="3840480"/>
+          </a:xfrm>
+          <a:prstGeom prst="rect">
+            <a:avLst/>
+          </a:prstGeom>
+          <a:solidFill>
+            <a:srgbClr val="FFFFFF"/>
           </a:solidFill>
           <a:ln/>
           <a:effectLst>
@@ -2414,34 +3800,34 @@
       </p:sp>
       <p:sp>
         <p:nvSpPr>
-          <p:cNvPr id="8" name="Shape 6"/>
-          <p:cNvSpPr/>
-          <p:nvPr/>
-        </p:nvSpPr>
-        <p:spPr>
-          <a:xfrm>
-            <a:off x="457200" y="1783080"/>
-            <a:ext cx="54864" cy="640080"/>
-          </a:xfrm>
-          <a:prstGeom prst="rect">
-            <a:avLst/>
-          </a:prstGeom>
-          <a:solidFill>
-            <a:srgbClr val="2E7D32"/>
-          </a:solidFill>
-          <a:ln/>
-        </p:spPr>
-      </p:sp>
-      <p:sp>
-        <p:nvSpPr>
-          <p:cNvPr id="9" name="Text 7"/>
-          <p:cNvSpPr/>
-          <p:nvPr/>
-        </p:nvSpPr>
-        <p:spPr>
-          <a:xfrm>
-            <a:off x="731520" y="1783080"/>
-            <a:ext cx="7772400" cy="640080"/>
+          <p:cNvPr id="14" name="Shape 12"/>
+          <p:cNvSpPr/>
+          <p:nvPr/>
+        </p:nvSpPr>
+        <p:spPr>
+          <a:xfrm>
+            <a:off x="4663440" y="914400"/>
+            <a:ext cx="4206240" cy="457200"/>
+          </a:xfrm>
+          <a:prstGeom prst="rect">
+            <a:avLst/>
+          </a:prstGeom>
+          <a:solidFill>
+            <a:srgbClr val="FF6F00"/>
+          </a:solidFill>
+          <a:ln/>
+        </p:spPr>
+      </p:sp>
+      <p:sp>
+        <p:nvSpPr>
+          <p:cNvPr id="15" name="Text 13"/>
+          <p:cNvSpPr/>
+          <p:nvPr/>
+        </p:nvSpPr>
+        <p:spPr>
+          <a:xfrm>
+            <a:off x="4846320" y="914400"/>
+            <a:ext cx="3840480" cy="457200"/>
           </a:xfrm>
           <a:prstGeom prst="rect">
             <a:avLst/>
@@ -2457,77 +3843,69 @@
               <a:buNone/>
             </a:pPr>
             <a:r>
-              <a:rPr lang="en-US" sz="1300" dirty="0">
-                <a:solidFill>
-                  <a:srgbClr val="1A1A2E"/>
+              <a:rPr lang="en-US" sz="1400" b="1" dirty="0">
+                <a:solidFill>
+                  <a:srgbClr val="FFFFFF"/>
+                </a:solidFill>
+                <a:latin typeface="Trebuchet MS" pitchFamily="34" charset="0"/>
+                <a:ea typeface="Trebuchet MS" pitchFamily="34" charset="-122"/>
+                <a:cs typeface="Trebuchet MS" pitchFamily="34" charset="-120"/>
+              </a:rPr>
+              <a:t>⚙️ Besoins SYSTÈME</a:t>
+            </a:r>
+            <a:endParaRPr lang="en-US" sz="1400" dirty="0"/>
+          </a:p>
+        </p:txBody>
+      </p:sp>
+      <p:sp>
+        <p:nvSpPr>
+          <p:cNvPr id="16" name="Text 14"/>
+          <p:cNvSpPr/>
+          <p:nvPr/>
+        </p:nvSpPr>
+        <p:spPr>
+          <a:xfrm>
+            <a:off x="4846320" y="1463040"/>
+            <a:ext cx="3840480" cy="411480"/>
+          </a:xfrm>
+          <a:prstGeom prst="rect">
+            <a:avLst/>
+          </a:prstGeom>
+          <a:noFill/>
+          <a:ln/>
+        </p:spPr>
+        <p:txBody>
+          <a:bodyPr wrap="square" lIns="0" tIns="0" rIns="0" bIns="0" rtlCol="0" anchor="ctr"/>
+          <a:lstStyle/>
+          <a:p>
+            <a:pPr indent="0" marL="0">
+              <a:buNone/>
+            </a:pPr>
+            <a:r>
+              <a:rPr lang="en-US" sz="1100" dirty="0">
+                <a:solidFill>
+                  <a:srgbClr val="333333"/>
                 </a:solidFill>
                 <a:latin typeface="Calibri" pitchFamily="34" charset="0"/>
                 <a:ea typeface="Calibri" pitchFamily="34" charset="-122"/>
                 <a:cs typeface="Calibri" pitchFamily="34" charset="-120"/>
               </a:rPr>
-              <a:t>Observation : regarder comment le travail se fait</a:t>
-            </a:r>
-            <a:endParaRPr lang="en-US" sz="1300" dirty="0"/>
-          </a:p>
-        </p:txBody>
-      </p:sp>
-      <p:sp>
-        <p:nvSpPr>
-          <p:cNvPr id="10" name="Shape 8"/>
-          <p:cNvSpPr/>
-          <p:nvPr/>
-        </p:nvSpPr>
-        <p:spPr>
-          <a:xfrm>
-            <a:off x="457200" y="2514600"/>
-            <a:ext cx="8229600" cy="640080"/>
-          </a:xfrm>
-          <a:prstGeom prst="rect">
-            <a:avLst/>
-          </a:prstGeom>
-          <a:solidFill>
-            <a:srgbClr val="FFFFFF"/>
-          </a:solidFill>
-          <a:ln/>
-          <a:effectLst>
-            <a:outerShdw sx="100000" sy="100000" kx="0" ky="0" algn="bl" rotWithShape="0" blurRad="50800" dist="25400" dir="8100000">
-              <a:srgbClr val="000000">
-                <a:alpha val="12000"/>
-              </a:srgbClr>
-            </a:outerShdw>
-          </a:effectLst>
-        </p:spPr>
-      </p:sp>
-      <p:sp>
-        <p:nvSpPr>
-          <p:cNvPr id="11" name="Shape 9"/>
-          <p:cNvSpPr/>
-          <p:nvPr/>
-        </p:nvSpPr>
-        <p:spPr>
-          <a:xfrm>
-            <a:off x="457200" y="2514600"/>
-            <a:ext cx="54864" cy="640080"/>
-          </a:xfrm>
-          <a:prstGeom prst="rect">
-            <a:avLst/>
-          </a:prstGeom>
-          <a:solidFill>
-            <a:srgbClr val="2E7D32"/>
-          </a:solidFill>
-          <a:ln/>
-        </p:spPr>
-      </p:sp>
-      <p:sp>
-        <p:nvSpPr>
-          <p:cNvPr id="12" name="Text 10"/>
-          <p:cNvSpPr/>
-          <p:nvPr/>
-        </p:nvSpPr>
-        <p:spPr>
-          <a:xfrm>
-            <a:off x="731520" y="2514600"/>
-            <a:ext cx="7772400" cy="640080"/>
+              <a:t>→ Contraintes TECHNIQUES</a:t>
+            </a:r>
+            <a:endParaRPr lang="en-US" sz="1100" dirty="0"/>
+          </a:p>
+        </p:txBody>
+      </p:sp>
+      <p:sp>
+        <p:nvSpPr>
+          <p:cNvPr id="17" name="Text 15"/>
+          <p:cNvSpPr/>
+          <p:nvPr/>
+        </p:nvSpPr>
+        <p:spPr>
+          <a:xfrm>
+            <a:off x="4846320" y="1920240"/>
+            <a:ext cx="3840480" cy="411480"/>
           </a:xfrm>
           <a:prstGeom prst="rect">
             <a:avLst/>
@@ -2543,77 +3921,30 @@
               <a:buNone/>
             </a:pPr>
             <a:r>
-              <a:rPr lang="en-US" sz="1300" dirty="0">
-                <a:solidFill>
-                  <a:srgbClr val="1A1A2E"/>
+              <a:rPr lang="en-US" sz="1100" dirty="0">
+                <a:solidFill>
+                  <a:srgbClr val="333333"/>
                 </a:solidFill>
                 <a:latin typeface="Calibri" pitchFamily="34" charset="0"/>
                 <a:ea typeface="Calibri" pitchFamily="34" charset="-122"/>
                 <a:cs typeface="Calibri" pitchFamily="34" charset="-120"/>
               </a:rPr>
-              <a:t>Questionnaire : formulaire écrit (grand nombre de personnes)</a:t>
-            </a:r>
-            <a:endParaRPr lang="en-US" sz="1300" dirty="0"/>
-          </a:p>
-        </p:txBody>
-      </p:sp>
-      <p:sp>
-        <p:nvSpPr>
-          <p:cNvPr id="13" name="Shape 11"/>
-          <p:cNvSpPr/>
-          <p:nvPr/>
-        </p:nvSpPr>
-        <p:spPr>
-          <a:xfrm>
-            <a:off x="457200" y="3246120"/>
-            <a:ext cx="8229600" cy="640080"/>
-          </a:xfrm>
-          <a:prstGeom prst="rect">
-            <a:avLst/>
-          </a:prstGeom>
-          <a:solidFill>
-            <a:srgbClr val="E8F5E9"/>
-          </a:solidFill>
-          <a:ln/>
-          <a:effectLst>
-            <a:outerShdw sx="100000" sy="100000" kx="0" ky="0" algn="bl" rotWithShape="0" blurRad="50800" dist="25400" dir="8100000">
-              <a:srgbClr val="000000">
-                <a:alpha val="12000"/>
-              </a:srgbClr>
-            </a:outerShdw>
-          </a:effectLst>
-        </p:spPr>
-      </p:sp>
-      <p:sp>
-        <p:nvSpPr>
-          <p:cNvPr id="14" name="Shape 12"/>
-          <p:cNvSpPr/>
-          <p:nvPr/>
-        </p:nvSpPr>
-        <p:spPr>
-          <a:xfrm>
-            <a:off x="457200" y="3246120"/>
-            <a:ext cx="54864" cy="640080"/>
-          </a:xfrm>
-          <a:prstGeom prst="rect">
-            <a:avLst/>
-          </a:prstGeom>
-          <a:solidFill>
-            <a:srgbClr val="2E7D32"/>
-          </a:solidFill>
-          <a:ln/>
-        </p:spPr>
-      </p:sp>
-      <p:sp>
-        <p:nvSpPr>
-          <p:cNvPr id="15" name="Text 13"/>
-          <p:cNvSpPr/>
-          <p:nvPr/>
-        </p:nvSpPr>
-        <p:spPr>
-          <a:xfrm>
-            <a:off x="731520" y="3246120"/>
-            <a:ext cx="7772400" cy="640080"/>
+              <a:t>→ Performance, sécurité, fiabilité</a:t>
+            </a:r>
+            <a:endParaRPr lang="en-US" sz="1100" dirty="0"/>
+          </a:p>
+        </p:txBody>
+      </p:sp>
+      <p:sp>
+        <p:nvSpPr>
+          <p:cNvPr id="18" name="Text 16"/>
+          <p:cNvSpPr/>
+          <p:nvPr/>
+        </p:nvSpPr>
+        <p:spPr>
+          <a:xfrm>
+            <a:off x="4846320" y="2377440"/>
+            <a:ext cx="3840480" cy="411480"/>
           </a:xfrm>
           <a:prstGeom prst="rect">
             <a:avLst/>
@@ -2629,77 +3960,30 @@
               <a:buNone/>
             </a:pPr>
             <a:r>
-              <a:rPr lang="en-US" sz="1300" dirty="0">
-                <a:solidFill>
-                  <a:srgbClr val="1A1A2E"/>
+              <a:rPr lang="en-US" sz="1100" dirty="0">
+                <a:solidFill>
+                  <a:srgbClr val="333333"/>
                 </a:solidFill>
                 <a:latin typeface="Calibri" pitchFamily="34" charset="0"/>
                 <a:ea typeface="Calibri" pitchFamily="34" charset="-122"/>
                 <a:cs typeface="Calibri" pitchFamily="34" charset="-120"/>
               </a:rPr>
-              <a:t>Analyse documentaire : étudier les documents existants</a:t>
-            </a:r>
-            <a:endParaRPr lang="en-US" sz="1300" dirty="0"/>
-          </a:p>
-        </p:txBody>
-      </p:sp>
-      <p:sp>
-        <p:nvSpPr>
-          <p:cNvPr id="16" name="Shape 14"/>
-          <p:cNvSpPr/>
-          <p:nvPr/>
-        </p:nvSpPr>
-        <p:spPr>
-          <a:xfrm>
-            <a:off x="457200" y="3977640"/>
-            <a:ext cx="8229600" cy="640080"/>
-          </a:xfrm>
-          <a:prstGeom prst="rect">
-            <a:avLst/>
-          </a:prstGeom>
-          <a:solidFill>
-            <a:srgbClr val="FFFFFF"/>
-          </a:solidFill>
-          <a:ln/>
-          <a:effectLst>
-            <a:outerShdw sx="100000" sy="100000" kx="0" ky="0" algn="bl" rotWithShape="0" blurRad="50800" dist="25400" dir="8100000">
-              <a:srgbClr val="000000">
-                <a:alpha val="12000"/>
-              </a:srgbClr>
-            </a:outerShdw>
-          </a:effectLst>
-        </p:spPr>
-      </p:sp>
-      <p:sp>
-        <p:nvSpPr>
-          <p:cNvPr id="17" name="Shape 15"/>
-          <p:cNvSpPr/>
-          <p:nvPr/>
-        </p:nvSpPr>
-        <p:spPr>
-          <a:xfrm>
-            <a:off x="457200" y="3977640"/>
-            <a:ext cx="54864" cy="640080"/>
-          </a:xfrm>
-          <a:prstGeom prst="rect">
-            <a:avLst/>
-          </a:prstGeom>
-          <a:solidFill>
-            <a:srgbClr val="2E7D32"/>
-          </a:solidFill>
-          <a:ln/>
-        </p:spPr>
-      </p:sp>
-      <p:sp>
-        <p:nvSpPr>
-          <p:cNvPr id="18" name="Text 16"/>
-          <p:cNvSpPr/>
-          <p:nvPr/>
-        </p:nvSpPr>
-        <p:spPr>
-          <a:xfrm>
-            <a:off x="731520" y="3977640"/>
-            <a:ext cx="7772400" cy="640080"/>
+              <a:t>→ 'Temps de réponse &lt; 2 sec'</a:t>
+            </a:r>
+            <a:endParaRPr lang="en-US" sz="1100" dirty="0"/>
+          </a:p>
+        </p:txBody>
+      </p:sp>
+      <p:sp>
+        <p:nvSpPr>
+          <p:cNvPr id="19" name="Text 17"/>
+          <p:cNvSpPr/>
+          <p:nvPr/>
+        </p:nvSpPr>
+        <p:spPr>
+          <a:xfrm>
+            <a:off x="4846320" y="2834640"/>
+            <a:ext cx="3840480" cy="411480"/>
           </a:xfrm>
           <a:prstGeom prst="rect">
             <a:avLst/>
@@ -2715,56 +3999,95 @@
               <a:buNone/>
             </a:pPr>
             <a:r>
-              <a:rPr lang="en-US" sz="1300" dirty="0">
-                <a:solidFill>
-                  <a:srgbClr val="1A1A2E"/>
+              <a:rPr lang="en-US" sz="1100" dirty="0">
+                <a:solidFill>
+                  <a:srgbClr val="333333"/>
                 </a:solidFill>
                 <a:latin typeface="Calibri" pitchFamily="34" charset="0"/>
                 <a:ea typeface="Calibri" pitchFamily="34" charset="-122"/>
                 <a:cs typeface="Calibri" pitchFamily="34" charset="-120"/>
               </a:rPr>
-              <a:t>Prototypage : maquette pour valider les besoins</a:t>
-            </a:r>
-            <a:endParaRPr lang="en-US" sz="1300" dirty="0"/>
-          </a:p>
-        </p:txBody>
-      </p:sp>
-      <p:sp>
-        <p:nvSpPr>
-          <p:cNvPr id="19" name="Text 17"/>
-          <p:cNvSpPr/>
-          <p:nvPr/>
-        </p:nvSpPr>
-        <p:spPr>
-          <a:xfrm>
-            <a:off x="8229600" y="4754880"/>
-            <a:ext cx="731520" cy="274320"/>
-          </a:xfrm>
-          <a:prstGeom prst="rect">
-            <a:avLst/>
-          </a:prstGeom>
-          <a:noFill/>
-          <a:ln/>
-        </p:spPr>
-        <p:txBody>
-          <a:bodyPr wrap="square" lIns="0" tIns="0" rIns="0" bIns="0" rtlCol="0" anchor="ctr"/>
-          <a:lstStyle/>
-          <a:p>
-            <a:pPr algn="r" indent="0" marL="0">
-              <a:buNone/>
-            </a:pPr>
-            <a:r>
-              <a:rPr lang="en-US" sz="900" dirty="0">
-                <a:solidFill>
-                  <a:srgbClr val="AAAAAA"/>
+              <a:t>→ 'Backup automatique chaque nuit'</a:t>
+            </a:r>
+            <a:endParaRPr lang="en-US" sz="1100" dirty="0"/>
+          </a:p>
+        </p:txBody>
+      </p:sp>
+      <p:sp>
+        <p:nvSpPr>
+          <p:cNvPr id="20" name="Text 18"/>
+          <p:cNvSpPr/>
+          <p:nvPr/>
+        </p:nvSpPr>
+        <p:spPr>
+          <a:xfrm>
+            <a:off x="4846320" y="3291840"/>
+            <a:ext cx="3840480" cy="411480"/>
+          </a:xfrm>
+          <a:prstGeom prst="rect">
+            <a:avLst/>
+          </a:prstGeom>
+          <a:noFill/>
+          <a:ln/>
+        </p:spPr>
+        <p:txBody>
+          <a:bodyPr wrap="square" lIns="0" tIns="0" rIns="0" bIns="0" rtlCol="0" anchor="ctr"/>
+          <a:lstStyle/>
+          <a:p>
+            <a:pPr indent="0" marL="0">
+              <a:buNone/>
+            </a:pPr>
+            <a:r>
+              <a:rPr lang="en-US" sz="1100" dirty="0">
+                <a:solidFill>
+                  <a:srgbClr val="333333"/>
                 </a:solidFill>
                 <a:latin typeface="Calibri" pitchFamily="34" charset="0"/>
                 <a:ea typeface="Calibri" pitchFamily="34" charset="-122"/>
                 <a:cs typeface="Calibri" pitchFamily="34" charset="-120"/>
               </a:rPr>
-              <a:t>3/6</a:t>
-            </a:r>
-            <a:endParaRPr lang="en-US" sz="900" dirty="0"/>
+              <a:t>→ 'Chiffrement des données sensibles'</a:t>
+            </a:r>
+            <a:endParaRPr lang="en-US" sz="1100" dirty="0"/>
+          </a:p>
+        </p:txBody>
+      </p:sp>
+      <p:sp>
+        <p:nvSpPr>
+          <p:cNvPr id="21" name="Text 19"/>
+          <p:cNvSpPr/>
+          <p:nvPr/>
+        </p:nvSpPr>
+        <p:spPr>
+          <a:xfrm>
+            <a:off x="4846320" y="3749040"/>
+            <a:ext cx="3840480" cy="411480"/>
+          </a:xfrm>
+          <a:prstGeom prst="rect">
+            <a:avLst/>
+          </a:prstGeom>
+          <a:noFill/>
+          <a:ln/>
+        </p:spPr>
+        <p:txBody>
+          <a:bodyPr wrap="square" lIns="0" tIns="0" rIns="0" bIns="0" rtlCol="0" anchor="ctr"/>
+          <a:lstStyle/>
+          <a:p>
+            <a:pPr indent="0" marL="0">
+              <a:buNone/>
+            </a:pPr>
+            <a:r>
+              <a:rPr lang="en-US" sz="1100" dirty="0">
+                <a:solidFill>
+                  <a:srgbClr val="333333"/>
+                </a:solidFill>
+                <a:latin typeface="Calibri" pitchFamily="34" charset="0"/>
+                <a:ea typeface="Calibri" pitchFamily="34" charset="-122"/>
+                <a:cs typeface="Calibri" pitchFamily="34" charset="-120"/>
+              </a:rPr>
+              <a:t>→ 'Compatible Windows et Mac'</a:t>
+            </a:r>
+            <a:endParaRPr lang="en-US" sz="1100" dirty="0"/>
           </a:p>
         </p:txBody>
       </p:sp>
@@ -2809,7 +4132,7 @@
         <p:spPr>
           <a:xfrm>
             <a:off x="0" y="0"/>
-            <a:ext cx="9144000" cy="73152"/>
+            <a:ext cx="9144000" cy="54864"/>
           </a:xfrm>
           <a:prstGeom prst="rect">
             <a:avLst/>
@@ -2828,8 +4151,8 @@
         </p:nvSpPr>
         <p:spPr>
           <a:xfrm>
-            <a:off x="457200" y="228600"/>
-            <a:ext cx="8229600" cy="640080"/>
+            <a:off x="457200" y="182880"/>
+            <a:ext cx="8229600" cy="594360"/>
           </a:xfrm>
           <a:prstGeom prst="rect">
             <a:avLst/>
@@ -2845,7 +4168,7 @@
               <a:buNone/>
             </a:pPr>
             <a:r>
-              <a:rPr lang="en-US" sz="2600" b="1" dirty="0">
+              <a:rPr lang="en-US" sz="2400" b="1" dirty="0">
                 <a:solidFill>
                   <a:srgbClr val="1B5E20"/>
                 </a:solidFill>
@@ -2853,9 +4176,9 @@
                 <a:ea typeface="Trebuchet MS" pitchFamily="34" charset="-122"/>
                 <a:cs typeface="Trebuchet MS" pitchFamily="34" charset="-120"/>
               </a:rPr>
-              <a:t>SwissSound : le brief client</a:t>
-            </a:r>
-            <a:endParaRPr lang="en-US" sz="2600" dirty="0"/>
+              <a:t>Techniques de recueil des besoins</a:t>
+            </a:r>
+            <a:endParaRPr lang="en-US" sz="2400" dirty="0"/>
           </a:p>
         </p:txBody>
       </p:sp>
@@ -2867,8 +4190,8 @@
         </p:nvSpPr>
         <p:spPr>
           <a:xfrm>
-            <a:off x="457200" y="1051560"/>
-            <a:ext cx="8229600" cy="640080"/>
+            <a:off x="457200" y="914400"/>
+            <a:ext cx="8229600" cy="566928"/>
           </a:xfrm>
           <a:prstGeom prst="rect">
             <a:avLst/>
@@ -2894,8 +4217,8 @@
         </p:nvSpPr>
         <p:spPr>
           <a:xfrm>
-            <a:off x="457200" y="1051560"/>
-            <a:ext cx="54864" cy="640080"/>
+            <a:off x="457200" y="914400"/>
+            <a:ext cx="45720" cy="566928"/>
           </a:xfrm>
           <a:prstGeom prst="rect">
             <a:avLst/>
@@ -2914,8 +4237,8 @@
         </p:nvSpPr>
         <p:spPr>
           <a:xfrm>
-            <a:off x="731520" y="1051560"/>
-            <a:ext cx="7772400" cy="640080"/>
+            <a:off x="685800" y="914400"/>
+            <a:ext cx="7818120" cy="566928"/>
           </a:xfrm>
           <a:prstGeom prst="rect">
             <a:avLst/>
@@ -2931,7 +4254,7 @@
               <a:buNone/>
             </a:pPr>
             <a:r>
-              <a:rPr lang="en-US" sz="1300" dirty="0">
+              <a:rPr lang="en-US" sz="1200" dirty="0">
                 <a:solidFill>
                   <a:srgbClr val="1A1A2E"/>
                 </a:solidFill>
@@ -2939,9 +4262,9 @@
                 <a:ea typeface="Calibri" pitchFamily="34" charset="-122"/>
                 <a:cs typeface="Calibri" pitchFamily="34" charset="-120"/>
               </a:rPr>
-              <a:t>Studio d'enregistrement en Suisse romande</a:t>
-            </a:r>
-            <a:endParaRPr lang="en-US" sz="1300" dirty="0"/>
+              <a:t>📋 Interview : questions directes au client (notre méthode principale)</a:t>
+            </a:r>
+            <a:endParaRPr lang="en-US" sz="1200" dirty="0"/>
           </a:p>
         </p:txBody>
       </p:sp>
@@ -2953,8 +4276,8 @@
         </p:nvSpPr>
         <p:spPr>
           <a:xfrm>
-            <a:off x="457200" y="1783080"/>
-            <a:ext cx="8229600" cy="640080"/>
+            <a:off x="457200" y="1508760"/>
+            <a:ext cx="8229600" cy="566928"/>
           </a:xfrm>
           <a:prstGeom prst="rect">
             <a:avLst/>
@@ -2980,8 +4303,8 @@
         </p:nvSpPr>
         <p:spPr>
           <a:xfrm>
-            <a:off x="457200" y="1783080"/>
-            <a:ext cx="54864" cy="640080"/>
+            <a:off x="457200" y="1508760"/>
+            <a:ext cx="45720" cy="566928"/>
           </a:xfrm>
           <a:prstGeom prst="rect">
             <a:avLst/>
@@ -3000,8 +4323,8 @@
         </p:nvSpPr>
         <p:spPr>
           <a:xfrm>
-            <a:off x="731520" y="1783080"/>
-            <a:ext cx="7772400" cy="640080"/>
+            <a:off x="685800" y="1508760"/>
+            <a:ext cx="7818120" cy="566928"/>
           </a:xfrm>
           <a:prstGeom prst="rect">
             <a:avLst/>
@@ -3017,7 +4340,7 @@
               <a:buNone/>
             </a:pPr>
             <a:r>
-              <a:rPr lang="en-US" sz="1300" dirty="0">
+              <a:rPr lang="en-US" sz="1200" dirty="0">
                 <a:solidFill>
                   <a:srgbClr val="1A1A2E"/>
                 </a:solidFill>
@@ -3025,9 +4348,9 @@
                 <a:ea typeface="Calibri" pitchFamily="34" charset="-122"/>
                 <a:cs typeface="Calibri" pitchFamily="34" charset="-120"/>
               </a:rPr>
-              <a:t>Gère : artistes, albums, sessions, salles, ingénieurs, factures</a:t>
-            </a:r>
-            <a:endParaRPr lang="en-US" sz="1300" dirty="0"/>
+              <a:t>👁️ Observation : regarder comment le travail se fait actuellement</a:t>
+            </a:r>
+            <a:endParaRPr lang="en-US" sz="1200" dirty="0"/>
           </a:p>
         </p:txBody>
       </p:sp>
@@ -3039,8 +4362,8 @@
         </p:nvSpPr>
         <p:spPr>
           <a:xfrm>
-            <a:off x="457200" y="2514600"/>
-            <a:ext cx="8229600" cy="640080"/>
+            <a:off x="457200" y="2103120"/>
+            <a:ext cx="8229600" cy="566928"/>
           </a:xfrm>
           <a:prstGeom prst="rect">
             <a:avLst/>
@@ -3066,8 +4389,8 @@
         </p:nvSpPr>
         <p:spPr>
           <a:xfrm>
-            <a:off x="457200" y="2514600"/>
-            <a:ext cx="54864" cy="640080"/>
+            <a:off x="457200" y="2103120"/>
+            <a:ext cx="45720" cy="566928"/>
           </a:xfrm>
           <a:prstGeom prst="rect">
             <a:avLst/>
@@ -3086,8 +4409,8 @@
         </p:nvSpPr>
         <p:spPr>
           <a:xfrm>
-            <a:off x="731520" y="2514600"/>
-            <a:ext cx="7772400" cy="640080"/>
+            <a:off x="685800" y="2103120"/>
+            <a:ext cx="7818120" cy="566928"/>
           </a:xfrm>
           <a:prstGeom prst="rect">
             <a:avLst/>
@@ -3103,7 +4426,7 @@
               <a:buNone/>
             </a:pPr>
             <a:r>
-              <a:rPr lang="en-US" sz="1300" dirty="0">
+              <a:rPr lang="en-US" sz="1200" dirty="0">
                 <a:solidFill>
                   <a:srgbClr val="1A1A2E"/>
                 </a:solidFill>
@@ -3111,9 +4434,9 @@
                 <a:ea typeface="Calibri" pitchFamily="34" charset="-122"/>
                 <a:cs typeface="Calibri" pitchFamily="34" charset="-120"/>
               </a:rPr>
-              <a:t>5 salles, 6 ingénieurs, ~20 artistes actifs</a:t>
-            </a:r>
-            <a:endParaRPr lang="en-US" sz="1300" dirty="0"/>
+              <a:t>📝 Questionnaire : formulaire écrit (utile pour beaucoup de personnes)</a:t>
+            </a:r>
+            <a:endParaRPr lang="en-US" sz="1200" dirty="0"/>
           </a:p>
         </p:txBody>
       </p:sp>
@@ -3125,8 +4448,8 @@
         </p:nvSpPr>
         <p:spPr>
           <a:xfrm>
-            <a:off x="457200" y="3246120"/>
-            <a:ext cx="8229600" cy="640080"/>
+            <a:off x="457200" y="2697480"/>
+            <a:ext cx="8229600" cy="566928"/>
           </a:xfrm>
           <a:prstGeom prst="rect">
             <a:avLst/>
@@ -3152,8 +4475,8 @@
         </p:nvSpPr>
         <p:spPr>
           <a:xfrm>
-            <a:off x="457200" y="3246120"/>
-            <a:ext cx="54864" cy="640080"/>
+            <a:off x="457200" y="2697480"/>
+            <a:ext cx="45720" cy="566928"/>
           </a:xfrm>
           <a:prstGeom prst="rect">
             <a:avLst/>
@@ -3172,8 +4495,8 @@
         </p:nvSpPr>
         <p:spPr>
           <a:xfrm>
-            <a:off x="731520" y="3246120"/>
-            <a:ext cx="7772400" cy="640080"/>
+            <a:off x="685800" y="2697480"/>
+            <a:ext cx="7818120" cy="566928"/>
           </a:xfrm>
           <a:prstGeom prst="rect">
             <a:avLst/>
@@ -3189,7 +4512,7 @@
               <a:buNone/>
             </a:pPr>
             <a:r>
-              <a:rPr lang="en-US" sz="1300" dirty="0">
+              <a:rPr lang="en-US" sz="1200" dirty="0">
                 <a:solidFill>
                   <a:srgbClr val="1A1A2E"/>
                 </a:solidFill>
@@ -3197,9 +4520,9 @@
                 <a:ea typeface="Calibri" pitchFamily="34" charset="-122"/>
                 <a:cs typeface="Calibri" pitchFamily="34" charset="-120"/>
               </a:rPr>
-              <a:t>Besoin : suivi des réservations, facturation, inventaire matériel</a:t>
-            </a:r>
-            <a:endParaRPr lang="en-US" sz="1300" dirty="0"/>
+              <a:t>📄 Analyse documentaire : étudier les documents existants (fiches, factures)</a:t>
+            </a:r>
+            <a:endParaRPr lang="en-US" sz="1200" dirty="0"/>
           </a:p>
         </p:txBody>
       </p:sp>
@@ -3211,8 +4534,8 @@
         </p:nvSpPr>
         <p:spPr>
           <a:xfrm>
-            <a:off x="457200" y="3977640"/>
-            <a:ext cx="8229600" cy="640080"/>
+            <a:off x="457200" y="3291840"/>
+            <a:ext cx="8229600" cy="566928"/>
           </a:xfrm>
           <a:prstGeom prst="rect">
             <a:avLst/>
@@ -3238,8 +4561,8 @@
         </p:nvSpPr>
         <p:spPr>
           <a:xfrm>
-            <a:off x="457200" y="3977640"/>
-            <a:ext cx="54864" cy="640080"/>
+            <a:off x="457200" y="3291840"/>
+            <a:ext cx="45720" cy="566928"/>
           </a:xfrm>
           <a:prstGeom prst="rect">
             <a:avLst/>
@@ -3258,8 +4581,8 @@
         </p:nvSpPr>
         <p:spPr>
           <a:xfrm>
-            <a:off x="731520" y="3977640"/>
-            <a:ext cx="7772400" cy="640080"/>
+            <a:off x="685800" y="3291840"/>
+            <a:ext cx="7818120" cy="566928"/>
           </a:xfrm>
           <a:prstGeom prst="rect">
             <a:avLst/>
@@ -3275,7 +4598,7 @@
               <a:buNone/>
             </a:pPr>
             <a:r>
-              <a:rPr lang="en-US" sz="1300" dirty="0">
+              <a:rPr lang="en-US" sz="1200" dirty="0">
                 <a:solidFill>
                   <a:srgbClr val="1A1A2E"/>
                 </a:solidFill>
@@ -3283,48 +4606,95 @@
                 <a:ea typeface="Calibri" pitchFamily="34" charset="-122"/>
                 <a:cs typeface="Calibri" pitchFamily="34" charset="-120"/>
               </a:rPr>
-              <a:t>Vous êtes le développeur — le directeur est votre client !</a:t>
-            </a:r>
-            <a:endParaRPr lang="en-US" sz="1300" dirty="0"/>
-          </a:p>
-        </p:txBody>
-      </p:sp>
-      <p:sp>
-        <p:nvSpPr>
-          <p:cNvPr id="19" name="Text 17"/>
-          <p:cNvSpPr/>
-          <p:nvPr/>
-        </p:nvSpPr>
-        <p:spPr>
-          <a:xfrm>
-            <a:off x="8229600" y="4754880"/>
-            <a:ext cx="731520" cy="274320"/>
-          </a:xfrm>
-          <a:prstGeom prst="rect">
-            <a:avLst/>
-          </a:prstGeom>
-          <a:noFill/>
-          <a:ln/>
-        </p:spPr>
-        <p:txBody>
-          <a:bodyPr wrap="square" lIns="0" tIns="0" rIns="0" bIns="0" rtlCol="0" anchor="ctr"/>
-          <a:lstStyle/>
-          <a:p>
-            <a:pPr algn="r" indent="0" marL="0">
-              <a:buNone/>
-            </a:pPr>
-            <a:r>
-              <a:rPr lang="en-US" sz="900" dirty="0">
-                <a:solidFill>
-                  <a:srgbClr val="AAAAAA"/>
+              <a:t>🖥️ Prototypage : maquette pour valider les besoins visuellement</a:t>
+            </a:r>
+            <a:endParaRPr lang="en-US" sz="1200" dirty="0"/>
+          </a:p>
+        </p:txBody>
+      </p:sp>
+      <p:sp>
+        <p:nvSpPr>
+          <p:cNvPr id="19" name="Shape 17"/>
+          <p:cNvSpPr/>
+          <p:nvPr/>
+        </p:nvSpPr>
+        <p:spPr>
+          <a:xfrm>
+            <a:off x="457200" y="3886200"/>
+            <a:ext cx="8229600" cy="566928"/>
+          </a:xfrm>
+          <a:prstGeom prst="rect">
+            <a:avLst/>
+          </a:prstGeom>
+          <a:solidFill>
+            <a:srgbClr val="E8F5E9"/>
+          </a:solidFill>
+          <a:ln/>
+          <a:effectLst>
+            <a:outerShdw sx="100000" sy="100000" kx="0" ky="0" algn="bl" rotWithShape="0" blurRad="50800" dist="25400" dir="8100000">
+              <a:srgbClr val="000000">
+                <a:alpha val="12000"/>
+              </a:srgbClr>
+            </a:outerShdw>
+          </a:effectLst>
+        </p:spPr>
+      </p:sp>
+      <p:sp>
+        <p:nvSpPr>
+          <p:cNvPr id="20" name="Shape 18"/>
+          <p:cNvSpPr/>
+          <p:nvPr/>
+        </p:nvSpPr>
+        <p:spPr>
+          <a:xfrm>
+            <a:off x="457200" y="3886200"/>
+            <a:ext cx="45720" cy="566928"/>
+          </a:xfrm>
+          <a:prstGeom prst="rect">
+            <a:avLst/>
+          </a:prstGeom>
+          <a:solidFill>
+            <a:srgbClr val="2E7D32"/>
+          </a:solidFill>
+          <a:ln/>
+        </p:spPr>
+      </p:sp>
+      <p:sp>
+        <p:nvSpPr>
+          <p:cNvPr id="21" name="Text 19"/>
+          <p:cNvSpPr/>
+          <p:nvPr/>
+        </p:nvSpPr>
+        <p:spPr>
+          <a:xfrm>
+            <a:off x="685800" y="3886200"/>
+            <a:ext cx="7818120" cy="566928"/>
+          </a:xfrm>
+          <a:prstGeom prst="rect">
+            <a:avLst/>
+          </a:prstGeom>
+          <a:noFill/>
+          <a:ln/>
+        </p:spPr>
+        <p:txBody>
+          <a:bodyPr wrap="square" lIns="0" tIns="0" rIns="0" bIns="0" rtlCol="0" anchor="ctr"/>
+          <a:lstStyle/>
+          <a:p>
+            <a:pPr indent="0" marL="0">
+              <a:buNone/>
+            </a:pPr>
+            <a:r>
+              <a:rPr lang="en-US" sz="1200" dirty="0">
+                <a:solidFill>
+                  <a:srgbClr val="1A1A2E"/>
                 </a:solidFill>
                 <a:latin typeface="Calibri" pitchFamily="34" charset="0"/>
                 <a:ea typeface="Calibri" pitchFamily="34" charset="-122"/>
                 <a:cs typeface="Calibri" pitchFamily="34" charset="-120"/>
               </a:rPr>
-              <a:t>4/6</a:t>
-            </a:r>
-            <a:endParaRPr lang="en-US" sz="900" dirty="0"/>
+              <a:t>⚡ Brainstorming : session créative avec le client et l'équipe</a:t>
+            </a:r>
+            <a:endParaRPr lang="en-US" sz="1200" dirty="0"/>
           </a:p>
         </p:txBody>
       </p:sp>
@@ -3369,7 +4739,7 @@
         <p:spPr>
           <a:xfrm>
             <a:off x="0" y="0"/>
-            <a:ext cx="9144000" cy="73152"/>
+            <a:ext cx="9144000" cy="54864"/>
           </a:xfrm>
           <a:prstGeom prst="rect">
             <a:avLst/>
@@ -3388,8 +4758,8 @@
         </p:nvSpPr>
         <p:spPr>
           <a:xfrm>
-            <a:off x="457200" y="228600"/>
-            <a:ext cx="8229600" cy="640080"/>
+            <a:off x="457200" y="182880"/>
+            <a:ext cx="8229600" cy="594360"/>
           </a:xfrm>
           <a:prstGeom prst="rect">
             <a:avLst/>
@@ -3405,7 +4775,7 @@
               <a:buNone/>
             </a:pPr>
             <a:r>
-              <a:rPr lang="en-US" sz="2600" b="1" dirty="0">
+              <a:rPr lang="en-US" sz="2400" b="1" dirty="0">
                 <a:solidFill>
                   <a:srgbClr val="1B5E20"/>
                 </a:solidFill>
@@ -3413,9 +4783,9 @@
                 <a:ea typeface="Trebuchet MS" pitchFamily="34" charset="-122"/>
                 <a:cs typeface="Trebuchet MS" pitchFamily="34" charset="-120"/>
               </a:rPr>
-              <a:t>Le cahier des charges simplifié</a:t>
-            </a:r>
-            <a:endParaRPr lang="en-US" sz="2600" dirty="0"/>
+              <a:t>L'interview : les bonnes pratiques</a:t>
+            </a:r>
+            <a:endParaRPr lang="en-US" sz="2400" dirty="0"/>
           </a:p>
         </p:txBody>
       </p:sp>
@@ -3427,8 +4797,8 @@
         </p:nvSpPr>
         <p:spPr>
           <a:xfrm>
-            <a:off x="457200" y="1051560"/>
-            <a:ext cx="8229600" cy="640080"/>
+            <a:off x="457200" y="914400"/>
+            <a:ext cx="8229600" cy="560397"/>
           </a:xfrm>
           <a:prstGeom prst="rect">
             <a:avLst/>
@@ -3454,8 +4824,8 @@
         </p:nvSpPr>
         <p:spPr>
           <a:xfrm>
-            <a:off x="457200" y="1051560"/>
-            <a:ext cx="54864" cy="640080"/>
+            <a:off x="457200" y="914400"/>
+            <a:ext cx="45720" cy="560397"/>
           </a:xfrm>
           <a:prstGeom prst="rect">
             <a:avLst/>
@@ -3474,8 +4844,8 @@
         </p:nvSpPr>
         <p:spPr>
           <a:xfrm>
-            <a:off x="731520" y="1051560"/>
-            <a:ext cx="7772400" cy="640080"/>
+            <a:off x="685800" y="914400"/>
+            <a:ext cx="7818120" cy="560397"/>
           </a:xfrm>
           <a:prstGeom prst="rect">
             <a:avLst/>
@@ -3491,7 +4861,7 @@
               <a:buNone/>
             </a:pPr>
             <a:r>
-              <a:rPr lang="en-US" sz="1300" dirty="0">
+              <a:rPr lang="en-US" sz="1200" dirty="0">
                 <a:solidFill>
                   <a:srgbClr val="1A1A2E"/>
                 </a:solidFill>
@@ -3499,9 +4869,9 @@
                 <a:ea typeface="Calibri" pitchFamily="34" charset="-122"/>
                 <a:cs typeface="Calibri" pitchFamily="34" charset="-120"/>
               </a:rPr>
-              <a:t>1. Contexte : qui est le client, que fait-il ?</a:t>
-            </a:r>
-            <a:endParaRPr lang="en-US" sz="1300" dirty="0"/>
+              <a:t>Préparer les questions AVANT (pas d'improvisation)</a:t>
+            </a:r>
+            <a:endParaRPr lang="en-US" sz="1200" dirty="0"/>
           </a:p>
         </p:txBody>
       </p:sp>
@@ -3513,8 +4883,8 @@
         </p:nvSpPr>
         <p:spPr>
           <a:xfrm>
-            <a:off x="457200" y="1783080"/>
-            <a:ext cx="8229600" cy="640080"/>
+            <a:off x="457200" y="1502229"/>
+            <a:ext cx="8229600" cy="560397"/>
           </a:xfrm>
           <a:prstGeom prst="rect">
             <a:avLst/>
@@ -3540,8 +4910,8 @@
         </p:nvSpPr>
         <p:spPr>
           <a:xfrm>
-            <a:off x="457200" y="1783080"/>
-            <a:ext cx="54864" cy="640080"/>
+            <a:off x="457200" y="1502229"/>
+            <a:ext cx="45720" cy="560397"/>
           </a:xfrm>
           <a:prstGeom prst="rect">
             <a:avLst/>
@@ -3560,8 +4930,8 @@
         </p:nvSpPr>
         <p:spPr>
           <a:xfrm>
-            <a:off x="731520" y="1783080"/>
-            <a:ext cx="7772400" cy="640080"/>
+            <a:off x="685800" y="1502229"/>
+            <a:ext cx="7818120" cy="560397"/>
           </a:xfrm>
           <a:prstGeom prst="rect">
             <a:avLst/>
@@ -3577,7 +4947,7 @@
               <a:buNone/>
             </a:pPr>
             <a:r>
-              <a:rPr lang="en-US" sz="1300" dirty="0">
+              <a:rPr lang="en-US" sz="1200" dirty="0">
                 <a:solidFill>
                   <a:srgbClr val="1A1A2E"/>
                 </a:solidFill>
@@ -3585,9 +4955,9 @@
                 <a:ea typeface="Calibri" pitchFamily="34" charset="-122"/>
                 <a:cs typeface="Calibri" pitchFamily="34" charset="-120"/>
               </a:rPr>
-              <a:t>2. Besoins utilisateur : liste des fonctionnalités</a:t>
-            </a:r>
-            <a:endParaRPr lang="en-US" sz="1300" dirty="0"/>
+              <a:t>Questions ouvertes : 'Comment gérez-vous les réservations ?'</a:t>
+            </a:r>
+            <a:endParaRPr lang="en-US" sz="1200" dirty="0"/>
           </a:p>
         </p:txBody>
       </p:sp>
@@ -3599,8 +4969,8 @@
         </p:nvSpPr>
         <p:spPr>
           <a:xfrm>
-            <a:off x="457200" y="2514600"/>
-            <a:ext cx="8229600" cy="640080"/>
+            <a:off x="457200" y="2090057"/>
+            <a:ext cx="8229600" cy="560397"/>
           </a:xfrm>
           <a:prstGeom prst="rect">
             <a:avLst/>
@@ -3626,8 +4996,8 @@
         </p:nvSpPr>
         <p:spPr>
           <a:xfrm>
-            <a:off x="457200" y="2514600"/>
-            <a:ext cx="54864" cy="640080"/>
+            <a:off x="457200" y="2090057"/>
+            <a:ext cx="45720" cy="560397"/>
           </a:xfrm>
           <a:prstGeom prst="rect">
             <a:avLst/>
@@ -3646,8 +5016,8 @@
         </p:nvSpPr>
         <p:spPr>
           <a:xfrm>
-            <a:off x="731520" y="2514600"/>
-            <a:ext cx="7772400" cy="640080"/>
+            <a:off x="685800" y="2090057"/>
+            <a:ext cx="7818120" cy="560397"/>
           </a:xfrm>
           <a:prstGeom prst="rect">
             <a:avLst/>
@@ -3663,7 +5033,7 @@
               <a:buNone/>
             </a:pPr>
             <a:r>
-              <a:rPr lang="en-US" sz="1300" dirty="0">
+              <a:rPr lang="en-US" sz="1200" dirty="0">
                 <a:solidFill>
                   <a:srgbClr val="1A1A2E"/>
                 </a:solidFill>
@@ -3671,9 +5041,9 @@
                 <a:ea typeface="Calibri" pitchFamily="34" charset="-122"/>
                 <a:cs typeface="Calibri" pitchFamily="34" charset="-120"/>
               </a:rPr>
-              <a:t>3. Besoins système : contraintes techniques</a:t>
-            </a:r>
-            <a:endParaRPr lang="en-US" sz="1300" dirty="0"/>
+              <a:t>Questions fermées pour confirmer : 'Chaque session a un seul ingénieur ?'</a:t>
+            </a:r>
+            <a:endParaRPr lang="en-US" sz="1200" dirty="0"/>
           </a:p>
         </p:txBody>
       </p:sp>
@@ -3685,8 +5055,8 @@
         </p:nvSpPr>
         <p:spPr>
           <a:xfrm>
-            <a:off x="457200" y="3246120"/>
-            <a:ext cx="8229600" cy="640080"/>
+            <a:off x="457200" y="2677886"/>
+            <a:ext cx="8229600" cy="560397"/>
           </a:xfrm>
           <a:prstGeom prst="rect">
             <a:avLst/>
@@ -3712,8 +5082,8 @@
         </p:nvSpPr>
         <p:spPr>
           <a:xfrm>
-            <a:off x="457200" y="3246120"/>
-            <a:ext cx="54864" cy="640080"/>
+            <a:off x="457200" y="2677886"/>
+            <a:ext cx="45720" cy="560397"/>
           </a:xfrm>
           <a:prstGeom prst="rect">
             <a:avLst/>
@@ -3732,8 +5102,8 @@
         </p:nvSpPr>
         <p:spPr>
           <a:xfrm>
-            <a:off x="731520" y="3246120"/>
-            <a:ext cx="7772400" cy="640080"/>
+            <a:off x="685800" y="2677886"/>
+            <a:ext cx="7818120" cy="560397"/>
           </a:xfrm>
           <a:prstGeom prst="rect">
             <a:avLst/>
@@ -3749,7 +5119,7 @@
               <a:buNone/>
             </a:pPr>
             <a:r>
-              <a:rPr lang="en-US" sz="1300" dirty="0">
+              <a:rPr lang="en-US" sz="1200" dirty="0">
                 <a:solidFill>
                   <a:srgbClr val="1A1A2E"/>
                 </a:solidFill>
@@ -3757,9 +5127,9 @@
                 <a:ea typeface="Calibri" pitchFamily="34" charset="-122"/>
                 <a:cs typeface="Calibri" pitchFamily="34" charset="-120"/>
               </a:rPr>
-              <a:t>4. Documents métier : fiche artiste, bon de session, facture</a:t>
-            </a:r>
-            <a:endParaRPr lang="en-US" sz="1300" dirty="0"/>
+              <a:t>Écouter PLUS que parler (ratio 80/20)</a:t>
+            </a:r>
+            <a:endParaRPr lang="en-US" sz="1200" dirty="0"/>
           </a:p>
         </p:txBody>
       </p:sp>
@@ -3771,8 +5141,8 @@
         </p:nvSpPr>
         <p:spPr>
           <a:xfrm>
-            <a:off x="457200" y="3977640"/>
-            <a:ext cx="8229600" cy="640080"/>
+            <a:off x="457200" y="3265714"/>
+            <a:ext cx="8229600" cy="560397"/>
           </a:xfrm>
           <a:prstGeom prst="rect">
             <a:avLst/>
@@ -3798,8 +5168,8 @@
         </p:nvSpPr>
         <p:spPr>
           <a:xfrm>
-            <a:off x="457200" y="3977640"/>
-            <a:ext cx="54864" cy="640080"/>
+            <a:off x="457200" y="3265714"/>
+            <a:ext cx="45720" cy="560397"/>
           </a:xfrm>
           <a:prstGeom prst="rect">
             <a:avLst/>
@@ -3818,8 +5188,8 @@
         </p:nvSpPr>
         <p:spPr>
           <a:xfrm>
-            <a:off x="731520" y="3977640"/>
-            <a:ext cx="7772400" cy="640080"/>
+            <a:off x="685800" y="3265714"/>
+            <a:ext cx="7818120" cy="560397"/>
           </a:xfrm>
           <a:prstGeom prst="rect">
             <a:avLst/>
@@ -3835,7 +5205,7 @@
               <a:buNone/>
             </a:pPr>
             <a:r>
-              <a:rPr lang="en-US" sz="1300" dirty="0">
+              <a:rPr lang="en-US" sz="1200" dirty="0">
                 <a:solidFill>
                   <a:srgbClr val="1A1A2E"/>
                 </a:solidFill>
@@ -3843,48 +5213,181 @@
                 <a:ea typeface="Calibri" pitchFamily="34" charset="-122"/>
                 <a:cs typeface="Calibri" pitchFamily="34" charset="-120"/>
               </a:rPr>
-              <a:t>5. Périmètre : ce qui est inclus/exclu du projet</a:t>
-            </a:r>
-            <a:endParaRPr lang="en-US" sz="1300" dirty="0"/>
-          </a:p>
-        </p:txBody>
-      </p:sp>
-      <p:sp>
-        <p:nvSpPr>
-          <p:cNvPr id="19" name="Text 17"/>
-          <p:cNvSpPr/>
-          <p:nvPr/>
-        </p:nvSpPr>
-        <p:spPr>
-          <a:xfrm>
-            <a:off x="8229600" y="4754880"/>
-            <a:ext cx="731520" cy="274320"/>
-          </a:xfrm>
-          <a:prstGeom prst="rect">
-            <a:avLst/>
-          </a:prstGeom>
-          <a:noFill/>
-          <a:ln/>
-        </p:spPr>
-        <p:txBody>
-          <a:bodyPr wrap="square" lIns="0" tIns="0" rIns="0" bIns="0" rtlCol="0" anchor="ctr"/>
-          <a:lstStyle/>
-          <a:p>
-            <a:pPr algn="r" indent="0" marL="0">
-              <a:buNone/>
-            </a:pPr>
-            <a:r>
-              <a:rPr lang="en-US" sz="900" dirty="0">
-                <a:solidFill>
-                  <a:srgbClr val="AAAAAA"/>
+              <a:t>Prendre des notes structurées</a:t>
+            </a:r>
+            <a:endParaRPr lang="en-US" sz="1200" dirty="0"/>
+          </a:p>
+        </p:txBody>
+      </p:sp>
+      <p:sp>
+        <p:nvSpPr>
+          <p:cNvPr id="19" name="Shape 17"/>
+          <p:cNvSpPr/>
+          <p:nvPr/>
+        </p:nvSpPr>
+        <p:spPr>
+          <a:xfrm>
+            <a:off x="457200" y="3853543"/>
+            <a:ext cx="8229600" cy="560397"/>
+          </a:xfrm>
+          <a:prstGeom prst="rect">
+            <a:avLst/>
+          </a:prstGeom>
+          <a:solidFill>
+            <a:srgbClr val="E8F5E9"/>
+          </a:solidFill>
+          <a:ln/>
+          <a:effectLst>
+            <a:outerShdw sx="100000" sy="100000" kx="0" ky="0" algn="bl" rotWithShape="0" blurRad="50800" dist="25400" dir="8100000">
+              <a:srgbClr val="000000">
+                <a:alpha val="12000"/>
+              </a:srgbClr>
+            </a:outerShdw>
+          </a:effectLst>
+        </p:spPr>
+      </p:sp>
+      <p:sp>
+        <p:nvSpPr>
+          <p:cNvPr id="20" name="Shape 18"/>
+          <p:cNvSpPr/>
+          <p:nvPr/>
+        </p:nvSpPr>
+        <p:spPr>
+          <a:xfrm>
+            <a:off x="457200" y="3853543"/>
+            <a:ext cx="45720" cy="560397"/>
+          </a:xfrm>
+          <a:prstGeom prst="rect">
+            <a:avLst/>
+          </a:prstGeom>
+          <a:solidFill>
+            <a:srgbClr val="2E7D32"/>
+          </a:solidFill>
+          <a:ln/>
+        </p:spPr>
+      </p:sp>
+      <p:sp>
+        <p:nvSpPr>
+          <p:cNvPr id="21" name="Text 19"/>
+          <p:cNvSpPr/>
+          <p:nvPr/>
+        </p:nvSpPr>
+        <p:spPr>
+          <a:xfrm>
+            <a:off x="685800" y="3853543"/>
+            <a:ext cx="7818120" cy="560397"/>
+          </a:xfrm>
+          <a:prstGeom prst="rect">
+            <a:avLst/>
+          </a:prstGeom>
+          <a:noFill/>
+          <a:ln/>
+        </p:spPr>
+        <p:txBody>
+          <a:bodyPr wrap="square" lIns="0" tIns="0" rIns="0" bIns="0" rtlCol="0" anchor="ctr"/>
+          <a:lstStyle/>
+          <a:p>
+            <a:pPr indent="0" marL="0">
+              <a:buNone/>
+            </a:pPr>
+            <a:r>
+              <a:rPr lang="en-US" sz="1200" dirty="0">
+                <a:solidFill>
+                  <a:srgbClr val="1A1A2E"/>
                 </a:solidFill>
                 <a:latin typeface="Calibri" pitchFamily="34" charset="0"/>
                 <a:ea typeface="Calibri" pitchFamily="34" charset="-122"/>
                 <a:cs typeface="Calibri" pitchFamily="34" charset="-120"/>
               </a:rPr>
-              <a:t>5/6</a:t>
-            </a:r>
-            <a:endParaRPr lang="en-US" sz="900" dirty="0"/>
+              <a:t>Reformuler pour valider : 'Si je comprends bien, un artiste peut...'</a:t>
+            </a:r>
+            <a:endParaRPr lang="en-US" sz="1200" dirty="0"/>
+          </a:p>
+        </p:txBody>
+      </p:sp>
+      <p:sp>
+        <p:nvSpPr>
+          <p:cNvPr id="22" name="Shape 20"/>
+          <p:cNvSpPr/>
+          <p:nvPr/>
+        </p:nvSpPr>
+        <p:spPr>
+          <a:xfrm>
+            <a:off x="457200" y="4441371"/>
+            <a:ext cx="8229600" cy="560397"/>
+          </a:xfrm>
+          <a:prstGeom prst="rect">
+            <a:avLst/>
+          </a:prstGeom>
+          <a:solidFill>
+            <a:srgbClr val="FFFFFF"/>
+          </a:solidFill>
+          <a:ln/>
+          <a:effectLst>
+            <a:outerShdw sx="100000" sy="100000" kx="0" ky="0" algn="bl" rotWithShape="0" blurRad="50800" dist="25400" dir="8100000">
+              <a:srgbClr val="000000">
+                <a:alpha val="12000"/>
+              </a:srgbClr>
+            </a:outerShdw>
+          </a:effectLst>
+        </p:spPr>
+      </p:sp>
+      <p:sp>
+        <p:nvSpPr>
+          <p:cNvPr id="23" name="Shape 21"/>
+          <p:cNvSpPr/>
+          <p:nvPr/>
+        </p:nvSpPr>
+        <p:spPr>
+          <a:xfrm>
+            <a:off x="457200" y="4441371"/>
+            <a:ext cx="45720" cy="560397"/>
+          </a:xfrm>
+          <a:prstGeom prst="rect">
+            <a:avLst/>
+          </a:prstGeom>
+          <a:solidFill>
+            <a:srgbClr val="2E7D32"/>
+          </a:solidFill>
+          <a:ln/>
+        </p:spPr>
+      </p:sp>
+      <p:sp>
+        <p:nvSpPr>
+          <p:cNvPr id="24" name="Text 22"/>
+          <p:cNvSpPr/>
+          <p:nvPr/>
+        </p:nvSpPr>
+        <p:spPr>
+          <a:xfrm>
+            <a:off x="685800" y="4441371"/>
+            <a:ext cx="7818120" cy="560397"/>
+          </a:xfrm>
+          <a:prstGeom prst="rect">
+            <a:avLst/>
+          </a:prstGeom>
+          <a:noFill/>
+          <a:ln/>
+        </p:spPr>
+        <p:txBody>
+          <a:bodyPr wrap="square" lIns="0" tIns="0" rIns="0" bIns="0" rtlCol="0" anchor="ctr"/>
+          <a:lstStyle/>
+          <a:p>
+            <a:pPr indent="0" marL="0">
+              <a:buNone/>
+            </a:pPr>
+            <a:r>
+              <a:rPr lang="en-US" sz="1200" dirty="0">
+                <a:solidFill>
+                  <a:srgbClr val="1A1A2E"/>
+                </a:solidFill>
+                <a:latin typeface="Calibri" pitchFamily="34" charset="0"/>
+                <a:ea typeface="Calibri" pitchFamily="34" charset="-122"/>
+                <a:cs typeface="Calibri" pitchFamily="34" charset="-120"/>
+              </a:rPr>
+              <a:t>Demander les DOCUMENTS utilisés (fiches, formulaires, tableaux Excel)</a:t>
+            </a:r>
+            <a:endParaRPr lang="en-US" sz="1200" dirty="0"/>
           </a:p>
         </p:txBody>
       </p:sp>
@@ -3902,7 +5405,7 @@
     <p:bg>
       <p:bgPr>
         <a:solidFill>
-          <a:srgbClr val="1B5E20"/>
+          <a:srgbClr val="F5F7FA"/>
         </a:solidFill>
       </p:bgPr>
     </p:bg>
@@ -3920,164 +5423,664 @@
           <a:chExt cx="0" cy="0"/>
         </a:xfrm>
       </p:grpSpPr>
-      <p:pic>
-        <p:nvPicPr>
-          <p:cNvPr id="2" name="Image 0" descr="preencoded.png">    </p:cNvPr>
-          <p:cNvPicPr>
-            <a:picLocks noChangeAspect="1"/>
-          </p:cNvPicPr>
-          <p:nvPr/>
-        </p:nvPicPr>
-        <p:blipFill>
-          <a:blip r:embed="rId1"/>
-          <a:stretch>
-            <a:fillRect/>
-          </a:stretch>
-        </p:blipFill>
-        <p:spPr>
-          <a:xfrm>
-            <a:off x="4023360" y="457200"/>
-            <a:ext cx="1097280" cy="1097280"/>
-          </a:xfrm>
-          <a:prstGeom prst="rect">
-            <a:avLst/>
-          </a:prstGeom>
-        </p:spPr>
-      </p:pic>
-      <p:sp>
-        <p:nvSpPr>
-          <p:cNvPr id="3" name="Text 0"/>
-          <p:cNvSpPr/>
-          <p:nvPr/>
-        </p:nvSpPr>
-        <p:spPr>
-          <a:xfrm>
-            <a:off x="457200" y="1737360"/>
-            <a:ext cx="8229600" cy="548640"/>
-          </a:xfrm>
-          <a:prstGeom prst="rect">
-            <a:avLst/>
-          </a:prstGeom>
-          <a:noFill/>
-          <a:ln/>
-        </p:spPr>
-        <p:txBody>
-          <a:bodyPr wrap="square" lIns="0" tIns="0" rIns="0" bIns="0" rtlCol="0" anchor="ctr"/>
-          <a:lstStyle/>
-          <a:p>
-            <a:pPr algn="ctr" indent="0" marL="0">
-              <a:buNone/>
-            </a:pPr>
-            <a:r>
-              <a:rPr lang="en-US" sz="2600" b="1" dirty="0">
-                <a:solidFill>
-                  <a:srgbClr val="FFFFFF"/>
+      <p:sp>
+        <p:nvSpPr>
+          <p:cNvPr id="2" name="Shape 0"/>
+          <p:cNvSpPr/>
+          <p:nvPr/>
+        </p:nvSpPr>
+        <p:spPr>
+          <a:xfrm>
+            <a:off x="0" y="0"/>
+            <a:ext cx="9144000" cy="54864"/>
+          </a:xfrm>
+          <a:prstGeom prst="rect">
+            <a:avLst/>
+          </a:prstGeom>
+          <a:solidFill>
+            <a:srgbClr val="2E7D32"/>
+          </a:solidFill>
+          <a:ln/>
+        </p:spPr>
+      </p:sp>
+      <p:sp>
+        <p:nvSpPr>
+          <p:cNvPr id="3" name="Text 1"/>
+          <p:cNvSpPr/>
+          <p:nvPr/>
+        </p:nvSpPr>
+        <p:spPr>
+          <a:xfrm>
+            <a:off x="457200" y="182880"/>
+            <a:ext cx="8229600" cy="594360"/>
+          </a:xfrm>
+          <a:prstGeom prst="rect">
+            <a:avLst/>
+          </a:prstGeom>
+          <a:noFill/>
+          <a:ln/>
+        </p:spPr>
+        <p:txBody>
+          <a:bodyPr wrap="square" lIns="0" tIns="0" rIns="0" bIns="0" rtlCol="0" anchor="ctr"/>
+          <a:lstStyle/>
+          <a:p>
+            <a:pPr indent="0" marL="0">
+              <a:buNone/>
+            </a:pPr>
+            <a:r>
+              <a:rPr lang="en-US" sz="2400" b="1" dirty="0">
+                <a:solidFill>
+                  <a:srgbClr val="1B5E20"/>
                 </a:solidFill>
                 <a:latin typeface="Trebuchet MS" pitchFamily="34" charset="0"/>
                 <a:ea typeface="Trebuchet MS" pitchFamily="34" charset="-122"/>
                 <a:cs typeface="Trebuchet MS" pitchFamily="34" charset="-120"/>
               </a:rPr>
-              <a:t>🎮 Mini-jeu : Module 2</a:t>
-            </a:r>
-            <a:endParaRPr lang="en-US" sz="2600" dirty="0"/>
-          </a:p>
-        </p:txBody>
-      </p:sp>
-      <p:sp>
-        <p:nvSpPr>
-          <p:cNvPr id="4" name="Text 1"/>
-          <p:cNvSpPr/>
-          <p:nvPr/>
-        </p:nvSpPr>
-        <p:spPr>
-          <a:xfrm>
-            <a:off x="914400" y="2377440"/>
-            <a:ext cx="7315200" cy="457200"/>
-          </a:xfrm>
-          <a:prstGeom prst="rect">
-            <a:avLst/>
-          </a:prstGeom>
-          <a:noFill/>
-          <a:ln/>
-        </p:spPr>
-        <p:txBody>
-          <a:bodyPr wrap="square" lIns="0" tIns="0" rIns="0" bIns="0" rtlCol="0" anchor="ctr"/>
-          <a:lstStyle/>
-          <a:p>
-            <a:pPr algn="ctr" indent="0" marL="0">
-              <a:buNone/>
-            </a:pPr>
-            <a:r>
-              <a:rPr lang="en-US" sz="1400" dirty="0">
-                <a:solidFill>
-                  <a:srgbClr val="CCCCCC"/>
+              <a:t>SwissSound : le brief du directeur</a:t>
+            </a:r>
+            <a:endParaRPr lang="en-US" sz="2400" dirty="0"/>
+          </a:p>
+        </p:txBody>
+      </p:sp>
+      <p:sp>
+        <p:nvSpPr>
+          <p:cNvPr id="4" name="Shape 2"/>
+          <p:cNvSpPr/>
+          <p:nvPr/>
+        </p:nvSpPr>
+        <p:spPr>
+          <a:xfrm>
+            <a:off x="457200" y="914400"/>
+            <a:ext cx="8229600" cy="560397"/>
+          </a:xfrm>
+          <a:prstGeom prst="rect">
+            <a:avLst/>
+          </a:prstGeom>
+          <a:solidFill>
+            <a:srgbClr val="FFFFFF"/>
+          </a:solidFill>
+          <a:ln/>
+          <a:effectLst>
+            <a:outerShdw sx="100000" sy="100000" kx="0" ky="0" algn="bl" rotWithShape="0" blurRad="50800" dist="25400" dir="8100000">
+              <a:srgbClr val="000000">
+                <a:alpha val="12000"/>
+              </a:srgbClr>
+            </a:outerShdw>
+          </a:effectLst>
+        </p:spPr>
+      </p:sp>
+      <p:sp>
+        <p:nvSpPr>
+          <p:cNvPr id="5" name="Shape 3"/>
+          <p:cNvSpPr/>
+          <p:nvPr/>
+        </p:nvSpPr>
+        <p:spPr>
+          <a:xfrm>
+            <a:off x="457200" y="914400"/>
+            <a:ext cx="45720" cy="560397"/>
+          </a:xfrm>
+          <a:prstGeom prst="rect">
+            <a:avLst/>
+          </a:prstGeom>
+          <a:solidFill>
+            <a:srgbClr val="2E7D32"/>
+          </a:solidFill>
+          <a:ln/>
+        </p:spPr>
+      </p:sp>
+      <p:sp>
+        <p:nvSpPr>
+          <p:cNvPr id="6" name="Text 4"/>
+          <p:cNvSpPr/>
+          <p:nvPr/>
+        </p:nvSpPr>
+        <p:spPr>
+          <a:xfrm>
+            <a:off x="685800" y="914400"/>
+            <a:ext cx="7818120" cy="560397"/>
+          </a:xfrm>
+          <a:prstGeom prst="rect">
+            <a:avLst/>
+          </a:prstGeom>
+          <a:noFill/>
+          <a:ln/>
+        </p:spPr>
+        <p:txBody>
+          <a:bodyPr wrap="square" lIns="0" tIns="0" rIns="0" bIns="0" rtlCol="0" anchor="ctr"/>
+          <a:lstStyle/>
+          <a:p>
+            <a:pPr indent="0" marL="0">
+              <a:buNone/>
+            </a:pPr>
+            <a:r>
+              <a:rPr lang="en-US" sz="1200" dirty="0">
+                <a:solidFill>
+                  <a:srgbClr val="1A1A2E"/>
                 </a:solidFill>
                 <a:latin typeface="Calibri" pitchFamily="34" charset="0"/>
                 <a:ea typeface="Calibri" pitchFamily="34" charset="-122"/>
                 <a:cs typeface="Calibri" pitchFamily="34" charset="-120"/>
               </a:rPr>
-              <a:t>Quiz interactif + Score + Correction automatique</a:t>
-            </a:r>
-            <a:endParaRPr lang="en-US" sz="1400" dirty="0"/>
-          </a:p>
-        </p:txBody>
-      </p:sp>
-      <p:sp>
-        <p:nvSpPr>
-          <p:cNvPr id="5" name="Shape 2"/>
-          <p:cNvSpPr/>
-          <p:nvPr/>
-        </p:nvSpPr>
-        <p:spPr>
-          <a:xfrm>
-            <a:off x="2286000" y="3200400"/>
-            <a:ext cx="4572000" cy="548640"/>
-          </a:xfrm>
-          <a:prstGeom prst="rect">
-            <a:avLst/>
-          </a:prstGeom>
-          <a:solidFill>
-            <a:srgbClr val="FF6F00"/>
-          </a:solidFill>
-          <a:ln/>
-        </p:spPr>
-      </p:sp>
-      <p:sp>
-        <p:nvSpPr>
-          <p:cNvPr id="6" name="Text 3"/>
-          <p:cNvSpPr/>
-          <p:nvPr/>
-        </p:nvSpPr>
-        <p:spPr>
-          <a:xfrm>
-            <a:off x="2286000" y="3200400"/>
-            <a:ext cx="4572000" cy="548640"/>
-          </a:xfrm>
-          <a:prstGeom prst="rect">
-            <a:avLst/>
-          </a:prstGeom>
-          <a:noFill/>
-          <a:ln/>
-        </p:spPr>
-        <p:txBody>
-          <a:bodyPr wrap="square" lIns="0" tIns="0" rIns="0" bIns="0" rtlCol="0" anchor="ctr"/>
-          <a:lstStyle/>
-          <a:p>
-            <a:pPr algn="ctr" indent="0" marL="0">
-              <a:buNone/>
-            </a:pPr>
-            <a:r>
-              <a:rPr lang="en-US" sz="1800" b="1" dirty="0">
-                <a:solidFill>
-                  <a:srgbClr val="FFFFFF"/>
-                </a:solidFill>
-                <a:latin typeface="Trebuchet MS" pitchFamily="34" charset="0"/>
-                <a:ea typeface="Trebuchet MS" pitchFamily="34" charset="-122"/>
-                <a:cs typeface="Trebuchet MS" pitchFamily="34" charset="-120"/>
-              </a:rPr>
-              <a:t>▶  Lancer le jeu sur Vercel</a:t>
-            </a:r>
-            <a:endParaRPr lang="en-US" sz="1800" dirty="0"/>
+              <a:t>'Je gère un studio d'enregistrement avec 5 salles'</a:t>
+            </a:r>
+            <a:endParaRPr lang="en-US" sz="1200" dirty="0"/>
+          </a:p>
+        </p:txBody>
+      </p:sp>
+      <p:sp>
+        <p:nvSpPr>
+          <p:cNvPr id="7" name="Shape 5"/>
+          <p:cNvSpPr/>
+          <p:nvPr/>
+        </p:nvSpPr>
+        <p:spPr>
+          <a:xfrm>
+            <a:off x="457200" y="1502229"/>
+            <a:ext cx="8229600" cy="560397"/>
+          </a:xfrm>
+          <a:prstGeom prst="rect">
+            <a:avLst/>
+          </a:prstGeom>
+          <a:solidFill>
+            <a:srgbClr val="E8F5E9"/>
+          </a:solidFill>
+          <a:ln/>
+          <a:effectLst>
+            <a:outerShdw sx="100000" sy="100000" kx="0" ky="0" algn="bl" rotWithShape="0" blurRad="50800" dist="25400" dir="8100000">
+              <a:srgbClr val="000000">
+                <a:alpha val="12000"/>
+              </a:srgbClr>
+            </a:outerShdw>
+          </a:effectLst>
+        </p:spPr>
+      </p:sp>
+      <p:sp>
+        <p:nvSpPr>
+          <p:cNvPr id="8" name="Shape 6"/>
+          <p:cNvSpPr/>
+          <p:nvPr/>
+        </p:nvSpPr>
+        <p:spPr>
+          <a:xfrm>
+            <a:off x="457200" y="1502229"/>
+            <a:ext cx="45720" cy="560397"/>
+          </a:xfrm>
+          <a:prstGeom prst="rect">
+            <a:avLst/>
+          </a:prstGeom>
+          <a:solidFill>
+            <a:srgbClr val="2E7D32"/>
+          </a:solidFill>
+          <a:ln/>
+        </p:spPr>
+      </p:sp>
+      <p:sp>
+        <p:nvSpPr>
+          <p:cNvPr id="9" name="Text 7"/>
+          <p:cNvSpPr/>
+          <p:nvPr/>
+        </p:nvSpPr>
+        <p:spPr>
+          <a:xfrm>
+            <a:off x="685800" y="1502229"/>
+            <a:ext cx="7818120" cy="560397"/>
+          </a:xfrm>
+          <a:prstGeom prst="rect">
+            <a:avLst/>
+          </a:prstGeom>
+          <a:noFill/>
+          <a:ln/>
+        </p:spPr>
+        <p:txBody>
+          <a:bodyPr wrap="square" lIns="0" tIns="0" rIns="0" bIns="0" rtlCol="0" anchor="ctr"/>
+          <a:lstStyle/>
+          <a:p>
+            <a:pPr indent="0" marL="0">
+              <a:buNone/>
+            </a:pPr>
+            <a:r>
+              <a:rPr lang="en-US" sz="1200" dirty="0">
+                <a:solidFill>
+                  <a:srgbClr val="1A1A2E"/>
+                </a:solidFill>
+                <a:latin typeface="Calibri" pitchFamily="34" charset="0"/>
+                <a:ea typeface="Calibri" pitchFamily="34" charset="-122"/>
+                <a:cs typeface="Calibri" pitchFamily="34" charset="-120"/>
+              </a:rPr>
+              <a:t>'Mes artistes réservent des sessions avec un ingénieur du son'</a:t>
+            </a:r>
+            <a:endParaRPr lang="en-US" sz="1200" dirty="0"/>
+          </a:p>
+        </p:txBody>
+      </p:sp>
+      <p:sp>
+        <p:nvSpPr>
+          <p:cNvPr id="10" name="Shape 8"/>
+          <p:cNvSpPr/>
+          <p:nvPr/>
+        </p:nvSpPr>
+        <p:spPr>
+          <a:xfrm>
+            <a:off x="457200" y="2090057"/>
+            <a:ext cx="8229600" cy="560397"/>
+          </a:xfrm>
+          <a:prstGeom prst="rect">
+            <a:avLst/>
+          </a:prstGeom>
+          <a:solidFill>
+            <a:srgbClr val="FFFFFF"/>
+          </a:solidFill>
+          <a:ln/>
+          <a:effectLst>
+            <a:outerShdw sx="100000" sy="100000" kx="0" ky="0" algn="bl" rotWithShape="0" blurRad="50800" dist="25400" dir="8100000">
+              <a:srgbClr val="000000">
+                <a:alpha val="12000"/>
+              </a:srgbClr>
+            </a:outerShdw>
+          </a:effectLst>
+        </p:spPr>
+      </p:sp>
+      <p:sp>
+        <p:nvSpPr>
+          <p:cNvPr id="11" name="Shape 9"/>
+          <p:cNvSpPr/>
+          <p:nvPr/>
+        </p:nvSpPr>
+        <p:spPr>
+          <a:xfrm>
+            <a:off x="457200" y="2090057"/>
+            <a:ext cx="45720" cy="560397"/>
+          </a:xfrm>
+          <a:prstGeom prst="rect">
+            <a:avLst/>
+          </a:prstGeom>
+          <a:solidFill>
+            <a:srgbClr val="2E7D32"/>
+          </a:solidFill>
+          <a:ln/>
+        </p:spPr>
+      </p:sp>
+      <p:sp>
+        <p:nvSpPr>
+          <p:cNvPr id="12" name="Text 10"/>
+          <p:cNvSpPr/>
+          <p:nvPr/>
+        </p:nvSpPr>
+        <p:spPr>
+          <a:xfrm>
+            <a:off x="685800" y="2090057"/>
+            <a:ext cx="7818120" cy="560397"/>
+          </a:xfrm>
+          <a:prstGeom prst="rect">
+            <a:avLst/>
+          </a:prstGeom>
+          <a:noFill/>
+          <a:ln/>
+        </p:spPr>
+        <p:txBody>
+          <a:bodyPr wrap="square" lIns="0" tIns="0" rIns="0" bIns="0" rtlCol="0" anchor="ctr"/>
+          <a:lstStyle/>
+          <a:p>
+            <a:pPr indent="0" marL="0">
+              <a:buNone/>
+            </a:pPr>
+            <a:r>
+              <a:rPr lang="en-US" sz="1200" dirty="0">
+                <a:solidFill>
+                  <a:srgbClr val="1A1A2E"/>
+                </a:solidFill>
+                <a:latin typeface="Calibri" pitchFamily="34" charset="0"/>
+                <a:ea typeface="Calibri" pitchFamily="34" charset="-122"/>
+                <a:cs typeface="Calibri" pitchFamily="34" charset="-120"/>
+              </a:rPr>
+              <a:t>'Je dois savoir quelle salle est libre, quel ingénieur est disponible'</a:t>
+            </a:r>
+            <a:endParaRPr lang="en-US" sz="1200" dirty="0"/>
+          </a:p>
+        </p:txBody>
+      </p:sp>
+      <p:sp>
+        <p:nvSpPr>
+          <p:cNvPr id="13" name="Shape 11"/>
+          <p:cNvSpPr/>
+          <p:nvPr/>
+        </p:nvSpPr>
+        <p:spPr>
+          <a:xfrm>
+            <a:off x="457200" y="2677886"/>
+            <a:ext cx="8229600" cy="560397"/>
+          </a:xfrm>
+          <a:prstGeom prst="rect">
+            <a:avLst/>
+          </a:prstGeom>
+          <a:solidFill>
+            <a:srgbClr val="E8F5E9"/>
+          </a:solidFill>
+          <a:ln/>
+          <a:effectLst>
+            <a:outerShdw sx="100000" sy="100000" kx="0" ky="0" algn="bl" rotWithShape="0" blurRad="50800" dist="25400" dir="8100000">
+              <a:srgbClr val="000000">
+                <a:alpha val="12000"/>
+              </a:srgbClr>
+            </a:outerShdw>
+          </a:effectLst>
+        </p:spPr>
+      </p:sp>
+      <p:sp>
+        <p:nvSpPr>
+          <p:cNvPr id="14" name="Shape 12"/>
+          <p:cNvSpPr/>
+          <p:nvPr/>
+        </p:nvSpPr>
+        <p:spPr>
+          <a:xfrm>
+            <a:off x="457200" y="2677886"/>
+            <a:ext cx="45720" cy="560397"/>
+          </a:xfrm>
+          <a:prstGeom prst="rect">
+            <a:avLst/>
+          </a:prstGeom>
+          <a:solidFill>
+            <a:srgbClr val="2E7D32"/>
+          </a:solidFill>
+          <a:ln/>
+        </p:spPr>
+      </p:sp>
+      <p:sp>
+        <p:nvSpPr>
+          <p:cNvPr id="15" name="Text 13"/>
+          <p:cNvSpPr/>
+          <p:nvPr/>
+        </p:nvSpPr>
+        <p:spPr>
+          <a:xfrm>
+            <a:off x="685800" y="2677886"/>
+            <a:ext cx="7818120" cy="560397"/>
+          </a:xfrm>
+          <a:prstGeom prst="rect">
+            <a:avLst/>
+          </a:prstGeom>
+          <a:noFill/>
+          <a:ln/>
+        </p:spPr>
+        <p:txBody>
+          <a:bodyPr wrap="square" lIns="0" tIns="0" rIns="0" bIns="0" rtlCol="0" anchor="ctr"/>
+          <a:lstStyle/>
+          <a:p>
+            <a:pPr indent="0" marL="0">
+              <a:buNone/>
+            </a:pPr>
+            <a:r>
+              <a:rPr lang="en-US" sz="1200" dirty="0">
+                <a:solidFill>
+                  <a:srgbClr val="1A1A2E"/>
+                </a:solidFill>
+                <a:latin typeface="Calibri" pitchFamily="34" charset="0"/>
+                <a:ea typeface="Calibri" pitchFamily="34" charset="-122"/>
+                <a:cs typeface="Calibri" pitchFamily="34" charset="-120"/>
+              </a:rPr>
+              <a:t>'La comptable a besoin de générer des factures par artiste'</a:t>
+            </a:r>
+            <a:endParaRPr lang="en-US" sz="1200" dirty="0"/>
+          </a:p>
+        </p:txBody>
+      </p:sp>
+      <p:sp>
+        <p:nvSpPr>
+          <p:cNvPr id="16" name="Shape 14"/>
+          <p:cNvSpPr/>
+          <p:nvPr/>
+        </p:nvSpPr>
+        <p:spPr>
+          <a:xfrm>
+            <a:off x="457200" y="3265714"/>
+            <a:ext cx="8229600" cy="560397"/>
+          </a:xfrm>
+          <a:prstGeom prst="rect">
+            <a:avLst/>
+          </a:prstGeom>
+          <a:solidFill>
+            <a:srgbClr val="FFFFFF"/>
+          </a:solidFill>
+          <a:ln/>
+          <a:effectLst>
+            <a:outerShdw sx="100000" sy="100000" kx="0" ky="0" algn="bl" rotWithShape="0" blurRad="50800" dist="25400" dir="8100000">
+              <a:srgbClr val="000000">
+                <a:alpha val="12000"/>
+              </a:srgbClr>
+            </a:outerShdw>
+          </a:effectLst>
+        </p:spPr>
+      </p:sp>
+      <p:sp>
+        <p:nvSpPr>
+          <p:cNvPr id="17" name="Shape 15"/>
+          <p:cNvSpPr/>
+          <p:nvPr/>
+        </p:nvSpPr>
+        <p:spPr>
+          <a:xfrm>
+            <a:off x="457200" y="3265714"/>
+            <a:ext cx="45720" cy="560397"/>
+          </a:xfrm>
+          <a:prstGeom prst="rect">
+            <a:avLst/>
+          </a:prstGeom>
+          <a:solidFill>
+            <a:srgbClr val="2E7D32"/>
+          </a:solidFill>
+          <a:ln/>
+        </p:spPr>
+      </p:sp>
+      <p:sp>
+        <p:nvSpPr>
+          <p:cNvPr id="18" name="Text 16"/>
+          <p:cNvSpPr/>
+          <p:nvPr/>
+        </p:nvSpPr>
+        <p:spPr>
+          <a:xfrm>
+            <a:off x="685800" y="3265714"/>
+            <a:ext cx="7818120" cy="560397"/>
+          </a:xfrm>
+          <a:prstGeom prst="rect">
+            <a:avLst/>
+          </a:prstGeom>
+          <a:noFill/>
+          <a:ln/>
+        </p:spPr>
+        <p:txBody>
+          <a:bodyPr wrap="square" lIns="0" tIns="0" rIns="0" bIns="0" rtlCol="0" anchor="ctr"/>
+          <a:lstStyle/>
+          <a:p>
+            <a:pPr indent="0" marL="0">
+              <a:buNone/>
+            </a:pPr>
+            <a:r>
+              <a:rPr lang="en-US" sz="1200" dirty="0">
+                <a:solidFill>
+                  <a:srgbClr val="1A1A2E"/>
+                </a:solidFill>
+                <a:latin typeface="Calibri" pitchFamily="34" charset="0"/>
+                <a:ea typeface="Calibri" pitchFamily="34" charset="-122"/>
+                <a:cs typeface="Calibri" pitchFamily="34" charset="-120"/>
+              </a:rPr>
+              <a:t>'Chaque artiste a un ou plusieurs genres musicaux'</a:t>
+            </a:r>
+            <a:endParaRPr lang="en-US" sz="1200" dirty="0"/>
+          </a:p>
+        </p:txBody>
+      </p:sp>
+      <p:sp>
+        <p:nvSpPr>
+          <p:cNvPr id="19" name="Shape 17"/>
+          <p:cNvSpPr/>
+          <p:nvPr/>
+        </p:nvSpPr>
+        <p:spPr>
+          <a:xfrm>
+            <a:off x="457200" y="3853543"/>
+            <a:ext cx="8229600" cy="560397"/>
+          </a:xfrm>
+          <a:prstGeom prst="rect">
+            <a:avLst/>
+          </a:prstGeom>
+          <a:solidFill>
+            <a:srgbClr val="E8F5E9"/>
+          </a:solidFill>
+          <a:ln/>
+          <a:effectLst>
+            <a:outerShdw sx="100000" sy="100000" kx="0" ky="0" algn="bl" rotWithShape="0" blurRad="50800" dist="25400" dir="8100000">
+              <a:srgbClr val="000000">
+                <a:alpha val="12000"/>
+              </a:srgbClr>
+            </a:outerShdw>
+          </a:effectLst>
+        </p:spPr>
+      </p:sp>
+      <p:sp>
+        <p:nvSpPr>
+          <p:cNvPr id="20" name="Shape 18"/>
+          <p:cNvSpPr/>
+          <p:nvPr/>
+        </p:nvSpPr>
+        <p:spPr>
+          <a:xfrm>
+            <a:off x="457200" y="3853543"/>
+            <a:ext cx="45720" cy="560397"/>
+          </a:xfrm>
+          <a:prstGeom prst="rect">
+            <a:avLst/>
+          </a:prstGeom>
+          <a:solidFill>
+            <a:srgbClr val="2E7D32"/>
+          </a:solidFill>
+          <a:ln/>
+        </p:spPr>
+      </p:sp>
+      <p:sp>
+        <p:nvSpPr>
+          <p:cNvPr id="21" name="Text 19"/>
+          <p:cNvSpPr/>
+          <p:nvPr/>
+        </p:nvSpPr>
+        <p:spPr>
+          <a:xfrm>
+            <a:off x="685800" y="3853543"/>
+            <a:ext cx="7818120" cy="560397"/>
+          </a:xfrm>
+          <a:prstGeom prst="rect">
+            <a:avLst/>
+          </a:prstGeom>
+          <a:noFill/>
+          <a:ln/>
+        </p:spPr>
+        <p:txBody>
+          <a:bodyPr wrap="square" lIns="0" tIns="0" rIns="0" bIns="0" rtlCol="0" anchor="ctr"/>
+          <a:lstStyle/>
+          <a:p>
+            <a:pPr indent="0" marL="0">
+              <a:buNone/>
+            </a:pPr>
+            <a:r>
+              <a:rPr lang="en-US" sz="1200" dirty="0">
+                <a:solidFill>
+                  <a:srgbClr val="1A1A2E"/>
+                </a:solidFill>
+                <a:latin typeface="Calibri" pitchFamily="34" charset="0"/>
+                <a:ea typeface="Calibri" pitchFamily="34" charset="-122"/>
+                <a:cs typeface="Calibri" pitchFamily="34" charset="-120"/>
+              </a:rPr>
+              <a:t>'Je veux suivre l'inventaire du matériel par salle'</a:t>
+            </a:r>
+            <a:endParaRPr lang="en-US" sz="1200" dirty="0"/>
+          </a:p>
+        </p:txBody>
+      </p:sp>
+      <p:sp>
+        <p:nvSpPr>
+          <p:cNvPr id="22" name="Shape 20"/>
+          <p:cNvSpPr/>
+          <p:nvPr/>
+        </p:nvSpPr>
+        <p:spPr>
+          <a:xfrm>
+            <a:off x="457200" y="4441371"/>
+            <a:ext cx="8229600" cy="560397"/>
+          </a:xfrm>
+          <a:prstGeom prst="rect">
+            <a:avLst/>
+          </a:prstGeom>
+          <a:solidFill>
+            <a:srgbClr val="FFFFFF"/>
+          </a:solidFill>
+          <a:ln/>
+          <a:effectLst>
+            <a:outerShdw sx="100000" sy="100000" kx="0" ky="0" algn="bl" rotWithShape="0" blurRad="50800" dist="25400" dir="8100000">
+              <a:srgbClr val="000000">
+                <a:alpha val="12000"/>
+              </a:srgbClr>
+            </a:outerShdw>
+          </a:effectLst>
+        </p:spPr>
+      </p:sp>
+      <p:sp>
+        <p:nvSpPr>
+          <p:cNvPr id="23" name="Shape 21"/>
+          <p:cNvSpPr/>
+          <p:nvPr/>
+        </p:nvSpPr>
+        <p:spPr>
+          <a:xfrm>
+            <a:off x="457200" y="4441371"/>
+            <a:ext cx="45720" cy="560397"/>
+          </a:xfrm>
+          <a:prstGeom prst="rect">
+            <a:avLst/>
+          </a:prstGeom>
+          <a:solidFill>
+            <a:srgbClr val="2E7D32"/>
+          </a:solidFill>
+          <a:ln/>
+        </p:spPr>
+      </p:sp>
+      <p:sp>
+        <p:nvSpPr>
+          <p:cNvPr id="24" name="Text 22"/>
+          <p:cNvSpPr/>
+          <p:nvPr/>
+        </p:nvSpPr>
+        <p:spPr>
+          <a:xfrm>
+            <a:off x="685800" y="4441371"/>
+            <a:ext cx="7818120" cy="560397"/>
+          </a:xfrm>
+          <a:prstGeom prst="rect">
+            <a:avLst/>
+          </a:prstGeom>
+          <a:noFill/>
+          <a:ln/>
+        </p:spPr>
+        <p:txBody>
+          <a:bodyPr wrap="square" lIns="0" tIns="0" rIns="0" bIns="0" rtlCol="0" anchor="ctr"/>
+          <a:lstStyle/>
+          <a:p>
+            <a:pPr indent="0" marL="0">
+              <a:buNone/>
+            </a:pPr>
+            <a:r>
+              <a:rPr lang="en-US" sz="1200" dirty="0">
+                <a:solidFill>
+                  <a:srgbClr val="1A1A2E"/>
+                </a:solidFill>
+                <a:latin typeface="Calibri" pitchFamily="34" charset="0"/>
+                <a:ea typeface="Calibri" pitchFamily="34" charset="-122"/>
+                <a:cs typeface="Calibri" pitchFamily="34" charset="-120"/>
+              </a:rPr>
+              <a:t>'Certains artistes ne sont plus actifs mais je garde leur historique'</a:t>
+            </a:r>
+            <a:endParaRPr lang="en-US" sz="1200" dirty="0"/>
           </a:p>
         </p:txBody>
       </p:sp>
@@ -4115,14 +6118,34 @@
       </p:grpSpPr>
       <p:sp>
         <p:nvSpPr>
-          <p:cNvPr id="2" name="Text 0"/>
-          <p:cNvSpPr/>
-          <p:nvPr/>
-        </p:nvSpPr>
-        <p:spPr>
-          <a:xfrm>
-            <a:off x="457200" y="228600"/>
-            <a:ext cx="8229600" cy="457200"/>
+          <p:cNvPr id="2" name="Shape 0"/>
+          <p:cNvSpPr/>
+          <p:nvPr/>
+        </p:nvSpPr>
+        <p:spPr>
+          <a:xfrm>
+            <a:off x="0" y="0"/>
+            <a:ext cx="9144000" cy="54864"/>
+          </a:xfrm>
+          <a:prstGeom prst="rect">
+            <a:avLst/>
+          </a:prstGeom>
+          <a:solidFill>
+            <a:srgbClr val="2E7D32"/>
+          </a:solidFill>
+          <a:ln/>
+        </p:spPr>
+      </p:sp>
+      <p:sp>
+        <p:nvSpPr>
+          <p:cNvPr id="3" name="Text 1"/>
+          <p:cNvSpPr/>
+          <p:nvPr/>
+        </p:nvSpPr>
+        <p:spPr>
+          <a:xfrm>
+            <a:off x="457200" y="182880"/>
+            <a:ext cx="8229600" cy="594360"/>
           </a:xfrm>
           <a:prstGeom prst="rect">
             <a:avLst/>
@@ -4138,7 +6161,7 @@
               <a:buNone/>
             </a:pPr>
             <a:r>
-              <a:rPr lang="en-US" sz="2000" b="1" dirty="0">
+              <a:rPr lang="en-US" sz="2400" b="1" dirty="0">
                 <a:solidFill>
                   <a:srgbClr val="1B5E20"/>
                 </a:solidFill>
@@ -4146,42 +6169,69 @@
                 <a:ea typeface="Trebuchet MS" pitchFamily="34" charset="-122"/>
                 <a:cs typeface="Trebuchet MS" pitchFamily="34" charset="-120"/>
               </a:rPr>
-              <a:t>📋 Mémo Module 2 — Recueil des besoins</a:t>
-            </a:r>
-            <a:endParaRPr lang="en-US" sz="2000" dirty="0"/>
-          </a:p>
-        </p:txBody>
-      </p:sp>
-      <p:sp>
-        <p:nvSpPr>
-          <p:cNvPr id="3" name="Shape 1"/>
-          <p:cNvSpPr/>
-          <p:nvPr/>
-        </p:nvSpPr>
-        <p:spPr>
-          <a:xfrm>
-            <a:off x="457200" y="731520"/>
-            <a:ext cx="8229600" cy="320040"/>
-          </a:xfrm>
-          <a:prstGeom prst="rect">
-            <a:avLst/>
-          </a:prstGeom>
-          <a:solidFill>
-            <a:srgbClr val="FFF3E0"/>
-          </a:solidFill>
-          <a:ln/>
-        </p:spPr>
-      </p:sp>
-      <p:sp>
-        <p:nvSpPr>
-          <p:cNvPr id="4" name="Text 2"/>
-          <p:cNvSpPr/>
-          <p:nvPr/>
-        </p:nvSpPr>
-        <p:spPr>
-          <a:xfrm>
-            <a:off x="640080" y="731520"/>
-            <a:ext cx="7772400" cy="320040"/>
+              <a:t>Le cahier des charges simplifié</a:t>
+            </a:r>
+            <a:endParaRPr lang="en-US" sz="2400" dirty="0"/>
+          </a:p>
+        </p:txBody>
+      </p:sp>
+      <p:sp>
+        <p:nvSpPr>
+          <p:cNvPr id="4" name="Shape 2"/>
+          <p:cNvSpPr/>
+          <p:nvPr/>
+        </p:nvSpPr>
+        <p:spPr>
+          <a:xfrm>
+            <a:off x="457200" y="914400"/>
+            <a:ext cx="8229600" cy="566928"/>
+          </a:xfrm>
+          <a:prstGeom prst="rect">
+            <a:avLst/>
+          </a:prstGeom>
+          <a:solidFill>
+            <a:srgbClr val="FFFFFF"/>
+          </a:solidFill>
+          <a:ln/>
+          <a:effectLst>
+            <a:outerShdw sx="100000" sy="100000" kx="0" ky="0" algn="bl" rotWithShape="0" blurRad="50800" dist="25400" dir="8100000">
+              <a:srgbClr val="000000">
+                <a:alpha val="12000"/>
+              </a:srgbClr>
+            </a:outerShdw>
+          </a:effectLst>
+        </p:spPr>
+      </p:sp>
+      <p:sp>
+        <p:nvSpPr>
+          <p:cNvPr id="5" name="Shape 3"/>
+          <p:cNvSpPr/>
+          <p:nvPr/>
+        </p:nvSpPr>
+        <p:spPr>
+          <a:xfrm>
+            <a:off x="457200" y="914400"/>
+            <a:ext cx="45720" cy="566928"/>
+          </a:xfrm>
+          <a:prstGeom prst="rect">
+            <a:avLst/>
+          </a:prstGeom>
+          <a:solidFill>
+            <a:srgbClr val="2E7D32"/>
+          </a:solidFill>
+          <a:ln/>
+        </p:spPr>
+      </p:sp>
+      <p:sp>
+        <p:nvSpPr>
+          <p:cNvPr id="6" name="Text 4"/>
+          <p:cNvSpPr/>
+          <p:nvPr/>
+        </p:nvSpPr>
+        <p:spPr>
+          <a:xfrm>
+            <a:off x="685800" y="914400"/>
+            <a:ext cx="7818120" cy="566928"/>
           </a:xfrm>
           <a:prstGeom prst="rect">
             <a:avLst/>
@@ -4197,30 +6247,30 @@
               <a:buNone/>
             </a:pPr>
             <a:r>
-              <a:rPr lang="en-US" sz="1000" b="1" dirty="0">
-                <a:solidFill>
-                  <a:srgbClr val="E65100"/>
+              <a:rPr lang="en-US" sz="1200" dirty="0">
+                <a:solidFill>
+                  <a:srgbClr val="1A1A2E"/>
                 </a:solidFill>
                 <a:latin typeface="Calibri" pitchFamily="34" charset="0"/>
                 <a:ea typeface="Calibri" pitchFamily="34" charset="-122"/>
                 <a:cs typeface="Calibri" pitchFamily="34" charset="-120"/>
               </a:rPr>
-              <a:t>🔒 Ce mémo se débloque quand toutes les phases du module sont terminées !</a:t>
-            </a:r>
-            <a:endParaRPr lang="en-US" sz="1000" dirty="0"/>
-          </a:p>
-        </p:txBody>
-      </p:sp>
-      <p:sp>
-        <p:nvSpPr>
-          <p:cNvPr id="5" name="Shape 3"/>
-          <p:cNvSpPr/>
-          <p:nvPr/>
-        </p:nvSpPr>
-        <p:spPr>
-          <a:xfrm>
-            <a:off x="457200" y="1188720"/>
-            <a:ext cx="8229600" cy="713232"/>
+              <a:t>1. CONTEXTE : SwissSound Studios, studio d'enregistrement, Suisse romande</a:t>
+            </a:r>
+            <a:endParaRPr lang="en-US" sz="1200" dirty="0"/>
+          </a:p>
+        </p:txBody>
+      </p:sp>
+      <p:sp>
+        <p:nvSpPr>
+          <p:cNvPr id="7" name="Shape 5"/>
+          <p:cNvSpPr/>
+          <p:nvPr/>
+        </p:nvSpPr>
+        <p:spPr>
+          <a:xfrm>
+            <a:off x="457200" y="1508760"/>
+            <a:ext cx="8229600" cy="566928"/>
           </a:xfrm>
           <a:prstGeom prst="rect">
             <a:avLst/>
@@ -4229,18 +6279,45 @@
             <a:srgbClr val="E8F5E9"/>
           </a:solidFill>
           <a:ln/>
-        </p:spPr>
-      </p:sp>
-      <p:sp>
-        <p:nvSpPr>
-          <p:cNvPr id="6" name="Text 4"/>
-          <p:cNvSpPr/>
-          <p:nvPr/>
-        </p:nvSpPr>
-        <p:spPr>
-          <a:xfrm>
-            <a:off x="640080" y="1188720"/>
-            <a:ext cx="2560320" cy="713232"/>
+          <a:effectLst>
+            <a:outerShdw sx="100000" sy="100000" kx="0" ky="0" algn="bl" rotWithShape="0" blurRad="50800" dist="25400" dir="8100000">
+              <a:srgbClr val="000000">
+                <a:alpha val="12000"/>
+              </a:srgbClr>
+            </a:outerShdw>
+          </a:effectLst>
+        </p:spPr>
+      </p:sp>
+      <p:sp>
+        <p:nvSpPr>
+          <p:cNvPr id="8" name="Shape 6"/>
+          <p:cNvSpPr/>
+          <p:nvPr/>
+        </p:nvSpPr>
+        <p:spPr>
+          <a:xfrm>
+            <a:off x="457200" y="1508760"/>
+            <a:ext cx="45720" cy="566928"/>
+          </a:xfrm>
+          <a:prstGeom prst="rect">
+            <a:avLst/>
+          </a:prstGeom>
+          <a:solidFill>
+            <a:srgbClr val="2E7D32"/>
+          </a:solidFill>
+          <a:ln/>
+        </p:spPr>
+      </p:sp>
+      <p:sp>
+        <p:nvSpPr>
+          <p:cNvPr id="9" name="Text 7"/>
+          <p:cNvSpPr/>
+          <p:nvPr/>
+        </p:nvSpPr>
+        <p:spPr>
+          <a:xfrm>
+            <a:off x="685800" y="1508760"/>
+            <a:ext cx="7818120" cy="566928"/>
           </a:xfrm>
           <a:prstGeom prst="rect">
             <a:avLst/>
@@ -4256,7 +6333,442 @@
               <a:buNone/>
             </a:pPr>
             <a:r>
-              <a:rPr lang="en-US" sz="1000" b="1" dirty="0">
+              <a:rPr lang="en-US" sz="1200" dirty="0">
+                <a:solidFill>
+                  <a:srgbClr val="1A1A2E"/>
+                </a:solidFill>
+                <a:latin typeface="Calibri" pitchFamily="34" charset="0"/>
+                <a:ea typeface="Calibri" pitchFamily="34" charset="-122"/>
+                <a:cs typeface="Calibri" pitchFamily="34" charset="-120"/>
+              </a:rPr>
+              <a:t>2. BESOINS UTILISATEUR : liste des fonctionnalités (CRUD artistes, sessions...)</a:t>
+            </a:r>
+            <a:endParaRPr lang="en-US" sz="1200" dirty="0"/>
+          </a:p>
+        </p:txBody>
+      </p:sp>
+      <p:sp>
+        <p:nvSpPr>
+          <p:cNvPr id="10" name="Shape 8"/>
+          <p:cNvSpPr/>
+          <p:nvPr/>
+        </p:nvSpPr>
+        <p:spPr>
+          <a:xfrm>
+            <a:off x="457200" y="2103120"/>
+            <a:ext cx="8229600" cy="566928"/>
+          </a:xfrm>
+          <a:prstGeom prst="rect">
+            <a:avLst/>
+          </a:prstGeom>
+          <a:solidFill>
+            <a:srgbClr val="FFFFFF"/>
+          </a:solidFill>
+          <a:ln/>
+          <a:effectLst>
+            <a:outerShdw sx="100000" sy="100000" kx="0" ky="0" algn="bl" rotWithShape="0" blurRad="50800" dist="25400" dir="8100000">
+              <a:srgbClr val="000000">
+                <a:alpha val="12000"/>
+              </a:srgbClr>
+            </a:outerShdw>
+          </a:effectLst>
+        </p:spPr>
+      </p:sp>
+      <p:sp>
+        <p:nvSpPr>
+          <p:cNvPr id="11" name="Shape 9"/>
+          <p:cNvSpPr/>
+          <p:nvPr/>
+        </p:nvSpPr>
+        <p:spPr>
+          <a:xfrm>
+            <a:off x="457200" y="2103120"/>
+            <a:ext cx="45720" cy="566928"/>
+          </a:xfrm>
+          <a:prstGeom prst="rect">
+            <a:avLst/>
+          </a:prstGeom>
+          <a:solidFill>
+            <a:srgbClr val="2E7D32"/>
+          </a:solidFill>
+          <a:ln/>
+        </p:spPr>
+      </p:sp>
+      <p:sp>
+        <p:nvSpPr>
+          <p:cNvPr id="12" name="Text 10"/>
+          <p:cNvSpPr/>
+          <p:nvPr/>
+        </p:nvSpPr>
+        <p:spPr>
+          <a:xfrm>
+            <a:off x="685800" y="2103120"/>
+            <a:ext cx="7818120" cy="566928"/>
+          </a:xfrm>
+          <a:prstGeom prst="rect">
+            <a:avLst/>
+          </a:prstGeom>
+          <a:noFill/>
+          <a:ln/>
+        </p:spPr>
+        <p:txBody>
+          <a:bodyPr wrap="square" lIns="0" tIns="0" rIns="0" bIns="0" rtlCol="0" anchor="ctr"/>
+          <a:lstStyle/>
+          <a:p>
+            <a:pPr indent="0" marL="0">
+              <a:buNone/>
+            </a:pPr>
+            <a:r>
+              <a:rPr lang="en-US" sz="1200" dirty="0">
+                <a:solidFill>
+                  <a:srgbClr val="1A1A2E"/>
+                </a:solidFill>
+                <a:latin typeface="Calibri" pitchFamily="34" charset="0"/>
+                <a:ea typeface="Calibri" pitchFamily="34" charset="-122"/>
+                <a:cs typeface="Calibri" pitchFamily="34" charset="-120"/>
+              </a:rPr>
+              <a:t>3. BESOINS SYSTÈME : performance, sécurité, compatibilité, RGPD</a:t>
+            </a:r>
+            <a:endParaRPr lang="en-US" sz="1200" dirty="0"/>
+          </a:p>
+        </p:txBody>
+      </p:sp>
+      <p:sp>
+        <p:nvSpPr>
+          <p:cNvPr id="13" name="Shape 11"/>
+          <p:cNvSpPr/>
+          <p:nvPr/>
+        </p:nvSpPr>
+        <p:spPr>
+          <a:xfrm>
+            <a:off x="457200" y="2697480"/>
+            <a:ext cx="8229600" cy="566928"/>
+          </a:xfrm>
+          <a:prstGeom prst="rect">
+            <a:avLst/>
+          </a:prstGeom>
+          <a:solidFill>
+            <a:srgbClr val="E8F5E9"/>
+          </a:solidFill>
+          <a:ln/>
+          <a:effectLst>
+            <a:outerShdw sx="100000" sy="100000" kx="0" ky="0" algn="bl" rotWithShape="0" blurRad="50800" dist="25400" dir="8100000">
+              <a:srgbClr val="000000">
+                <a:alpha val="12000"/>
+              </a:srgbClr>
+            </a:outerShdw>
+          </a:effectLst>
+        </p:spPr>
+      </p:sp>
+      <p:sp>
+        <p:nvSpPr>
+          <p:cNvPr id="14" name="Shape 12"/>
+          <p:cNvSpPr/>
+          <p:nvPr/>
+        </p:nvSpPr>
+        <p:spPr>
+          <a:xfrm>
+            <a:off x="457200" y="2697480"/>
+            <a:ext cx="45720" cy="566928"/>
+          </a:xfrm>
+          <a:prstGeom prst="rect">
+            <a:avLst/>
+          </a:prstGeom>
+          <a:solidFill>
+            <a:srgbClr val="2E7D32"/>
+          </a:solidFill>
+          <a:ln/>
+        </p:spPr>
+      </p:sp>
+      <p:sp>
+        <p:nvSpPr>
+          <p:cNvPr id="15" name="Text 13"/>
+          <p:cNvSpPr/>
+          <p:nvPr/>
+        </p:nvSpPr>
+        <p:spPr>
+          <a:xfrm>
+            <a:off x="685800" y="2697480"/>
+            <a:ext cx="7818120" cy="566928"/>
+          </a:xfrm>
+          <a:prstGeom prst="rect">
+            <a:avLst/>
+          </a:prstGeom>
+          <a:noFill/>
+          <a:ln/>
+        </p:spPr>
+        <p:txBody>
+          <a:bodyPr wrap="square" lIns="0" tIns="0" rIns="0" bIns="0" rtlCol="0" anchor="ctr"/>
+          <a:lstStyle/>
+          <a:p>
+            <a:pPr indent="0" marL="0">
+              <a:buNone/>
+            </a:pPr>
+            <a:r>
+              <a:rPr lang="en-US" sz="1200" dirty="0">
+                <a:solidFill>
+                  <a:srgbClr val="1A1A2E"/>
+                </a:solidFill>
+                <a:latin typeface="Calibri" pitchFamily="34" charset="0"/>
+                <a:ea typeface="Calibri" pitchFamily="34" charset="-122"/>
+                <a:cs typeface="Calibri" pitchFamily="34" charset="-120"/>
+              </a:rPr>
+              <a:t>4. DOCUMENTS MÉTIER : fiche artiste, bon de session, facture, inventaire</a:t>
+            </a:r>
+            <a:endParaRPr lang="en-US" sz="1200" dirty="0"/>
+          </a:p>
+        </p:txBody>
+      </p:sp>
+      <p:sp>
+        <p:nvSpPr>
+          <p:cNvPr id="16" name="Shape 14"/>
+          <p:cNvSpPr/>
+          <p:nvPr/>
+        </p:nvSpPr>
+        <p:spPr>
+          <a:xfrm>
+            <a:off x="457200" y="3291840"/>
+            <a:ext cx="8229600" cy="566928"/>
+          </a:xfrm>
+          <a:prstGeom prst="rect">
+            <a:avLst/>
+          </a:prstGeom>
+          <a:solidFill>
+            <a:srgbClr val="FFFFFF"/>
+          </a:solidFill>
+          <a:ln/>
+          <a:effectLst>
+            <a:outerShdw sx="100000" sy="100000" kx="0" ky="0" algn="bl" rotWithShape="0" blurRad="50800" dist="25400" dir="8100000">
+              <a:srgbClr val="000000">
+                <a:alpha val="12000"/>
+              </a:srgbClr>
+            </a:outerShdw>
+          </a:effectLst>
+        </p:spPr>
+      </p:sp>
+      <p:sp>
+        <p:nvSpPr>
+          <p:cNvPr id="17" name="Shape 15"/>
+          <p:cNvSpPr/>
+          <p:nvPr/>
+        </p:nvSpPr>
+        <p:spPr>
+          <a:xfrm>
+            <a:off x="457200" y="3291840"/>
+            <a:ext cx="45720" cy="566928"/>
+          </a:xfrm>
+          <a:prstGeom prst="rect">
+            <a:avLst/>
+          </a:prstGeom>
+          <a:solidFill>
+            <a:srgbClr val="2E7D32"/>
+          </a:solidFill>
+          <a:ln/>
+        </p:spPr>
+      </p:sp>
+      <p:sp>
+        <p:nvSpPr>
+          <p:cNvPr id="18" name="Text 16"/>
+          <p:cNvSpPr/>
+          <p:nvPr/>
+        </p:nvSpPr>
+        <p:spPr>
+          <a:xfrm>
+            <a:off x="685800" y="3291840"/>
+            <a:ext cx="7818120" cy="566928"/>
+          </a:xfrm>
+          <a:prstGeom prst="rect">
+            <a:avLst/>
+          </a:prstGeom>
+          <a:noFill/>
+          <a:ln/>
+        </p:spPr>
+        <p:txBody>
+          <a:bodyPr wrap="square" lIns="0" tIns="0" rIns="0" bIns="0" rtlCol="0" anchor="ctr"/>
+          <a:lstStyle/>
+          <a:p>
+            <a:pPr indent="0" marL="0">
+              <a:buNone/>
+            </a:pPr>
+            <a:r>
+              <a:rPr lang="en-US" sz="1200" dirty="0">
+                <a:solidFill>
+                  <a:srgbClr val="1A1A2E"/>
+                </a:solidFill>
+                <a:latin typeface="Calibri" pitchFamily="34" charset="0"/>
+                <a:ea typeface="Calibri" pitchFamily="34" charset="-122"/>
+                <a:cs typeface="Calibri" pitchFamily="34" charset="-120"/>
+              </a:rPr>
+              <a:t>5. PÉRIMÈTRE : inclus (gestion interne) / exclu (site web public, streaming)</a:t>
+            </a:r>
+            <a:endParaRPr lang="en-US" sz="1200" dirty="0"/>
+          </a:p>
+        </p:txBody>
+      </p:sp>
+      <p:sp>
+        <p:nvSpPr>
+          <p:cNvPr id="19" name="Shape 17"/>
+          <p:cNvSpPr/>
+          <p:nvPr/>
+        </p:nvSpPr>
+        <p:spPr>
+          <a:xfrm>
+            <a:off x="457200" y="3886200"/>
+            <a:ext cx="8229600" cy="566928"/>
+          </a:xfrm>
+          <a:prstGeom prst="rect">
+            <a:avLst/>
+          </a:prstGeom>
+          <a:solidFill>
+            <a:srgbClr val="E8F5E9"/>
+          </a:solidFill>
+          <a:ln/>
+          <a:effectLst>
+            <a:outerShdw sx="100000" sy="100000" kx="0" ky="0" algn="bl" rotWithShape="0" blurRad="50800" dist="25400" dir="8100000">
+              <a:srgbClr val="000000">
+                <a:alpha val="12000"/>
+              </a:srgbClr>
+            </a:outerShdw>
+          </a:effectLst>
+        </p:spPr>
+      </p:sp>
+      <p:sp>
+        <p:nvSpPr>
+          <p:cNvPr id="20" name="Shape 18"/>
+          <p:cNvSpPr/>
+          <p:nvPr/>
+        </p:nvSpPr>
+        <p:spPr>
+          <a:xfrm>
+            <a:off x="457200" y="3886200"/>
+            <a:ext cx="45720" cy="566928"/>
+          </a:xfrm>
+          <a:prstGeom prst="rect">
+            <a:avLst/>
+          </a:prstGeom>
+          <a:solidFill>
+            <a:srgbClr val="2E7D32"/>
+          </a:solidFill>
+          <a:ln/>
+        </p:spPr>
+      </p:sp>
+      <p:sp>
+        <p:nvSpPr>
+          <p:cNvPr id="21" name="Text 19"/>
+          <p:cNvSpPr/>
+          <p:nvPr/>
+        </p:nvSpPr>
+        <p:spPr>
+          <a:xfrm>
+            <a:off x="685800" y="3886200"/>
+            <a:ext cx="7818120" cy="566928"/>
+          </a:xfrm>
+          <a:prstGeom prst="rect">
+            <a:avLst/>
+          </a:prstGeom>
+          <a:noFill/>
+          <a:ln/>
+        </p:spPr>
+        <p:txBody>
+          <a:bodyPr wrap="square" lIns="0" tIns="0" rIns="0" bIns="0" rtlCol="0" anchor="ctr"/>
+          <a:lstStyle/>
+          <a:p>
+            <a:pPr indent="0" marL="0">
+              <a:buNone/>
+            </a:pPr>
+            <a:r>
+              <a:rPr lang="en-US" sz="1200" dirty="0">
+                <a:solidFill>
+                  <a:srgbClr val="1A1A2E"/>
+                </a:solidFill>
+                <a:latin typeface="Calibri" pitchFamily="34" charset="0"/>
+                <a:ea typeface="Calibri" pitchFamily="34" charset="-122"/>
+                <a:cs typeface="Calibri" pitchFamily="34" charset="-120"/>
+              </a:rPr>
+              <a:t>6. CONTRAINTES : MySQL, HeidiSQL, budget limité, 1 développeur</a:t>
+            </a:r>
+            <a:endParaRPr lang="en-US" sz="1200" dirty="0"/>
+          </a:p>
+        </p:txBody>
+      </p:sp>
+    </p:spTree>
+  </p:cSld>
+  <p:clrMapOvr>
+    <a:masterClrMapping/>
+  </p:clrMapOvr>
+</p:sld>
+</file>
+
+<file path=ppt/slides/slide8.xml><?xml version="1.0" encoding="utf-8"?>
+<p:sld xmlns:a="http://schemas.openxmlformats.org/drawingml/2006/main" xmlns:r="http://schemas.openxmlformats.org/officeDocument/2006/relationships" xmlns:p="http://schemas.openxmlformats.org/presentationml/2006/main">
+  <p:cSld name="Slide 8">
+    <p:bg>
+      <p:bgPr>
+        <a:solidFill>
+          <a:srgbClr val="E8F5E9"/>
+        </a:solidFill>
+      </p:bgPr>
+    </p:bg>
+    <p:spTree>
+      <p:nvGrpSpPr>
+        <p:cNvPr id="1" name=""/>
+        <p:cNvGrpSpPr/>
+        <p:nvPr/>
+      </p:nvGrpSpPr>
+      <p:grpSpPr>
+        <a:xfrm>
+          <a:off x="0" y="0"/>
+          <a:ext cx="0" cy="0"/>
+          <a:chOff x="0" y="0"/>
+          <a:chExt cx="0" cy="0"/>
+        </a:xfrm>
+      </p:grpSpPr>
+      <p:sp>
+        <p:nvSpPr>
+          <p:cNvPr id="2" name="Shape 0"/>
+          <p:cNvSpPr/>
+          <p:nvPr/>
+        </p:nvSpPr>
+        <p:spPr>
+          <a:xfrm>
+            <a:off x="0" y="0"/>
+            <a:ext cx="9144000" cy="54864"/>
+          </a:xfrm>
+          <a:prstGeom prst="rect">
+            <a:avLst/>
+          </a:prstGeom>
+          <a:solidFill>
+            <a:srgbClr val="FF6F00"/>
+          </a:solidFill>
+          <a:ln/>
+        </p:spPr>
+      </p:sp>
+      <p:sp>
+        <p:nvSpPr>
+          <p:cNvPr id="3" name="Text 1"/>
+          <p:cNvSpPr/>
+          <p:nvPr/>
+        </p:nvSpPr>
+        <p:spPr>
+          <a:xfrm>
+            <a:off x="457200" y="182880"/>
+            <a:ext cx="8229600" cy="548640"/>
+          </a:xfrm>
+          <a:prstGeom prst="rect">
+            <a:avLst/>
+          </a:prstGeom>
+          <a:noFill/>
+          <a:ln/>
+        </p:spPr>
+        <p:txBody>
+          <a:bodyPr wrap="square" lIns="0" tIns="0" rIns="0" bIns="0" rtlCol="0" anchor="ctr"/>
+          <a:lstStyle/>
+          <a:p>
+            <a:pPr indent="0" marL="0">
+              <a:buNone/>
+            </a:pPr>
+            <a:r>
+              <a:rPr lang="en-US" sz="2400" b="1" dirty="0">
                 <a:solidFill>
                   <a:srgbClr val="1B5E20"/>
                 </a:solidFill>
@@ -4264,9 +6776,95 @@
                 <a:ea typeface="Trebuchet MS" pitchFamily="34" charset="-122"/>
                 <a:cs typeface="Trebuchet MS" pitchFamily="34" charset="-120"/>
               </a:rPr>
-              <a:t>Besoins utilisateur vs système</a:t>
-            </a:r>
-            <a:endParaRPr lang="en-US" sz="1000" dirty="0"/>
+              <a:t>✏️ Exercice Module 2</a:t>
+            </a:r>
+            <a:endParaRPr lang="en-US" sz="2400" dirty="0"/>
+          </a:p>
+        </p:txBody>
+      </p:sp>
+      <p:sp>
+        <p:nvSpPr>
+          <p:cNvPr id="4" name="Shape 2"/>
+          <p:cNvSpPr/>
+          <p:nvPr/>
+        </p:nvSpPr>
+        <p:spPr>
+          <a:xfrm>
+            <a:off x="457200" y="914400"/>
+            <a:ext cx="8229600" cy="566928"/>
+          </a:xfrm>
+          <a:prstGeom prst="rect">
+            <a:avLst/>
+          </a:prstGeom>
+          <a:solidFill>
+            <a:srgbClr val="FFFFFF"/>
+          </a:solidFill>
+          <a:ln/>
+          <a:effectLst>
+            <a:outerShdw sx="100000" sy="100000" kx="0" ky="0" algn="bl" rotWithShape="0" blurRad="50800" dist="25400" dir="8100000">
+              <a:srgbClr val="000000">
+                <a:alpha val="12000"/>
+              </a:srgbClr>
+            </a:outerShdw>
+          </a:effectLst>
+        </p:spPr>
+      </p:sp>
+      <p:sp>
+        <p:nvSpPr>
+          <p:cNvPr id="5" name="Shape 3"/>
+          <p:cNvSpPr/>
+          <p:nvPr/>
+        </p:nvSpPr>
+        <p:spPr>
+          <a:xfrm>
+            <a:off x="457200" y="914400"/>
+            <a:ext cx="457200" cy="566928"/>
+          </a:xfrm>
+          <a:prstGeom prst="rect">
+            <a:avLst/>
+          </a:prstGeom>
+          <a:solidFill>
+            <a:srgbClr val="FF6F00"/>
+          </a:solidFill>
+          <a:ln/>
+        </p:spPr>
+      </p:sp>
+      <p:sp>
+        <p:nvSpPr>
+          <p:cNvPr id="6" name="Text 4"/>
+          <p:cNvSpPr/>
+          <p:nvPr/>
+        </p:nvSpPr>
+        <p:spPr>
+          <a:xfrm>
+            <a:off x="457200" y="914400"/>
+            <a:ext cx="457200" cy="566928"/>
+          </a:xfrm>
+          <a:prstGeom prst="rect">
+            <a:avLst/>
+          </a:prstGeom>
+          <a:noFill/>
+          <a:ln/>
+        </p:spPr>
+        <p:txBody>
+          <a:bodyPr wrap="square" lIns="0" tIns="0" rIns="0" bIns="0" rtlCol="0" anchor="ctr"/>
+          <a:lstStyle/>
+          <a:p>
+            <a:pPr algn="ctr" indent="0" marL="0">
+              <a:buNone/>
+            </a:pPr>
+            <a:r>
+              <a:rPr lang="en-US" sz="1600" b="1" dirty="0">
+                <a:solidFill>
+                  <a:srgbClr val="FFFFFF"/>
+                </a:solidFill>
+                <a:latin typeface="Trebuchet MS" pitchFamily="34" charset="0"/>
+                <a:ea typeface="Trebuchet MS" pitchFamily="34" charset="-122"/>
+                <a:cs typeface="Trebuchet MS" pitchFamily="34" charset="-120"/>
+              </a:rPr>
+              <a:t>1</a:t>
+            </a:r>
+            <a:endParaRPr lang="en-US" sz="1600" dirty="0"/>
           </a:p>
         </p:txBody>
       </p:sp>
@@ -4278,8 +6876,8 @@
         </p:nvSpPr>
         <p:spPr>
           <a:xfrm>
-            <a:off x="3291840" y="1188720"/>
-            <a:ext cx="5212080" cy="713232"/>
+            <a:off x="1051560" y="914400"/>
+            <a:ext cx="7498080" cy="566928"/>
           </a:xfrm>
           <a:prstGeom prst="rect">
             <a:avLst/>
@@ -4295,17 +6893,17 @@
               <a:buNone/>
             </a:pPr>
             <a:r>
-              <a:rPr lang="en-US" sz="900" dirty="0">
-                <a:solidFill>
-                  <a:srgbClr val="333333"/>
+              <a:rPr lang="en-US" sz="1100" dirty="0">
+                <a:solidFill>
+                  <a:srgbClr val="1A1A2E"/>
                 </a:solidFill>
                 <a:latin typeface="Calibri" pitchFamily="34" charset="0"/>
                 <a:ea typeface="Calibri" pitchFamily="34" charset="-122"/>
                 <a:cs typeface="Calibri" pitchFamily="34" charset="-120"/>
               </a:rPr>
-              <a:t>Besoin utilisateur : ce que l'utilisateur veut FAIRE (fonctionnel) | Ex: 'Je veux pouvoir ajouter un artiste' | Besoin s...</a:t>
-            </a:r>
-            <a:endParaRPr lang="en-US" sz="900" dirty="0"/>
+              <a:t>Rédiger 5 besoins UTILISATEUR pour SwissSound (fonctionnels)</a:t>
+            </a:r>
+            <a:endParaRPr lang="en-US" sz="1100" dirty="0"/>
           </a:p>
         </p:txBody>
       </p:sp>
@@ -4317,8 +6915,8 @@
         </p:nvSpPr>
         <p:spPr>
           <a:xfrm>
-            <a:off x="457200" y="1965960"/>
-            <a:ext cx="8229600" cy="713232"/>
+            <a:off x="457200" y="1554480"/>
+            <a:ext cx="8229600" cy="566928"/>
           </a:xfrm>
           <a:prstGeom prst="rect">
             <a:avLst/>
@@ -4327,57 +6925,84 @@
             <a:srgbClr val="FFFFFF"/>
           </a:solidFill>
           <a:ln/>
-        </p:spPr>
-      </p:sp>
-      <p:sp>
-        <p:nvSpPr>
-          <p:cNvPr id="9" name="Text 7"/>
-          <p:cNvSpPr/>
-          <p:nvPr/>
-        </p:nvSpPr>
-        <p:spPr>
-          <a:xfrm>
-            <a:off x="640080" y="1965960"/>
-            <a:ext cx="2560320" cy="713232"/>
-          </a:xfrm>
-          <a:prstGeom prst="rect">
-            <a:avLst/>
-          </a:prstGeom>
-          <a:noFill/>
-          <a:ln/>
-        </p:spPr>
-        <p:txBody>
-          <a:bodyPr wrap="square" lIns="0" tIns="0" rIns="0" bIns="0" rtlCol="0" anchor="ctr"/>
-          <a:lstStyle/>
-          <a:p>
-            <a:pPr indent="0" marL="0">
-              <a:buNone/>
-            </a:pPr>
-            <a:r>
-              <a:rPr lang="en-US" sz="1000" b="1" dirty="0">
-                <a:solidFill>
-                  <a:srgbClr val="1B5E20"/>
+          <a:effectLst>
+            <a:outerShdw sx="100000" sy="100000" kx="0" ky="0" algn="bl" rotWithShape="0" blurRad="50800" dist="25400" dir="8100000">
+              <a:srgbClr val="000000">
+                <a:alpha val="12000"/>
+              </a:srgbClr>
+            </a:outerShdw>
+          </a:effectLst>
+        </p:spPr>
+      </p:sp>
+      <p:sp>
+        <p:nvSpPr>
+          <p:cNvPr id="9" name="Shape 7"/>
+          <p:cNvSpPr/>
+          <p:nvPr/>
+        </p:nvSpPr>
+        <p:spPr>
+          <a:xfrm>
+            <a:off x="457200" y="1554480"/>
+            <a:ext cx="457200" cy="566928"/>
+          </a:xfrm>
+          <a:prstGeom prst="rect">
+            <a:avLst/>
+          </a:prstGeom>
+          <a:solidFill>
+            <a:srgbClr val="FF6F00"/>
+          </a:solidFill>
+          <a:ln/>
+        </p:spPr>
+      </p:sp>
+      <p:sp>
+        <p:nvSpPr>
+          <p:cNvPr id="10" name="Text 8"/>
+          <p:cNvSpPr/>
+          <p:nvPr/>
+        </p:nvSpPr>
+        <p:spPr>
+          <a:xfrm>
+            <a:off x="457200" y="1554480"/>
+            <a:ext cx="457200" cy="566928"/>
+          </a:xfrm>
+          <a:prstGeom prst="rect">
+            <a:avLst/>
+          </a:prstGeom>
+          <a:noFill/>
+          <a:ln/>
+        </p:spPr>
+        <p:txBody>
+          <a:bodyPr wrap="square" lIns="0" tIns="0" rIns="0" bIns="0" rtlCol="0" anchor="ctr"/>
+          <a:lstStyle/>
+          <a:p>
+            <a:pPr algn="ctr" indent="0" marL="0">
+              <a:buNone/>
+            </a:pPr>
+            <a:r>
+              <a:rPr lang="en-US" sz="1600" b="1" dirty="0">
+                <a:solidFill>
+                  <a:srgbClr val="FFFFFF"/>
                 </a:solidFill>
                 <a:latin typeface="Trebuchet MS" pitchFamily="34" charset="0"/>
                 <a:ea typeface="Trebuchet MS" pitchFamily="34" charset="-122"/>
                 <a:cs typeface="Trebuchet MS" pitchFamily="34" charset="-120"/>
               </a:rPr>
-              <a:t>Techniques de recueil</a:t>
-            </a:r>
-            <a:endParaRPr lang="en-US" sz="1000" dirty="0"/>
-          </a:p>
-        </p:txBody>
-      </p:sp>
-      <p:sp>
-        <p:nvSpPr>
-          <p:cNvPr id="10" name="Text 8"/>
-          <p:cNvSpPr/>
-          <p:nvPr/>
-        </p:nvSpPr>
-        <p:spPr>
-          <a:xfrm>
-            <a:off x="3291840" y="1965960"/>
-            <a:ext cx="5212080" cy="713232"/>
+              <a:t>2</a:t>
+            </a:r>
+            <a:endParaRPr lang="en-US" sz="1600" dirty="0"/>
+          </a:p>
+        </p:txBody>
+      </p:sp>
+      <p:sp>
+        <p:nvSpPr>
+          <p:cNvPr id="11" name="Text 9"/>
+          <p:cNvSpPr/>
+          <p:nvPr/>
+        </p:nvSpPr>
+        <p:spPr>
+          <a:xfrm>
+            <a:off x="1051560" y="1554480"/>
+            <a:ext cx="7498080" cy="566928"/>
           </a:xfrm>
           <a:prstGeom prst="rect">
             <a:avLst/>
@@ -4393,89 +7018,116 @@
               <a:buNone/>
             </a:pPr>
             <a:r>
-              <a:rPr lang="en-US" sz="900" dirty="0">
-                <a:solidFill>
-                  <a:srgbClr val="333333"/>
+              <a:rPr lang="en-US" sz="1100" dirty="0">
+                <a:solidFill>
+                  <a:srgbClr val="1A1A2E"/>
                 </a:solidFill>
                 <a:latin typeface="Calibri" pitchFamily="34" charset="0"/>
                 <a:ea typeface="Calibri" pitchFamily="34" charset="-122"/>
                 <a:cs typeface="Calibri" pitchFamily="34" charset="-120"/>
               </a:rPr>
-              <a:t>Interview : questions directes au client/utilisateur | Observation : regarder comment le travail se fait | Questionnaire...</a:t>
-            </a:r>
-            <a:endParaRPr lang="en-US" sz="900" dirty="0"/>
-          </a:p>
-        </p:txBody>
-      </p:sp>
-      <p:sp>
-        <p:nvSpPr>
-          <p:cNvPr id="11" name="Shape 9"/>
-          <p:cNvSpPr/>
-          <p:nvPr/>
-        </p:nvSpPr>
-        <p:spPr>
-          <a:xfrm>
-            <a:off x="457200" y="2743200"/>
-            <a:ext cx="8229600" cy="713232"/>
-          </a:xfrm>
-          <a:prstGeom prst="rect">
-            <a:avLst/>
-          </a:prstGeom>
-          <a:solidFill>
-            <a:srgbClr val="E8F5E9"/>
-          </a:solidFill>
-          <a:ln/>
-        </p:spPr>
-      </p:sp>
-      <p:sp>
-        <p:nvSpPr>
-          <p:cNvPr id="12" name="Text 10"/>
-          <p:cNvSpPr/>
-          <p:nvPr/>
-        </p:nvSpPr>
-        <p:spPr>
-          <a:xfrm>
-            <a:off x="640080" y="2743200"/>
-            <a:ext cx="2560320" cy="713232"/>
-          </a:xfrm>
-          <a:prstGeom prst="rect">
-            <a:avLst/>
-          </a:prstGeom>
-          <a:noFill/>
-          <a:ln/>
-        </p:spPr>
-        <p:txBody>
-          <a:bodyPr wrap="square" lIns="0" tIns="0" rIns="0" bIns="0" rtlCol="0" anchor="ctr"/>
-          <a:lstStyle/>
-          <a:p>
-            <a:pPr indent="0" marL="0">
-              <a:buNone/>
-            </a:pPr>
-            <a:r>
-              <a:rPr lang="en-US" sz="1000" b="1" dirty="0">
-                <a:solidFill>
-                  <a:srgbClr val="1B5E20"/>
+              <a:t>Rédiger 5 besoins SYSTÈME (techniques, non-fonctionnels)</a:t>
+            </a:r>
+            <a:endParaRPr lang="en-US" sz="1100" dirty="0"/>
+          </a:p>
+        </p:txBody>
+      </p:sp>
+      <p:sp>
+        <p:nvSpPr>
+          <p:cNvPr id="12" name="Shape 10"/>
+          <p:cNvSpPr/>
+          <p:nvPr/>
+        </p:nvSpPr>
+        <p:spPr>
+          <a:xfrm>
+            <a:off x="457200" y="2194560"/>
+            <a:ext cx="8229600" cy="566928"/>
+          </a:xfrm>
+          <a:prstGeom prst="rect">
+            <a:avLst/>
+          </a:prstGeom>
+          <a:solidFill>
+            <a:srgbClr val="FFFFFF"/>
+          </a:solidFill>
+          <a:ln/>
+          <a:effectLst>
+            <a:outerShdw sx="100000" sy="100000" kx="0" ky="0" algn="bl" rotWithShape="0" blurRad="50800" dist="25400" dir="8100000">
+              <a:srgbClr val="000000">
+                <a:alpha val="12000"/>
+              </a:srgbClr>
+            </a:outerShdw>
+          </a:effectLst>
+        </p:spPr>
+      </p:sp>
+      <p:sp>
+        <p:nvSpPr>
+          <p:cNvPr id="13" name="Shape 11"/>
+          <p:cNvSpPr/>
+          <p:nvPr/>
+        </p:nvSpPr>
+        <p:spPr>
+          <a:xfrm>
+            <a:off x="457200" y="2194560"/>
+            <a:ext cx="457200" cy="566928"/>
+          </a:xfrm>
+          <a:prstGeom prst="rect">
+            <a:avLst/>
+          </a:prstGeom>
+          <a:solidFill>
+            <a:srgbClr val="FF6F00"/>
+          </a:solidFill>
+          <a:ln/>
+        </p:spPr>
+      </p:sp>
+      <p:sp>
+        <p:nvSpPr>
+          <p:cNvPr id="14" name="Text 12"/>
+          <p:cNvSpPr/>
+          <p:nvPr/>
+        </p:nvSpPr>
+        <p:spPr>
+          <a:xfrm>
+            <a:off x="457200" y="2194560"/>
+            <a:ext cx="457200" cy="566928"/>
+          </a:xfrm>
+          <a:prstGeom prst="rect">
+            <a:avLst/>
+          </a:prstGeom>
+          <a:noFill/>
+          <a:ln/>
+        </p:spPr>
+        <p:txBody>
+          <a:bodyPr wrap="square" lIns="0" tIns="0" rIns="0" bIns="0" rtlCol="0" anchor="ctr"/>
+          <a:lstStyle/>
+          <a:p>
+            <a:pPr algn="ctr" indent="0" marL="0">
+              <a:buNone/>
+            </a:pPr>
+            <a:r>
+              <a:rPr lang="en-US" sz="1600" b="1" dirty="0">
+                <a:solidFill>
+                  <a:srgbClr val="FFFFFF"/>
                 </a:solidFill>
                 <a:latin typeface="Trebuchet MS" pitchFamily="34" charset="0"/>
                 <a:ea typeface="Trebuchet MS" pitchFamily="34" charset="-122"/>
                 <a:cs typeface="Trebuchet MS" pitchFamily="34" charset="-120"/>
               </a:rPr>
-              <a:t>SwissSound : le brief client</a:t>
-            </a:r>
-            <a:endParaRPr lang="en-US" sz="1000" dirty="0"/>
-          </a:p>
-        </p:txBody>
-      </p:sp>
-      <p:sp>
-        <p:nvSpPr>
-          <p:cNvPr id="13" name="Text 11"/>
-          <p:cNvSpPr/>
-          <p:nvPr/>
-        </p:nvSpPr>
-        <p:spPr>
-          <a:xfrm>
-            <a:off x="3291840" y="2743200"/>
-            <a:ext cx="5212080" cy="713232"/>
+              <a:t>3</a:t>
+            </a:r>
+            <a:endParaRPr lang="en-US" sz="1600" dirty="0"/>
+          </a:p>
+        </p:txBody>
+      </p:sp>
+      <p:sp>
+        <p:nvSpPr>
+          <p:cNvPr id="15" name="Text 13"/>
+          <p:cNvSpPr/>
+          <p:nvPr/>
+        </p:nvSpPr>
+        <p:spPr>
+          <a:xfrm>
+            <a:off x="1051560" y="2194560"/>
+            <a:ext cx="7498080" cy="566928"/>
           </a:xfrm>
           <a:prstGeom prst="rect">
             <a:avLst/>
@@ -4491,30 +7143,30 @@
               <a:buNone/>
             </a:pPr>
             <a:r>
-              <a:rPr lang="en-US" sz="900" dirty="0">
-                <a:solidFill>
-                  <a:srgbClr val="333333"/>
+              <a:rPr lang="en-US" sz="1100" dirty="0">
+                <a:solidFill>
+                  <a:srgbClr val="1A1A2E"/>
                 </a:solidFill>
                 <a:latin typeface="Calibri" pitchFamily="34" charset="0"/>
                 <a:ea typeface="Calibri" pitchFamily="34" charset="-122"/>
                 <a:cs typeface="Calibri" pitchFamily="34" charset="-120"/>
               </a:rPr>
-              <a:t>Studio d'enregistrement en Suisse romande | Gère : artistes, albums, sessions, salles, ingénieurs, factures | 5 salles, ...</a:t>
-            </a:r>
-            <a:endParaRPr lang="en-US" sz="900" dirty="0"/>
-          </a:p>
-        </p:txBody>
-      </p:sp>
-      <p:sp>
-        <p:nvSpPr>
-          <p:cNvPr id="14" name="Shape 12"/>
-          <p:cNvSpPr/>
-          <p:nvPr/>
-        </p:nvSpPr>
-        <p:spPr>
-          <a:xfrm>
-            <a:off x="457200" y="3520440"/>
-            <a:ext cx="8229600" cy="713232"/>
+              <a:t>Lister tous les DOCUMENTS MÉTIER mentionnés par le directeur</a:t>
+            </a:r>
+            <a:endParaRPr lang="en-US" sz="1100" dirty="0"/>
+          </a:p>
+        </p:txBody>
+      </p:sp>
+      <p:sp>
+        <p:nvSpPr>
+          <p:cNvPr id="16" name="Shape 14"/>
+          <p:cNvSpPr/>
+          <p:nvPr/>
+        </p:nvSpPr>
+        <p:spPr>
+          <a:xfrm>
+            <a:off x="457200" y="2834640"/>
+            <a:ext cx="8229600" cy="566928"/>
           </a:xfrm>
           <a:prstGeom prst="rect">
             <a:avLst/>
@@ -4523,57 +7175,84 @@
             <a:srgbClr val="FFFFFF"/>
           </a:solidFill>
           <a:ln/>
-        </p:spPr>
-      </p:sp>
-      <p:sp>
-        <p:nvSpPr>
-          <p:cNvPr id="15" name="Text 13"/>
-          <p:cNvSpPr/>
-          <p:nvPr/>
-        </p:nvSpPr>
-        <p:spPr>
-          <a:xfrm>
-            <a:off x="640080" y="3520440"/>
-            <a:ext cx="2560320" cy="713232"/>
-          </a:xfrm>
-          <a:prstGeom prst="rect">
-            <a:avLst/>
-          </a:prstGeom>
-          <a:noFill/>
-          <a:ln/>
-        </p:spPr>
-        <p:txBody>
-          <a:bodyPr wrap="square" lIns="0" tIns="0" rIns="0" bIns="0" rtlCol="0" anchor="ctr"/>
-          <a:lstStyle/>
-          <a:p>
-            <a:pPr indent="0" marL="0">
-              <a:buNone/>
-            </a:pPr>
-            <a:r>
-              <a:rPr lang="en-US" sz="1000" b="1" dirty="0">
-                <a:solidFill>
-                  <a:srgbClr val="1B5E20"/>
+          <a:effectLst>
+            <a:outerShdw sx="100000" sy="100000" kx="0" ky="0" algn="bl" rotWithShape="0" blurRad="50800" dist="25400" dir="8100000">
+              <a:srgbClr val="000000">
+                <a:alpha val="12000"/>
+              </a:srgbClr>
+            </a:outerShdw>
+          </a:effectLst>
+        </p:spPr>
+      </p:sp>
+      <p:sp>
+        <p:nvSpPr>
+          <p:cNvPr id="17" name="Shape 15"/>
+          <p:cNvSpPr/>
+          <p:nvPr/>
+        </p:nvSpPr>
+        <p:spPr>
+          <a:xfrm>
+            <a:off x="457200" y="2834640"/>
+            <a:ext cx="457200" cy="566928"/>
+          </a:xfrm>
+          <a:prstGeom prst="rect">
+            <a:avLst/>
+          </a:prstGeom>
+          <a:solidFill>
+            <a:srgbClr val="FF6F00"/>
+          </a:solidFill>
+          <a:ln/>
+        </p:spPr>
+      </p:sp>
+      <p:sp>
+        <p:nvSpPr>
+          <p:cNvPr id="18" name="Text 16"/>
+          <p:cNvSpPr/>
+          <p:nvPr/>
+        </p:nvSpPr>
+        <p:spPr>
+          <a:xfrm>
+            <a:off x="457200" y="2834640"/>
+            <a:ext cx="457200" cy="566928"/>
+          </a:xfrm>
+          <a:prstGeom prst="rect">
+            <a:avLst/>
+          </a:prstGeom>
+          <a:noFill/>
+          <a:ln/>
+        </p:spPr>
+        <p:txBody>
+          <a:bodyPr wrap="square" lIns="0" tIns="0" rIns="0" bIns="0" rtlCol="0" anchor="ctr"/>
+          <a:lstStyle/>
+          <a:p>
+            <a:pPr algn="ctr" indent="0" marL="0">
+              <a:buNone/>
+            </a:pPr>
+            <a:r>
+              <a:rPr lang="en-US" sz="1600" b="1" dirty="0">
+                <a:solidFill>
+                  <a:srgbClr val="FFFFFF"/>
                 </a:solidFill>
                 <a:latin typeface="Trebuchet MS" pitchFamily="34" charset="0"/>
                 <a:ea typeface="Trebuchet MS" pitchFamily="34" charset="-122"/>
                 <a:cs typeface="Trebuchet MS" pitchFamily="34" charset="-120"/>
               </a:rPr>
-              <a:t>Le cahier des charges simplifié</a:t>
-            </a:r>
-            <a:endParaRPr lang="en-US" sz="1000" dirty="0"/>
-          </a:p>
-        </p:txBody>
-      </p:sp>
-      <p:sp>
-        <p:nvSpPr>
-          <p:cNvPr id="16" name="Text 14"/>
-          <p:cNvSpPr/>
-          <p:nvPr/>
-        </p:nvSpPr>
-        <p:spPr>
-          <a:xfrm>
-            <a:off x="3291840" y="3520440"/>
-            <a:ext cx="5212080" cy="713232"/>
+              <a:t>4</a:t>
+            </a:r>
+            <a:endParaRPr lang="en-US" sz="1600" dirty="0"/>
+          </a:p>
+        </p:txBody>
+      </p:sp>
+      <p:sp>
+        <p:nvSpPr>
+          <p:cNvPr id="19" name="Text 17"/>
+          <p:cNvSpPr/>
+          <p:nvPr/>
+        </p:nvSpPr>
+        <p:spPr>
+          <a:xfrm>
+            <a:off x="1051560" y="2834640"/>
+            <a:ext cx="7498080" cy="566928"/>
           </a:xfrm>
           <a:prstGeom prst="rect">
             <a:avLst/>
@@ -4589,17 +7268,511 @@
               <a:buNone/>
             </a:pPr>
             <a:r>
-              <a:rPr lang="en-US" sz="900" dirty="0">
-                <a:solidFill>
-                  <a:srgbClr val="333333"/>
+              <a:rPr lang="en-US" sz="1100" dirty="0">
+                <a:solidFill>
+                  <a:srgbClr val="1A1A2E"/>
                 </a:solidFill>
                 <a:latin typeface="Calibri" pitchFamily="34" charset="0"/>
                 <a:ea typeface="Calibri" pitchFamily="34" charset="-122"/>
                 <a:cs typeface="Calibri" pitchFamily="34" charset="-120"/>
               </a:rPr>
-              <a:t>1. Contexte : qui est le client, que fait-il ? | 2. Besoins utilisateur : liste des fonctionnalités | 3. Besoins système...</a:t>
-            </a:r>
-            <a:endParaRPr lang="en-US" sz="900" dirty="0"/>
+              <a:t>Préparer 10 questions d'interview supplémentaires</a:t>
+            </a:r>
+            <a:endParaRPr lang="en-US" sz="1100" dirty="0"/>
+          </a:p>
+        </p:txBody>
+      </p:sp>
+      <p:sp>
+        <p:nvSpPr>
+          <p:cNvPr id="20" name="Shape 18"/>
+          <p:cNvSpPr/>
+          <p:nvPr/>
+        </p:nvSpPr>
+        <p:spPr>
+          <a:xfrm>
+            <a:off x="457200" y="3474720"/>
+            <a:ext cx="8229600" cy="566928"/>
+          </a:xfrm>
+          <a:prstGeom prst="rect">
+            <a:avLst/>
+          </a:prstGeom>
+          <a:solidFill>
+            <a:srgbClr val="FFFFFF"/>
+          </a:solidFill>
+          <a:ln/>
+          <a:effectLst>
+            <a:outerShdw sx="100000" sy="100000" kx="0" ky="0" algn="bl" rotWithShape="0" blurRad="50800" dist="25400" dir="8100000">
+              <a:srgbClr val="000000">
+                <a:alpha val="12000"/>
+              </a:srgbClr>
+            </a:outerShdw>
+          </a:effectLst>
+        </p:spPr>
+      </p:sp>
+      <p:sp>
+        <p:nvSpPr>
+          <p:cNvPr id="21" name="Shape 19"/>
+          <p:cNvSpPr/>
+          <p:nvPr/>
+        </p:nvSpPr>
+        <p:spPr>
+          <a:xfrm>
+            <a:off x="457200" y="3474720"/>
+            <a:ext cx="457200" cy="566928"/>
+          </a:xfrm>
+          <a:prstGeom prst="rect">
+            <a:avLst/>
+          </a:prstGeom>
+          <a:solidFill>
+            <a:srgbClr val="FF6F00"/>
+          </a:solidFill>
+          <a:ln/>
+        </p:spPr>
+      </p:sp>
+      <p:sp>
+        <p:nvSpPr>
+          <p:cNvPr id="22" name="Text 20"/>
+          <p:cNvSpPr/>
+          <p:nvPr/>
+        </p:nvSpPr>
+        <p:spPr>
+          <a:xfrm>
+            <a:off x="457200" y="3474720"/>
+            <a:ext cx="457200" cy="566928"/>
+          </a:xfrm>
+          <a:prstGeom prst="rect">
+            <a:avLst/>
+          </a:prstGeom>
+          <a:noFill/>
+          <a:ln/>
+        </p:spPr>
+        <p:txBody>
+          <a:bodyPr wrap="square" lIns="0" tIns="0" rIns="0" bIns="0" rtlCol="0" anchor="ctr"/>
+          <a:lstStyle/>
+          <a:p>
+            <a:pPr algn="ctr" indent="0" marL="0">
+              <a:buNone/>
+            </a:pPr>
+            <a:r>
+              <a:rPr lang="en-US" sz="1600" b="1" dirty="0">
+                <a:solidFill>
+                  <a:srgbClr val="FFFFFF"/>
+                </a:solidFill>
+                <a:latin typeface="Trebuchet MS" pitchFamily="34" charset="0"/>
+                <a:ea typeface="Trebuchet MS" pitchFamily="34" charset="-122"/>
+                <a:cs typeface="Trebuchet MS" pitchFamily="34" charset="-120"/>
+              </a:rPr>
+              <a:t>5</a:t>
+            </a:r>
+            <a:endParaRPr lang="en-US" sz="1600" dirty="0"/>
+          </a:p>
+        </p:txBody>
+      </p:sp>
+      <p:sp>
+        <p:nvSpPr>
+          <p:cNvPr id="23" name="Text 21"/>
+          <p:cNvSpPr/>
+          <p:nvPr/>
+        </p:nvSpPr>
+        <p:spPr>
+          <a:xfrm>
+            <a:off x="1051560" y="3474720"/>
+            <a:ext cx="7498080" cy="566928"/>
+          </a:xfrm>
+          <a:prstGeom prst="rect">
+            <a:avLst/>
+          </a:prstGeom>
+          <a:noFill/>
+          <a:ln/>
+        </p:spPr>
+        <p:txBody>
+          <a:bodyPr wrap="square" lIns="0" tIns="0" rIns="0" bIns="0" rtlCol="0" anchor="ctr"/>
+          <a:lstStyle/>
+          <a:p>
+            <a:pPr indent="0" marL="0">
+              <a:buNone/>
+            </a:pPr>
+            <a:r>
+              <a:rPr lang="en-US" sz="1100" dirty="0">
+                <a:solidFill>
+                  <a:srgbClr val="1A1A2E"/>
+                </a:solidFill>
+                <a:latin typeface="Calibri" pitchFamily="34" charset="0"/>
+                <a:ea typeface="Calibri" pitchFamily="34" charset="-122"/>
+                <a:cs typeface="Calibri" pitchFamily="34" charset="-120"/>
+              </a:rPr>
+              <a:t>Identifier 3 besoins IMPLICITES (RGPD, sauvegarde, historique...)</a:t>
+            </a:r>
+            <a:endParaRPr lang="en-US" sz="1100" dirty="0"/>
+          </a:p>
+        </p:txBody>
+      </p:sp>
+      <p:sp>
+        <p:nvSpPr>
+          <p:cNvPr id="24" name="Shape 22"/>
+          <p:cNvSpPr/>
+          <p:nvPr/>
+        </p:nvSpPr>
+        <p:spPr>
+          <a:xfrm>
+            <a:off x="457200" y="4114800"/>
+            <a:ext cx="8229600" cy="566928"/>
+          </a:xfrm>
+          <a:prstGeom prst="rect">
+            <a:avLst/>
+          </a:prstGeom>
+          <a:solidFill>
+            <a:srgbClr val="FFFFFF"/>
+          </a:solidFill>
+          <a:ln/>
+          <a:effectLst>
+            <a:outerShdw sx="100000" sy="100000" kx="0" ky="0" algn="bl" rotWithShape="0" blurRad="50800" dist="25400" dir="8100000">
+              <a:srgbClr val="000000">
+                <a:alpha val="12000"/>
+              </a:srgbClr>
+            </a:outerShdw>
+          </a:effectLst>
+        </p:spPr>
+      </p:sp>
+      <p:sp>
+        <p:nvSpPr>
+          <p:cNvPr id="25" name="Shape 23"/>
+          <p:cNvSpPr/>
+          <p:nvPr/>
+        </p:nvSpPr>
+        <p:spPr>
+          <a:xfrm>
+            <a:off x="457200" y="4114800"/>
+            <a:ext cx="457200" cy="566928"/>
+          </a:xfrm>
+          <a:prstGeom prst="rect">
+            <a:avLst/>
+          </a:prstGeom>
+          <a:solidFill>
+            <a:srgbClr val="FF6F00"/>
+          </a:solidFill>
+          <a:ln/>
+        </p:spPr>
+      </p:sp>
+      <p:sp>
+        <p:nvSpPr>
+          <p:cNvPr id="26" name="Text 24"/>
+          <p:cNvSpPr/>
+          <p:nvPr/>
+        </p:nvSpPr>
+        <p:spPr>
+          <a:xfrm>
+            <a:off x="457200" y="4114800"/>
+            <a:ext cx="457200" cy="566928"/>
+          </a:xfrm>
+          <a:prstGeom prst="rect">
+            <a:avLst/>
+          </a:prstGeom>
+          <a:noFill/>
+          <a:ln/>
+        </p:spPr>
+        <p:txBody>
+          <a:bodyPr wrap="square" lIns="0" tIns="0" rIns="0" bIns="0" rtlCol="0" anchor="ctr"/>
+          <a:lstStyle/>
+          <a:p>
+            <a:pPr algn="ctr" indent="0" marL="0">
+              <a:buNone/>
+            </a:pPr>
+            <a:r>
+              <a:rPr lang="en-US" sz="1600" b="1" dirty="0">
+                <a:solidFill>
+                  <a:srgbClr val="FFFFFF"/>
+                </a:solidFill>
+                <a:latin typeface="Trebuchet MS" pitchFamily="34" charset="0"/>
+                <a:ea typeface="Trebuchet MS" pitchFamily="34" charset="-122"/>
+                <a:cs typeface="Trebuchet MS" pitchFamily="34" charset="-120"/>
+              </a:rPr>
+              <a:t>6</a:t>
+            </a:r>
+            <a:endParaRPr lang="en-US" sz="1600" dirty="0"/>
+          </a:p>
+        </p:txBody>
+      </p:sp>
+      <p:sp>
+        <p:nvSpPr>
+          <p:cNvPr id="27" name="Text 25"/>
+          <p:cNvSpPr/>
+          <p:nvPr/>
+        </p:nvSpPr>
+        <p:spPr>
+          <a:xfrm>
+            <a:off x="1051560" y="4114800"/>
+            <a:ext cx="7498080" cy="566928"/>
+          </a:xfrm>
+          <a:prstGeom prst="rect">
+            <a:avLst/>
+          </a:prstGeom>
+          <a:noFill/>
+          <a:ln/>
+        </p:spPr>
+        <p:txBody>
+          <a:bodyPr wrap="square" lIns="0" tIns="0" rIns="0" bIns="0" rtlCol="0" anchor="ctr"/>
+          <a:lstStyle/>
+          <a:p>
+            <a:pPr indent="0" marL="0">
+              <a:buNone/>
+            </a:pPr>
+            <a:r>
+              <a:rPr lang="en-US" sz="1100" dirty="0">
+                <a:solidFill>
+                  <a:srgbClr val="1A1A2E"/>
+                </a:solidFill>
+                <a:latin typeface="Calibri" pitchFamily="34" charset="0"/>
+                <a:ea typeface="Calibri" pitchFamily="34" charset="-122"/>
+                <a:cs typeface="Calibri" pitchFamily="34" charset="-120"/>
+              </a:rPr>
+              <a:t>DÉFI : rédiger le cahier des charges complet (template fourni)</a:t>
+            </a:r>
+            <a:endParaRPr lang="en-US" sz="1100" dirty="0"/>
+          </a:p>
+        </p:txBody>
+      </p:sp>
+    </p:spTree>
+  </p:cSld>
+  <p:clrMapOvr>
+    <a:masterClrMapping/>
+  </p:clrMapOvr>
+</p:sld>
+</file>
+
+<file path=ppt/slides/slide9.xml><?xml version="1.0" encoding="utf-8"?>
+<p:sld xmlns:a="http://schemas.openxmlformats.org/drawingml/2006/main" xmlns:r="http://schemas.openxmlformats.org/officeDocument/2006/relationships" xmlns:p="http://schemas.openxmlformats.org/presentationml/2006/main">
+  <p:cSld name="Slide 9">
+    <p:bg>
+      <p:bgPr>
+        <a:solidFill>
+          <a:srgbClr val="1B5E20"/>
+        </a:solidFill>
+      </p:bgPr>
+    </p:bg>
+    <p:spTree>
+      <p:nvGrpSpPr>
+        <p:cNvPr id="1" name=""/>
+        <p:cNvGrpSpPr/>
+        <p:nvPr/>
+      </p:nvGrpSpPr>
+      <p:grpSpPr>
+        <a:xfrm>
+          <a:off x="0" y="0"/>
+          <a:ext cx="0" cy="0"/>
+          <a:chOff x="0" y="0"/>
+          <a:chExt cx="0" cy="0"/>
+        </a:xfrm>
+      </p:grpSpPr>
+      <p:sp>
+        <p:nvSpPr>
+          <p:cNvPr id="2" name="Text 0"/>
+          <p:cNvSpPr/>
+          <p:nvPr/>
+        </p:nvSpPr>
+        <p:spPr>
+          <a:xfrm>
+            <a:off x="3840480" y="457200"/>
+            <a:ext cx="1463040" cy="1097280"/>
+          </a:xfrm>
+          <a:prstGeom prst="rect">
+            <a:avLst/>
+          </a:prstGeom>
+          <a:noFill/>
+          <a:ln/>
+        </p:spPr>
+        <p:txBody>
+          <a:bodyPr wrap="square" lIns="0" tIns="0" rIns="0" bIns="0" rtlCol="0" anchor="ctr"/>
+          <a:lstStyle/>
+          <a:p>
+            <a:pPr algn="ctr" indent="0" marL="0">
+              <a:buNone/>
+            </a:pPr>
+            <a:r>
+              <a:rPr lang="en-US" sz="6000" dirty="0">
+                <a:solidFill>
+                  <a:srgbClr val="000000"/>
+                </a:solidFill>
+              </a:rPr>
+              <a:t>🎮</a:t>
+            </a:r>
+            <a:endParaRPr lang="en-US" sz="6000" dirty="0"/>
+          </a:p>
+        </p:txBody>
+      </p:sp>
+      <p:sp>
+        <p:nvSpPr>
+          <p:cNvPr id="3" name="Text 1"/>
+          <p:cNvSpPr/>
+          <p:nvPr/>
+        </p:nvSpPr>
+        <p:spPr>
+          <a:xfrm>
+            <a:off x="457200" y="1645920"/>
+            <a:ext cx="8229600" cy="548640"/>
+          </a:xfrm>
+          <a:prstGeom prst="rect">
+            <a:avLst/>
+          </a:prstGeom>
+          <a:noFill/>
+          <a:ln/>
+        </p:spPr>
+        <p:txBody>
+          <a:bodyPr wrap="square" lIns="0" tIns="0" rIns="0" bIns="0" rtlCol="0" anchor="ctr"/>
+          <a:lstStyle/>
+          <a:p>
+            <a:pPr algn="ctr" indent="0" marL="0">
+              <a:buNone/>
+            </a:pPr>
+            <a:r>
+              <a:rPr lang="en-US" sz="2600" b="1" dirty="0">
+                <a:solidFill>
+                  <a:srgbClr val="FFFFFF"/>
+                </a:solidFill>
+                <a:latin typeface="Trebuchet MS" pitchFamily="34" charset="0"/>
+                <a:ea typeface="Trebuchet MS" pitchFamily="34" charset="-122"/>
+                <a:cs typeface="Trebuchet MS" pitchFamily="34" charset="-120"/>
+              </a:rPr>
+              <a:t>Mini-jeu : L'Usine à Besoins</a:t>
+            </a:r>
+            <a:endParaRPr lang="en-US" sz="2600" dirty="0"/>
+          </a:p>
+        </p:txBody>
+      </p:sp>
+      <p:sp>
+        <p:nvSpPr>
+          <p:cNvPr id="4" name="Text 2"/>
+          <p:cNvSpPr/>
+          <p:nvPr/>
+        </p:nvSpPr>
+        <p:spPr>
+          <a:xfrm>
+            <a:off x="1371600" y="2286000"/>
+            <a:ext cx="6400800" cy="731520"/>
+          </a:xfrm>
+          <a:prstGeom prst="rect">
+            <a:avLst/>
+          </a:prstGeom>
+          <a:noFill/>
+          <a:ln/>
+        </p:spPr>
+        <p:txBody>
+          <a:bodyPr wrap="square" lIns="0" tIns="0" rIns="0" bIns="0" rtlCol="0" anchor="ctr"/>
+          <a:lstStyle/>
+          <a:p>
+            <a:pPr algn="ctr" indent="0" marL="0">
+              <a:buNone/>
+            </a:pPr>
+            <a:r>
+              <a:rPr lang="en-US" sz="1400" dirty="0">
+                <a:solidFill>
+                  <a:srgbClr val="CCCCCC"/>
+                </a:solidFill>
+                <a:latin typeface="Calibri" pitchFamily="34" charset="0"/>
+                <a:ea typeface="Calibri" pitchFamily="34" charset="-122"/>
+                <a:cs typeface="Calibri" pitchFamily="34" charset="-120"/>
+              </a:rPr>
+              <a:t>Triez les demandes : besoin utilisateur ou système ?</a:t>
+            </a:r>
+            <a:endParaRPr lang="en-US" sz="1400" dirty="0"/>
+          </a:p>
+        </p:txBody>
+      </p:sp>
+      <p:sp>
+        <p:nvSpPr>
+          <p:cNvPr id="5" name="Shape 3"/>
+          <p:cNvSpPr/>
+          <p:nvPr/>
+        </p:nvSpPr>
+        <p:spPr>
+          <a:xfrm>
+            <a:off x="2286000" y="3291840"/>
+            <a:ext cx="4572000" cy="548640"/>
+          </a:xfrm>
+          <a:prstGeom prst="rect">
+            <a:avLst/>
+          </a:prstGeom>
+          <a:solidFill>
+            <a:srgbClr val="FF6F00"/>
+          </a:solidFill>
+          <a:ln/>
+        </p:spPr>
+      </p:sp>
+      <p:sp>
+        <p:nvSpPr>
+          <p:cNvPr id="6" name="Text 4"/>
+          <p:cNvSpPr/>
+          <p:nvPr/>
+        </p:nvSpPr>
+        <p:spPr>
+          <a:xfrm>
+            <a:off x="2286000" y="3291840"/>
+            <a:ext cx="4572000" cy="548640"/>
+          </a:xfrm>
+          <a:prstGeom prst="rect">
+            <a:avLst/>
+          </a:prstGeom>
+          <a:noFill/>
+          <a:ln/>
+        </p:spPr>
+        <p:txBody>
+          <a:bodyPr wrap="square" lIns="0" tIns="0" rIns="0" bIns="0" rtlCol="0" anchor="ctr"/>
+          <a:lstStyle/>
+          <a:p>
+            <a:pPr algn="ctr" indent="0" marL="0">
+              <a:buNone/>
+            </a:pPr>
+            <a:r>
+              <a:rPr lang="en-US" sz="1800" b="1" dirty="0">
+                <a:solidFill>
+                  <a:srgbClr val="FFFFFF"/>
+                </a:solidFill>
+                <a:latin typeface="Trebuchet MS" pitchFamily="34" charset="0"/>
+                <a:ea typeface="Trebuchet MS" pitchFamily="34" charset="-122"/>
+                <a:cs typeface="Trebuchet MS" pitchFamily="34" charset="-120"/>
+              </a:rPr>
+              <a:t>▶  Lancer le jeu</a:t>
+            </a:r>
+            <a:endParaRPr lang="en-US" sz="1800" dirty="0"/>
+          </a:p>
+        </p:txBody>
+      </p:sp>
+      <p:sp>
+        <p:nvSpPr>
+          <p:cNvPr id="7" name="Text 5"/>
+          <p:cNvSpPr/>
+          <p:nvPr/>
+        </p:nvSpPr>
+        <p:spPr>
+          <a:xfrm>
+            <a:off x="914400" y="4114800"/>
+            <a:ext cx="7315200" cy="365760"/>
+          </a:xfrm>
+          <a:prstGeom prst="rect">
+            <a:avLst/>
+          </a:prstGeom>
+          <a:noFill/>
+          <a:ln/>
+        </p:spPr>
+        <p:txBody>
+          <a:bodyPr wrap="square" lIns="0" tIns="0" rIns="0" bIns="0" rtlCol="0" anchor="ctr"/>
+          <a:lstStyle/>
+          <a:p>
+            <a:pPr algn="ctr" indent="0" marL="0">
+              <a:buNone/>
+            </a:pPr>
+            <a:r>
+              <a:rPr lang="en-US" sz="1100" dirty="0">
+                <a:solidFill>
+                  <a:srgbClr val="8888AA"/>
+                </a:solidFill>
+                <a:latin typeface="Calibri" pitchFamily="34" charset="0"/>
+                <a:ea typeface="Calibri" pitchFamily="34" charset="-122"/>
+                <a:cs typeface="Calibri" pitchFamily="34" charset="-120"/>
+              </a:rPr>
+              <a:t>Score + Correction automatique + Historique</a:t>
+            </a:r>
+            <a:endParaRPr lang="en-US" sz="1100" dirty="0"/>
           </a:p>
         </p:txBody>
       </p:sp>
